--- a/figures/fig5/fig5.pptx
+++ b/figures/fig5/fig5.pptx
@@ -9,7 +9,7 @@
   </p:notesMasterIdLst>
   <p:sldIdLst>
     <p:sldId id="257" r:id="rId2"/>
-    <p:sldId id="256" r:id="rId3"/>
+    <p:sldId id="258" r:id="rId3"/>
   </p:sldIdLst>
   <p:sldSz cx="36576000" cy="32918400"/>
   <p:notesSz cx="7010400" cy="9296400"/>
@@ -1462,7 +1462,13 @@
   <p:cSld>
     <p:spTree>
       <p:nvGrpSpPr>
-        <p:cNvPr id="1" name="Shape 84"/>
+        <p:cNvPr id="1" name="Shape 84">
+          <a:extLst>
+            <a:ext uri="{FF2B5EF4-FFF2-40B4-BE49-F238E27FC236}">
+              <a16:creationId xmlns:a16="http://schemas.microsoft.com/office/drawing/2014/main" id="{45CFCE6A-9451-8C86-7CBB-1843F267BC78}"/>
+            </a:ext>
+          </a:extLst>
+        </p:cNvPr>
         <p:cNvGrpSpPr/>
         <p:nvPr/>
       </p:nvGrpSpPr>
@@ -1476,7 +1482,13 @@
       </p:grpSpPr>
       <p:sp>
         <p:nvSpPr>
-          <p:cNvPr id="85" name="Google Shape;85;p1:notes"/>
+          <p:cNvPr id="85" name="Google Shape;85;p1:notes">
+            <a:extLst>
+              <a:ext uri="{FF2B5EF4-FFF2-40B4-BE49-F238E27FC236}">
+                <a16:creationId xmlns:a16="http://schemas.microsoft.com/office/drawing/2014/main" id="{3072C67B-8D2F-3AAE-394F-2C43DD5AB6CE}"/>
+              </a:ext>
+            </a:extLst>
+          </p:cNvPr>
           <p:cNvSpPr>
             <a:spLocks noGrp="1" noRot="1" noChangeAspect="1"/>
           </p:cNvSpPr>
@@ -1527,7 +1539,13 @@
       </p:sp>
       <p:sp>
         <p:nvSpPr>
-          <p:cNvPr id="86" name="Google Shape;86;p1:notes"/>
+          <p:cNvPr id="86" name="Google Shape;86;p1:notes">
+            <a:extLst>
+              <a:ext uri="{FF2B5EF4-FFF2-40B4-BE49-F238E27FC236}">
+                <a16:creationId xmlns:a16="http://schemas.microsoft.com/office/drawing/2014/main" id="{D581213B-582B-A4B3-0BE5-76B971FD3DFB}"/>
+              </a:ext>
+            </a:extLst>
+          </p:cNvPr>
           <p:cNvSpPr txBox="1">
             <a:spLocks noGrp="1"/>
           </p:cNvSpPr>
@@ -1569,7 +1587,13 @@
       </p:sp>
       <p:sp>
         <p:nvSpPr>
-          <p:cNvPr id="87" name="Google Shape;87;p1:notes"/>
+          <p:cNvPr id="87" name="Google Shape;87;p1:notes">
+            <a:extLst>
+              <a:ext uri="{FF2B5EF4-FFF2-40B4-BE49-F238E27FC236}">
+                <a16:creationId xmlns:a16="http://schemas.microsoft.com/office/drawing/2014/main" id="{D9349ABE-2577-ABC2-60A2-ED6D28F81341}"/>
+              </a:ext>
+            </a:extLst>
+          </p:cNvPr>
           <p:cNvSpPr txBox="1">
             <a:spLocks noGrp="1"/>
           </p:cNvSpPr>
@@ -1630,6 +1654,11 @@
         </p:txBody>
       </p:sp>
     </p:spTree>
+    <p:extLst>
+      <p:ext uri="{BB962C8B-B14F-4D97-AF65-F5344CB8AC3E}">
+        <p14:creationId xmlns:p14="http://schemas.microsoft.com/office/powerpoint/2010/main" val="1222357178"/>
+      </p:ext>
+    </p:extLst>
   </p:cSld>
   <p:clrMapOvr>
     <a:masterClrMapping/>
@@ -11920,7 +11949,7 @@
           <p:cNvPr id="3" name="Graphic 2">
             <a:extLst>
               <a:ext uri="{FF2B5EF4-FFF2-40B4-BE49-F238E27FC236}">
-                <a16:creationId xmlns:a16="http://schemas.microsoft.com/office/drawing/2014/main" id="{6C3B1818-E129-ED6E-3E61-D8C19D286680}"/>
+                <a16:creationId xmlns:a16="http://schemas.microsoft.com/office/drawing/2014/main" id="{BD4FF4B5-F40C-1277-82C3-AC2200357785}"/>
               </a:ext>
             </a:extLst>
           </p:cNvPr>
@@ -11937,15 +11966,15 @@
               </a:ext>
             </a:extLst>
           </a:blip>
-          <a:srcRect l="2908" r="14216"/>
+          <a:srcRect l="1363" r="1770" b="3275"/>
           <a:stretch>
             <a:fillRect/>
           </a:stretch>
         </p:blipFill>
         <p:spPr>
           <a:xfrm>
-            <a:off x="2514600" y="8520080"/>
-            <a:ext cx="30403800" cy="15878239"/>
+            <a:off x="498474" y="6511332"/>
+            <a:ext cx="35429825" cy="19244268"/>
           </a:xfrm>
           <a:prstGeom prst="rect">
             <a:avLst/>
@@ -11978,7 +12007,13 @@
     </p:bg>
     <p:spTree>
       <p:nvGrpSpPr>
-        <p:cNvPr id="1" name="Shape 88"/>
+        <p:cNvPr id="1" name="Shape 88">
+          <a:extLst>
+            <a:ext uri="{FF2B5EF4-FFF2-40B4-BE49-F238E27FC236}">
+              <a16:creationId xmlns:a16="http://schemas.microsoft.com/office/drawing/2014/main" id="{888707C2-3318-A9CA-E087-E746027FB9C0}"/>
+            </a:ext>
+          </a:extLst>
+        </p:cNvPr>
         <p:cNvGrpSpPr/>
         <p:nvPr/>
       </p:nvGrpSpPr>
@@ -11992,10 +12027,10 @@
       </p:grpSpPr>
       <p:pic>
         <p:nvPicPr>
-          <p:cNvPr id="3" name="Picture 2">
+          <p:cNvPr id="19" name="Picture 18">
             <a:extLst>
               <a:ext uri="{FF2B5EF4-FFF2-40B4-BE49-F238E27FC236}">
-                <a16:creationId xmlns:a16="http://schemas.microsoft.com/office/drawing/2014/main" id="{FD573FA7-8B6E-5D01-4A09-55E20F7D9319}"/>
+                <a16:creationId xmlns:a16="http://schemas.microsoft.com/office/drawing/2014/main" id="{C5FD35D8-9E5D-55C8-F4D0-FA18897F521B}"/>
               </a:ext>
             </a:extLst>
           </p:cNvPr>
@@ -12006,15 +12041,15 @@
         </p:nvPicPr>
         <p:blipFill>
           <a:blip r:embed="rId3"/>
-          <a:srcRect l="18142" t="14516" r="27112" b="21935"/>
+          <a:srcRect l="20408" t="14365" r="27480" b="21992"/>
           <a:stretch>
             <a:fillRect/>
           </a:stretch>
         </p:blipFill>
         <p:spPr>
           <a:xfrm>
-            <a:off x="17285599" y="16697376"/>
-            <a:ext cx="4009834" cy="2316628"/>
+            <a:off x="9819833" y="16665358"/>
+            <a:ext cx="3334052" cy="2320069"/>
           </a:xfrm>
           <a:prstGeom prst="rect">
             <a:avLst/>
@@ -12023,10 +12058,10 @@
       </p:pic>
       <p:pic>
         <p:nvPicPr>
-          <p:cNvPr id="5" name="Picture 4">
+          <p:cNvPr id="23" name="Picture 22">
             <a:extLst>
               <a:ext uri="{FF2B5EF4-FFF2-40B4-BE49-F238E27FC236}">
-                <a16:creationId xmlns:a16="http://schemas.microsoft.com/office/drawing/2014/main" id="{1745FB53-4D69-1D05-1745-E097DAEFA275}"/>
+                <a16:creationId xmlns:a16="http://schemas.microsoft.com/office/drawing/2014/main" id="{E9F90D9A-5BAA-A6AD-BF8D-427963088A92}"/>
               </a:ext>
             </a:extLst>
           </p:cNvPr>
@@ -12037,15 +12072,15 @@
         </p:nvPicPr>
         <p:blipFill>
           <a:blip r:embed="rId4"/>
-          <a:srcRect l="18142" t="14714" r="27112" b="21934"/>
+          <a:srcRect l="21053" t="14440" r="26834" b="21916"/>
           <a:stretch>
             <a:fillRect/>
           </a:stretch>
         </p:blipFill>
         <p:spPr>
           <a:xfrm>
-            <a:off x="11915966" y="16704588"/>
-            <a:ext cx="4009834" cy="2309444"/>
+            <a:off x="9861113" y="13595349"/>
+            <a:ext cx="3334052" cy="2320069"/>
           </a:xfrm>
           <a:prstGeom prst="rect">
             <a:avLst/>
@@ -12054,10 +12089,10 @@
       </p:pic>
       <p:pic>
         <p:nvPicPr>
-          <p:cNvPr id="7" name="Picture 6">
+          <p:cNvPr id="25" name="Picture 24">
             <a:extLst>
               <a:ext uri="{FF2B5EF4-FFF2-40B4-BE49-F238E27FC236}">
-                <a16:creationId xmlns:a16="http://schemas.microsoft.com/office/drawing/2014/main" id="{4A55C811-40C6-B5F2-3577-51D82F885D36}"/>
+                <a16:creationId xmlns:a16="http://schemas.microsoft.com/office/drawing/2014/main" id="{E030E5A2-E92C-C40A-E253-ED39327BEB5E}"/>
               </a:ext>
             </a:extLst>
           </p:cNvPr>
@@ -12068,15 +12103,15 @@
         </p:nvPicPr>
         <p:blipFill>
           <a:blip r:embed="rId5"/>
-          <a:srcRect l="18383" t="14517" r="27112" b="21934"/>
+          <a:srcRect l="20420" t="14440" r="27467" b="20905"/>
           <a:stretch>
             <a:fillRect/>
           </a:stretch>
         </p:blipFill>
         <p:spPr>
           <a:xfrm>
-            <a:off x="11933646" y="13670280"/>
-            <a:ext cx="3992154" cy="2316628"/>
+            <a:off x="14722808" y="13595349"/>
+            <a:ext cx="3334052" cy="2356939"/>
           </a:xfrm>
           <a:prstGeom prst="rect">
             <a:avLst/>
@@ -12085,10 +12120,10 @@
       </p:pic>
       <p:pic>
         <p:nvPicPr>
-          <p:cNvPr id="9" name="Picture 8">
+          <p:cNvPr id="30" name="Picture 29">
             <a:extLst>
               <a:ext uri="{FF2B5EF4-FFF2-40B4-BE49-F238E27FC236}">
-                <a16:creationId xmlns:a16="http://schemas.microsoft.com/office/drawing/2014/main" id="{9CF7DB54-1722-AC72-03B4-2866709F2833}"/>
+                <a16:creationId xmlns:a16="http://schemas.microsoft.com/office/drawing/2014/main" id="{091EEE0F-FACF-9C33-3851-7B6AC4A932BE}"/>
               </a:ext>
             </a:extLst>
           </p:cNvPr>
@@ -12099,15 +12134,15 @@
         </p:nvPicPr>
         <p:blipFill>
           <a:blip r:embed="rId6"/>
-          <a:srcRect l="18362" t="14517" r="27112" b="21934"/>
+          <a:srcRect l="21058" t="13906" r="27467" b="21992"/>
           <a:stretch>
             <a:fillRect/>
           </a:stretch>
         </p:blipFill>
         <p:spPr>
           <a:xfrm>
-            <a:off x="17301761" y="13670274"/>
-            <a:ext cx="3993671" cy="2316628"/>
+            <a:off x="14763630" y="16648612"/>
+            <a:ext cx="3293230" cy="2336815"/>
           </a:xfrm>
           <a:prstGeom prst="rect">
             <a:avLst/>
@@ -12116,10 +12151,10 @@
       </p:pic>
       <p:sp>
         <p:nvSpPr>
-          <p:cNvPr id="4" name="TextBox 3">
+          <p:cNvPr id="31" name="TextBox 30">
             <a:extLst>
               <a:ext uri="{FF2B5EF4-FFF2-40B4-BE49-F238E27FC236}">
-                <a16:creationId xmlns:a16="http://schemas.microsoft.com/office/drawing/2014/main" id="{B28FCD40-10C3-5F50-C35A-12E4AC9F32AF}"/>
+                <a16:creationId xmlns:a16="http://schemas.microsoft.com/office/drawing/2014/main" id="{2410C392-4511-5330-48DC-1AA35F808C54}"/>
               </a:ext>
             </a:extLst>
           </p:cNvPr>
@@ -12128,8 +12163,908 @@
         </p:nvSpPr>
         <p:spPr>
           <a:xfrm>
-            <a:off x="12068969" y="15974218"/>
-            <a:ext cx="339726" cy="276999"/>
+            <a:off x="13130410" y="16761301"/>
+            <a:ext cx="1684020" cy="230832"/>
+          </a:xfrm>
+          <a:prstGeom prst="rect">
+            <a:avLst/>
+          </a:prstGeom>
+          <a:noFill/>
+        </p:spPr>
+        <p:txBody>
+          <a:bodyPr wrap="square" rtlCol="0">
+            <a:spAutoFit/>
+          </a:bodyPr>
+          <a:lstStyle/>
+          <a:p>
+            <a:pPr algn="r"/>
+            <a:r>
+              <a:rPr lang="en-US" sz="900" dirty="0"/>
+              <a:t>DNA age</a:t>
+            </a:r>
+          </a:p>
+        </p:txBody>
+      </p:sp>
+      <p:sp>
+        <p:nvSpPr>
+          <p:cNvPr id="32" name="TextBox 31">
+            <a:extLst>
+              <a:ext uri="{FF2B5EF4-FFF2-40B4-BE49-F238E27FC236}">
+                <a16:creationId xmlns:a16="http://schemas.microsoft.com/office/drawing/2014/main" id="{2F6171B2-4D8C-D163-8A37-A4B27E57624E}"/>
+              </a:ext>
+            </a:extLst>
+          </p:cNvPr>
+          <p:cNvSpPr txBox="1"/>
+          <p:nvPr/>
+        </p:nvSpPr>
+        <p:spPr>
+          <a:xfrm>
+            <a:off x="13130410" y="16899413"/>
+            <a:ext cx="1684020" cy="230832"/>
+          </a:xfrm>
+          <a:prstGeom prst="rect">
+            <a:avLst/>
+          </a:prstGeom>
+          <a:noFill/>
+        </p:spPr>
+        <p:txBody>
+          <a:bodyPr wrap="square" rtlCol="0">
+            <a:spAutoFit/>
+          </a:bodyPr>
+          <a:lstStyle/>
+          <a:p>
+            <a:pPr algn="r"/>
+            <a:r>
+              <a:rPr lang="en-US" sz="900" dirty="0"/>
+              <a:t>DNA age x prop.</a:t>
+            </a:r>
+          </a:p>
+        </p:txBody>
+      </p:sp>
+      <p:sp>
+        <p:nvSpPr>
+          <p:cNvPr id="36" name="TextBox 35">
+            <a:extLst>
+              <a:ext uri="{FF2B5EF4-FFF2-40B4-BE49-F238E27FC236}">
+                <a16:creationId xmlns:a16="http://schemas.microsoft.com/office/drawing/2014/main" id="{E8AA23AD-EAC5-6D61-AE97-77E3AF46CEEB}"/>
+              </a:ext>
+            </a:extLst>
+          </p:cNvPr>
+          <p:cNvSpPr txBox="1"/>
+          <p:nvPr/>
+        </p:nvSpPr>
+        <p:spPr>
+          <a:xfrm>
+            <a:off x="13130410" y="17037525"/>
+            <a:ext cx="1684020" cy="230832"/>
+          </a:xfrm>
+          <a:prstGeom prst="rect">
+            <a:avLst/>
+          </a:prstGeom>
+          <a:noFill/>
+        </p:spPr>
+        <p:txBody>
+          <a:bodyPr wrap="square" rtlCol="0">
+            <a:spAutoFit/>
+          </a:bodyPr>
+          <a:lstStyle/>
+          <a:p>
+            <a:pPr algn="r"/>
+            <a:r>
+              <a:rPr lang="en-US" sz="900" dirty="0"/>
+              <a:t>LINE age</a:t>
+            </a:r>
+          </a:p>
+        </p:txBody>
+      </p:sp>
+      <p:sp>
+        <p:nvSpPr>
+          <p:cNvPr id="37" name="TextBox 36">
+            <a:extLst>
+              <a:ext uri="{FF2B5EF4-FFF2-40B4-BE49-F238E27FC236}">
+                <a16:creationId xmlns:a16="http://schemas.microsoft.com/office/drawing/2014/main" id="{6015D9E4-B2C6-90A1-D193-3E8F30084E98}"/>
+              </a:ext>
+            </a:extLst>
+          </p:cNvPr>
+          <p:cNvSpPr txBox="1"/>
+          <p:nvPr/>
+        </p:nvSpPr>
+        <p:spPr>
+          <a:xfrm>
+            <a:off x="13130410" y="17175637"/>
+            <a:ext cx="1684020" cy="230832"/>
+          </a:xfrm>
+          <a:prstGeom prst="rect">
+            <a:avLst/>
+          </a:prstGeom>
+          <a:noFill/>
+        </p:spPr>
+        <p:txBody>
+          <a:bodyPr wrap="square" rtlCol="0">
+            <a:spAutoFit/>
+          </a:bodyPr>
+          <a:lstStyle/>
+          <a:p>
+            <a:pPr algn="r"/>
+            <a:r>
+              <a:rPr lang="en-US" sz="900" dirty="0"/>
+              <a:t>LTR age x prop.</a:t>
+            </a:r>
+          </a:p>
+        </p:txBody>
+      </p:sp>
+      <p:sp>
+        <p:nvSpPr>
+          <p:cNvPr id="38" name="TextBox 37">
+            <a:extLst>
+              <a:ext uri="{FF2B5EF4-FFF2-40B4-BE49-F238E27FC236}">
+                <a16:creationId xmlns:a16="http://schemas.microsoft.com/office/drawing/2014/main" id="{6D75525C-1F6A-1BDE-8836-B8462CB9EEFB}"/>
+              </a:ext>
+            </a:extLst>
+          </p:cNvPr>
+          <p:cNvSpPr txBox="1"/>
+          <p:nvPr/>
+        </p:nvSpPr>
+        <p:spPr>
+          <a:xfrm>
+            <a:off x="13130410" y="17313749"/>
+            <a:ext cx="1684020" cy="230832"/>
+          </a:xfrm>
+          <a:prstGeom prst="rect">
+            <a:avLst/>
+          </a:prstGeom>
+          <a:noFill/>
+        </p:spPr>
+        <p:txBody>
+          <a:bodyPr wrap="square" rtlCol="0">
+            <a:spAutoFit/>
+          </a:bodyPr>
+          <a:lstStyle/>
+          <a:p>
+            <a:pPr algn="r"/>
+            <a:r>
+              <a:rPr lang="en-US" sz="900" dirty="0"/>
+              <a:t>Others age</a:t>
+            </a:r>
+          </a:p>
+        </p:txBody>
+      </p:sp>
+      <p:sp>
+        <p:nvSpPr>
+          <p:cNvPr id="56" name="TextBox 55">
+            <a:extLst>
+              <a:ext uri="{FF2B5EF4-FFF2-40B4-BE49-F238E27FC236}">
+                <a16:creationId xmlns:a16="http://schemas.microsoft.com/office/drawing/2014/main" id="{B998515C-07B0-1DEC-8115-3443BD05BE68}"/>
+              </a:ext>
+            </a:extLst>
+          </p:cNvPr>
+          <p:cNvSpPr txBox="1"/>
+          <p:nvPr/>
+        </p:nvSpPr>
+        <p:spPr>
+          <a:xfrm>
+            <a:off x="13130410" y="17451861"/>
+            <a:ext cx="1684020" cy="230832"/>
+          </a:xfrm>
+          <a:prstGeom prst="rect">
+            <a:avLst/>
+          </a:prstGeom>
+          <a:noFill/>
+        </p:spPr>
+        <p:txBody>
+          <a:bodyPr wrap="square" rtlCol="0">
+            <a:spAutoFit/>
+          </a:bodyPr>
+          <a:lstStyle/>
+          <a:p>
+            <a:pPr algn="r"/>
+            <a:r>
+              <a:rPr lang="en-US" sz="900" dirty="0"/>
+              <a:t>Others age x prop.</a:t>
+            </a:r>
+          </a:p>
+        </p:txBody>
+      </p:sp>
+      <p:sp>
+        <p:nvSpPr>
+          <p:cNvPr id="58" name="TextBox 57">
+            <a:extLst>
+              <a:ext uri="{FF2B5EF4-FFF2-40B4-BE49-F238E27FC236}">
+                <a16:creationId xmlns:a16="http://schemas.microsoft.com/office/drawing/2014/main" id="{CA0E7F28-443B-A2AC-176D-7DBD7F83B072}"/>
+              </a:ext>
+            </a:extLst>
+          </p:cNvPr>
+          <p:cNvSpPr txBox="1"/>
+          <p:nvPr/>
+        </p:nvSpPr>
+        <p:spPr>
+          <a:xfrm>
+            <a:off x="13131877" y="17589973"/>
+            <a:ext cx="1684020" cy="230832"/>
+          </a:xfrm>
+          <a:prstGeom prst="rect">
+            <a:avLst/>
+          </a:prstGeom>
+          <a:noFill/>
+        </p:spPr>
+        <p:txBody>
+          <a:bodyPr wrap="square" rtlCol="0">
+            <a:spAutoFit/>
+          </a:bodyPr>
+          <a:lstStyle/>
+          <a:p>
+            <a:pPr algn="r"/>
+            <a:r>
+              <a:rPr lang="en-US" sz="900" dirty="0"/>
+              <a:t>SINE age</a:t>
+            </a:r>
+          </a:p>
+        </p:txBody>
+      </p:sp>
+      <p:sp>
+        <p:nvSpPr>
+          <p:cNvPr id="59" name="TextBox 58">
+            <a:extLst>
+              <a:ext uri="{FF2B5EF4-FFF2-40B4-BE49-F238E27FC236}">
+                <a16:creationId xmlns:a16="http://schemas.microsoft.com/office/drawing/2014/main" id="{E563B509-27EF-29EB-AB3D-4CEBF4EAA433}"/>
+              </a:ext>
+            </a:extLst>
+          </p:cNvPr>
+          <p:cNvSpPr txBox="1"/>
+          <p:nvPr/>
+        </p:nvSpPr>
+        <p:spPr>
+          <a:xfrm>
+            <a:off x="13130410" y="17728085"/>
+            <a:ext cx="1684020" cy="230832"/>
+          </a:xfrm>
+          <a:prstGeom prst="rect">
+            <a:avLst/>
+          </a:prstGeom>
+          <a:noFill/>
+        </p:spPr>
+        <p:txBody>
+          <a:bodyPr wrap="square" rtlCol="0">
+            <a:spAutoFit/>
+          </a:bodyPr>
+          <a:lstStyle/>
+          <a:p>
+            <a:pPr algn="r"/>
+            <a:r>
+              <a:rPr lang="en-US" sz="900" dirty="0"/>
+              <a:t>Unknown age</a:t>
+            </a:r>
+          </a:p>
+        </p:txBody>
+      </p:sp>
+      <p:sp>
+        <p:nvSpPr>
+          <p:cNvPr id="60" name="TextBox 59">
+            <a:extLst>
+              <a:ext uri="{FF2B5EF4-FFF2-40B4-BE49-F238E27FC236}">
+                <a16:creationId xmlns:a16="http://schemas.microsoft.com/office/drawing/2014/main" id="{178D3284-8479-B1EE-5C7D-DB0F0745DB66}"/>
+              </a:ext>
+            </a:extLst>
+          </p:cNvPr>
+          <p:cNvSpPr txBox="1"/>
+          <p:nvPr/>
+        </p:nvSpPr>
+        <p:spPr>
+          <a:xfrm>
+            <a:off x="13130410" y="17862249"/>
+            <a:ext cx="1684020" cy="230832"/>
+          </a:xfrm>
+          <a:prstGeom prst="rect">
+            <a:avLst/>
+          </a:prstGeom>
+          <a:noFill/>
+        </p:spPr>
+        <p:txBody>
+          <a:bodyPr wrap="square" rtlCol="0">
+            <a:spAutoFit/>
+          </a:bodyPr>
+          <a:lstStyle/>
+          <a:p>
+            <a:pPr algn="r"/>
+            <a:r>
+              <a:rPr lang="en-US" sz="900" dirty="0"/>
+              <a:t>Unknown age x prop.</a:t>
+            </a:r>
+          </a:p>
+        </p:txBody>
+      </p:sp>
+      <p:sp>
+        <p:nvSpPr>
+          <p:cNvPr id="61" name="TextBox 60">
+            <a:extLst>
+              <a:ext uri="{FF2B5EF4-FFF2-40B4-BE49-F238E27FC236}">
+                <a16:creationId xmlns:a16="http://schemas.microsoft.com/office/drawing/2014/main" id="{577AFB92-0CEE-50C0-1672-4EE0E521D42D}"/>
+              </a:ext>
+            </a:extLst>
+          </p:cNvPr>
+          <p:cNvSpPr txBox="1"/>
+          <p:nvPr/>
+        </p:nvSpPr>
+        <p:spPr>
+          <a:xfrm>
+            <a:off x="13130410" y="18003556"/>
+            <a:ext cx="1684020" cy="230832"/>
+          </a:xfrm>
+          <a:prstGeom prst="rect">
+            <a:avLst/>
+          </a:prstGeom>
+          <a:noFill/>
+        </p:spPr>
+        <p:txBody>
+          <a:bodyPr wrap="square" rtlCol="0">
+            <a:spAutoFit/>
+          </a:bodyPr>
+          <a:lstStyle/>
+          <a:p>
+            <a:pPr algn="r"/>
+            <a:r>
+              <a:rPr lang="en-US" sz="900" dirty="0"/>
+              <a:t>LINE proportion</a:t>
+            </a:r>
+          </a:p>
+        </p:txBody>
+      </p:sp>
+      <p:sp>
+        <p:nvSpPr>
+          <p:cNvPr id="62" name="TextBox 61">
+            <a:extLst>
+              <a:ext uri="{FF2B5EF4-FFF2-40B4-BE49-F238E27FC236}">
+                <a16:creationId xmlns:a16="http://schemas.microsoft.com/office/drawing/2014/main" id="{85611B5F-9927-2CE2-6145-5DB590DF5C7D}"/>
+              </a:ext>
+            </a:extLst>
+          </p:cNvPr>
+          <p:cNvSpPr txBox="1"/>
+          <p:nvPr/>
+        </p:nvSpPr>
+        <p:spPr>
+          <a:xfrm>
+            <a:off x="13131878" y="18142421"/>
+            <a:ext cx="1684020" cy="230832"/>
+          </a:xfrm>
+          <a:prstGeom prst="rect">
+            <a:avLst/>
+          </a:prstGeom>
+          <a:noFill/>
+        </p:spPr>
+        <p:txBody>
+          <a:bodyPr wrap="square" rtlCol="0">
+            <a:spAutoFit/>
+          </a:bodyPr>
+          <a:lstStyle/>
+          <a:p>
+            <a:pPr algn="r"/>
+            <a:r>
+              <a:rPr lang="en-US" sz="900" dirty="0"/>
+              <a:t>LTR proportion</a:t>
+            </a:r>
+          </a:p>
+        </p:txBody>
+      </p:sp>
+      <p:sp>
+        <p:nvSpPr>
+          <p:cNvPr id="63" name="TextBox 62">
+            <a:extLst>
+              <a:ext uri="{FF2B5EF4-FFF2-40B4-BE49-F238E27FC236}">
+                <a16:creationId xmlns:a16="http://schemas.microsoft.com/office/drawing/2014/main" id="{17073772-114C-4DCE-D32C-542270626B80}"/>
+              </a:ext>
+            </a:extLst>
+          </p:cNvPr>
+          <p:cNvSpPr txBox="1"/>
+          <p:nvPr/>
+        </p:nvSpPr>
+        <p:spPr>
+          <a:xfrm>
+            <a:off x="13130410" y="18278966"/>
+            <a:ext cx="1684020" cy="230832"/>
+          </a:xfrm>
+          <a:prstGeom prst="rect">
+            <a:avLst/>
+          </a:prstGeom>
+          <a:noFill/>
+        </p:spPr>
+        <p:txBody>
+          <a:bodyPr wrap="square" rtlCol="0">
+            <a:spAutoFit/>
+          </a:bodyPr>
+          <a:lstStyle/>
+          <a:p>
+            <a:pPr algn="r"/>
+            <a:r>
+              <a:rPr lang="en-US" sz="900" dirty="0"/>
+              <a:t>Others proportion</a:t>
+            </a:r>
+          </a:p>
+        </p:txBody>
+      </p:sp>
+      <p:sp>
+        <p:nvSpPr>
+          <p:cNvPr id="64" name="TextBox 63">
+            <a:extLst>
+              <a:ext uri="{FF2B5EF4-FFF2-40B4-BE49-F238E27FC236}">
+                <a16:creationId xmlns:a16="http://schemas.microsoft.com/office/drawing/2014/main" id="{05116E87-0CF0-64E3-69EF-9FA6D57711B3}"/>
+              </a:ext>
+            </a:extLst>
+          </p:cNvPr>
+          <p:cNvSpPr txBox="1"/>
+          <p:nvPr/>
+        </p:nvSpPr>
+        <p:spPr>
+          <a:xfrm>
+            <a:off x="13130410" y="18417078"/>
+            <a:ext cx="1684020" cy="230832"/>
+          </a:xfrm>
+          <a:prstGeom prst="rect">
+            <a:avLst/>
+          </a:prstGeom>
+          <a:noFill/>
+        </p:spPr>
+        <p:txBody>
+          <a:bodyPr wrap="square" rtlCol="0">
+            <a:spAutoFit/>
+          </a:bodyPr>
+          <a:lstStyle/>
+          <a:p>
+            <a:pPr algn="r"/>
+            <a:r>
+              <a:rPr lang="en-US" sz="900" dirty="0"/>
+              <a:t>SINE proportion</a:t>
+            </a:r>
+          </a:p>
+        </p:txBody>
+      </p:sp>
+      <p:sp>
+        <p:nvSpPr>
+          <p:cNvPr id="65" name="TextBox 64">
+            <a:extLst>
+              <a:ext uri="{FF2B5EF4-FFF2-40B4-BE49-F238E27FC236}">
+                <a16:creationId xmlns:a16="http://schemas.microsoft.com/office/drawing/2014/main" id="{1A21A716-E86B-D606-2E34-B1D75AE912AD}"/>
+              </a:ext>
+            </a:extLst>
+          </p:cNvPr>
+          <p:cNvSpPr txBox="1"/>
+          <p:nvPr/>
+        </p:nvSpPr>
+        <p:spPr>
+          <a:xfrm>
+            <a:off x="13130410" y="18553623"/>
+            <a:ext cx="1684020" cy="230832"/>
+          </a:xfrm>
+          <a:prstGeom prst="rect">
+            <a:avLst/>
+          </a:prstGeom>
+          <a:noFill/>
+        </p:spPr>
+        <p:txBody>
+          <a:bodyPr wrap="square" rtlCol="0">
+            <a:spAutoFit/>
+          </a:bodyPr>
+          <a:lstStyle/>
+          <a:p>
+            <a:pPr algn="r"/>
+            <a:r>
+              <a:rPr lang="en-US" sz="900" dirty="0"/>
+              <a:t>Unknown proportion</a:t>
+            </a:r>
+          </a:p>
+        </p:txBody>
+      </p:sp>
+      <p:sp>
+        <p:nvSpPr>
+          <p:cNvPr id="66" name="TextBox 65">
+            <a:extLst>
+              <a:ext uri="{FF2B5EF4-FFF2-40B4-BE49-F238E27FC236}">
+                <a16:creationId xmlns:a16="http://schemas.microsoft.com/office/drawing/2014/main" id="{38F2962A-8CAC-9DB5-5D45-8C3CB7B2E682}"/>
+              </a:ext>
+            </a:extLst>
+          </p:cNvPr>
+          <p:cNvSpPr txBox="1"/>
+          <p:nvPr/>
+        </p:nvSpPr>
+        <p:spPr>
+          <a:xfrm>
+            <a:off x="13130410" y="15260205"/>
+            <a:ext cx="1684020" cy="292388"/>
+          </a:xfrm>
+          <a:prstGeom prst="rect">
+            <a:avLst/>
+          </a:prstGeom>
+          <a:noFill/>
+        </p:spPr>
+        <p:txBody>
+          <a:bodyPr wrap="square" rtlCol="0">
+            <a:spAutoFit/>
+          </a:bodyPr>
+          <a:lstStyle/>
+          <a:p>
+            <a:pPr algn="r"/>
+            <a:r>
+              <a:rPr lang="en-US" sz="1300" dirty="0"/>
+              <a:t>LINE proportion</a:t>
+            </a:r>
+          </a:p>
+        </p:txBody>
+      </p:sp>
+      <p:sp>
+        <p:nvSpPr>
+          <p:cNvPr id="68" name="TextBox 67">
+            <a:extLst>
+              <a:ext uri="{FF2B5EF4-FFF2-40B4-BE49-F238E27FC236}">
+                <a16:creationId xmlns:a16="http://schemas.microsoft.com/office/drawing/2014/main" id="{320EF691-0520-451A-F903-5367548CB260}"/>
+              </a:ext>
+            </a:extLst>
+          </p:cNvPr>
+          <p:cNvSpPr txBox="1"/>
+          <p:nvPr/>
+        </p:nvSpPr>
+        <p:spPr>
+          <a:xfrm>
+            <a:off x="13130407" y="14800633"/>
+            <a:ext cx="1684020" cy="292388"/>
+          </a:xfrm>
+          <a:prstGeom prst="rect">
+            <a:avLst/>
+          </a:prstGeom>
+          <a:noFill/>
+        </p:spPr>
+        <p:txBody>
+          <a:bodyPr wrap="square" rtlCol="0">
+            <a:spAutoFit/>
+          </a:bodyPr>
+          <a:lstStyle/>
+          <a:p>
+            <a:pPr algn="r"/>
+            <a:r>
+              <a:rPr lang="en-US" sz="1300" dirty="0"/>
+              <a:t>DNA proportion</a:t>
+            </a:r>
+          </a:p>
+        </p:txBody>
+      </p:sp>
+      <p:sp>
+        <p:nvSpPr>
+          <p:cNvPr id="69" name="TextBox 68">
+            <a:extLst>
+              <a:ext uri="{FF2B5EF4-FFF2-40B4-BE49-F238E27FC236}">
+                <a16:creationId xmlns:a16="http://schemas.microsoft.com/office/drawing/2014/main" id="{F7C09E0E-EF47-6E3A-892A-E64E4A425C42}"/>
+              </a:ext>
+            </a:extLst>
+          </p:cNvPr>
+          <p:cNvSpPr txBox="1"/>
+          <p:nvPr/>
+        </p:nvSpPr>
+        <p:spPr>
+          <a:xfrm>
+            <a:off x="13130407" y="14340936"/>
+            <a:ext cx="1684020" cy="292388"/>
+          </a:xfrm>
+          <a:prstGeom prst="rect">
+            <a:avLst/>
+          </a:prstGeom>
+          <a:noFill/>
+        </p:spPr>
+        <p:txBody>
+          <a:bodyPr wrap="square" rtlCol="0">
+            <a:spAutoFit/>
+          </a:bodyPr>
+          <a:lstStyle/>
+          <a:p>
+            <a:pPr algn="r"/>
+            <a:r>
+              <a:rPr lang="en-US" sz="1300" dirty="0"/>
+              <a:t>SINE age x prop.</a:t>
+            </a:r>
+          </a:p>
+        </p:txBody>
+      </p:sp>
+      <p:sp>
+        <p:nvSpPr>
+          <p:cNvPr id="70" name="TextBox 69">
+            <a:extLst>
+              <a:ext uri="{FF2B5EF4-FFF2-40B4-BE49-F238E27FC236}">
+                <a16:creationId xmlns:a16="http://schemas.microsoft.com/office/drawing/2014/main" id="{7A4AEFD2-4824-D1C7-3C4A-B3466675B397}"/>
+              </a:ext>
+            </a:extLst>
+          </p:cNvPr>
+          <p:cNvSpPr txBox="1"/>
+          <p:nvPr/>
+        </p:nvSpPr>
+        <p:spPr>
+          <a:xfrm>
+            <a:off x="13130407" y="13880085"/>
+            <a:ext cx="1684020" cy="292388"/>
+          </a:xfrm>
+          <a:prstGeom prst="rect">
+            <a:avLst/>
+          </a:prstGeom>
+          <a:noFill/>
+        </p:spPr>
+        <p:txBody>
+          <a:bodyPr wrap="square" rtlCol="0">
+            <a:spAutoFit/>
+          </a:bodyPr>
+          <a:lstStyle/>
+          <a:p>
+            <a:pPr algn="r"/>
+            <a:r>
+              <a:rPr lang="en-US" sz="1300" dirty="0"/>
+              <a:t>LINE age x prop.</a:t>
+            </a:r>
+          </a:p>
+        </p:txBody>
+      </p:sp>
+      <p:sp>
+        <p:nvSpPr>
+          <p:cNvPr id="71" name="TextBox 70">
+            <a:extLst>
+              <a:ext uri="{FF2B5EF4-FFF2-40B4-BE49-F238E27FC236}">
+                <a16:creationId xmlns:a16="http://schemas.microsoft.com/office/drawing/2014/main" id="{7F95FB79-103C-3540-9E61-0FC27A4B684C}"/>
+              </a:ext>
+            </a:extLst>
+          </p:cNvPr>
+          <p:cNvSpPr txBox="1"/>
+          <p:nvPr/>
+        </p:nvSpPr>
+        <p:spPr>
+          <a:xfrm>
+            <a:off x="8227894" y="15301456"/>
+            <a:ext cx="1684020" cy="292388"/>
+          </a:xfrm>
+          <a:prstGeom prst="rect">
+            <a:avLst/>
+          </a:prstGeom>
+          <a:noFill/>
+        </p:spPr>
+        <p:txBody>
+          <a:bodyPr wrap="square" rtlCol="0">
+            <a:spAutoFit/>
+          </a:bodyPr>
+          <a:lstStyle/>
+          <a:p>
+            <a:pPr algn="r"/>
+            <a:r>
+              <a:rPr lang="en-US" sz="1300" dirty="0"/>
+              <a:t>SINE proportion</a:t>
+            </a:r>
+          </a:p>
+        </p:txBody>
+      </p:sp>
+      <p:sp>
+        <p:nvSpPr>
+          <p:cNvPr id="72" name="TextBox 71">
+            <a:extLst>
+              <a:ext uri="{FF2B5EF4-FFF2-40B4-BE49-F238E27FC236}">
+                <a16:creationId xmlns:a16="http://schemas.microsoft.com/office/drawing/2014/main" id="{05A1008A-FA33-12D7-BB5F-CFD17C19D361}"/>
+              </a:ext>
+            </a:extLst>
+          </p:cNvPr>
+          <p:cNvSpPr txBox="1"/>
+          <p:nvPr/>
+        </p:nvSpPr>
+        <p:spPr>
+          <a:xfrm>
+            <a:off x="8227893" y="15009068"/>
+            <a:ext cx="1684020" cy="292388"/>
+          </a:xfrm>
+          <a:prstGeom prst="rect">
+            <a:avLst/>
+          </a:prstGeom>
+          <a:noFill/>
+        </p:spPr>
+        <p:txBody>
+          <a:bodyPr wrap="square" rtlCol="0">
+            <a:spAutoFit/>
+          </a:bodyPr>
+          <a:lstStyle/>
+          <a:p>
+            <a:pPr algn="r"/>
+            <a:r>
+              <a:rPr lang="en-US" sz="1300" dirty="0"/>
+              <a:t>LINE proportion</a:t>
+            </a:r>
+          </a:p>
+        </p:txBody>
+      </p:sp>
+      <p:sp>
+        <p:nvSpPr>
+          <p:cNvPr id="73" name="TextBox 72">
+            <a:extLst>
+              <a:ext uri="{FF2B5EF4-FFF2-40B4-BE49-F238E27FC236}">
+                <a16:creationId xmlns:a16="http://schemas.microsoft.com/office/drawing/2014/main" id="{8CDAEA9A-31BA-2C8D-A4B9-7F5882277312}"/>
+              </a:ext>
+            </a:extLst>
+          </p:cNvPr>
+          <p:cNvSpPr txBox="1"/>
+          <p:nvPr/>
+        </p:nvSpPr>
+        <p:spPr>
+          <a:xfrm>
+            <a:off x="8227893" y="14716245"/>
+            <a:ext cx="1684020" cy="292388"/>
+          </a:xfrm>
+          <a:prstGeom prst="rect">
+            <a:avLst/>
+          </a:prstGeom>
+          <a:noFill/>
+        </p:spPr>
+        <p:txBody>
+          <a:bodyPr wrap="square" rtlCol="0">
+            <a:spAutoFit/>
+          </a:bodyPr>
+          <a:lstStyle/>
+          <a:p>
+            <a:pPr algn="r"/>
+            <a:r>
+              <a:rPr lang="en-US" sz="1300" dirty="0"/>
+              <a:t>DNA proportion</a:t>
+            </a:r>
+          </a:p>
+        </p:txBody>
+      </p:sp>
+      <p:sp>
+        <p:nvSpPr>
+          <p:cNvPr id="74" name="TextBox 73">
+            <a:extLst>
+              <a:ext uri="{FF2B5EF4-FFF2-40B4-BE49-F238E27FC236}">
+                <a16:creationId xmlns:a16="http://schemas.microsoft.com/office/drawing/2014/main" id="{E7B03B01-913C-3F00-D989-07EA93B5FD43}"/>
+              </a:ext>
+            </a:extLst>
+          </p:cNvPr>
+          <p:cNvSpPr txBox="1"/>
+          <p:nvPr/>
+        </p:nvSpPr>
+        <p:spPr>
+          <a:xfrm>
+            <a:off x="8227893" y="14422464"/>
+            <a:ext cx="1684020" cy="292388"/>
+          </a:xfrm>
+          <a:prstGeom prst="rect">
+            <a:avLst/>
+          </a:prstGeom>
+          <a:noFill/>
+        </p:spPr>
+        <p:txBody>
+          <a:bodyPr wrap="square" rtlCol="0">
+            <a:spAutoFit/>
+          </a:bodyPr>
+          <a:lstStyle/>
+          <a:p>
+            <a:pPr algn="r"/>
+            <a:r>
+              <a:rPr lang="en-US" sz="1300" dirty="0"/>
+              <a:t>SINE age x prop.</a:t>
+            </a:r>
+          </a:p>
+        </p:txBody>
+      </p:sp>
+      <p:sp>
+        <p:nvSpPr>
+          <p:cNvPr id="75" name="TextBox 74">
+            <a:extLst>
+              <a:ext uri="{FF2B5EF4-FFF2-40B4-BE49-F238E27FC236}">
+                <a16:creationId xmlns:a16="http://schemas.microsoft.com/office/drawing/2014/main" id="{02E4DAD7-D788-D4A5-6E27-46485AB2B237}"/>
+              </a:ext>
+            </a:extLst>
+          </p:cNvPr>
+          <p:cNvSpPr txBox="1"/>
+          <p:nvPr/>
+        </p:nvSpPr>
+        <p:spPr>
+          <a:xfrm>
+            <a:off x="8227893" y="14129777"/>
+            <a:ext cx="1684020" cy="292388"/>
+          </a:xfrm>
+          <a:prstGeom prst="rect">
+            <a:avLst/>
+          </a:prstGeom>
+          <a:noFill/>
+        </p:spPr>
+        <p:txBody>
+          <a:bodyPr wrap="square" rtlCol="0">
+            <a:spAutoFit/>
+          </a:bodyPr>
+          <a:lstStyle/>
+          <a:p>
+            <a:pPr algn="r"/>
+            <a:r>
+              <a:rPr lang="en-US" sz="1300" dirty="0"/>
+              <a:t>SINE age</a:t>
+            </a:r>
+          </a:p>
+        </p:txBody>
+      </p:sp>
+      <p:sp>
+        <p:nvSpPr>
+          <p:cNvPr id="91" name="TextBox 90">
+            <a:extLst>
+              <a:ext uri="{FF2B5EF4-FFF2-40B4-BE49-F238E27FC236}">
+                <a16:creationId xmlns:a16="http://schemas.microsoft.com/office/drawing/2014/main" id="{C82905EC-2D9D-7F8F-57C6-F1EDF75096C8}"/>
+              </a:ext>
+            </a:extLst>
+          </p:cNvPr>
+          <p:cNvSpPr txBox="1"/>
+          <p:nvPr/>
+        </p:nvSpPr>
+        <p:spPr>
+          <a:xfrm>
+            <a:off x="8227893" y="13838619"/>
+            <a:ext cx="1684020" cy="292388"/>
+          </a:xfrm>
+          <a:prstGeom prst="rect">
+            <a:avLst/>
+          </a:prstGeom>
+          <a:noFill/>
+        </p:spPr>
+        <p:txBody>
+          <a:bodyPr wrap="square" rtlCol="0">
+            <a:spAutoFit/>
+          </a:bodyPr>
+          <a:lstStyle/>
+          <a:p>
+            <a:pPr algn="r"/>
+            <a:r>
+              <a:rPr lang="en-US" sz="1300" dirty="0"/>
+              <a:t>LTR age x prop.</a:t>
+            </a:r>
+          </a:p>
+        </p:txBody>
+      </p:sp>
+      <p:sp>
+        <p:nvSpPr>
+          <p:cNvPr id="92" name="TextBox 91">
+            <a:extLst>
+              <a:ext uri="{FF2B5EF4-FFF2-40B4-BE49-F238E27FC236}">
+                <a16:creationId xmlns:a16="http://schemas.microsoft.com/office/drawing/2014/main" id="{1CC4F09E-5BA3-25AC-5529-C407EBC34022}"/>
+              </a:ext>
+            </a:extLst>
+          </p:cNvPr>
+          <p:cNvSpPr txBox="1"/>
+          <p:nvPr/>
+        </p:nvSpPr>
+        <p:spPr>
+          <a:xfrm>
+            <a:off x="8228247" y="18006348"/>
+            <a:ext cx="1684020" cy="292388"/>
+          </a:xfrm>
+          <a:prstGeom prst="rect">
+            <a:avLst/>
+          </a:prstGeom>
+          <a:noFill/>
+        </p:spPr>
+        <p:txBody>
+          <a:bodyPr wrap="square" rtlCol="0">
+            <a:spAutoFit/>
+          </a:bodyPr>
+          <a:lstStyle/>
+          <a:p>
+            <a:pPr algn="r"/>
+            <a:r>
+              <a:rPr lang="en-US" sz="1300" dirty="0"/>
+              <a:t>Others proportion</a:t>
+            </a:r>
+          </a:p>
+        </p:txBody>
+      </p:sp>
+      <p:sp>
+        <p:nvSpPr>
+          <p:cNvPr id="93" name="TextBox 92">
+            <a:extLst>
+              <a:ext uri="{FF2B5EF4-FFF2-40B4-BE49-F238E27FC236}">
+                <a16:creationId xmlns:a16="http://schemas.microsoft.com/office/drawing/2014/main" id="{4AC2C171-9160-10D0-C551-4D5EE3A99959}"/>
+              </a:ext>
+            </a:extLst>
+          </p:cNvPr>
+          <p:cNvSpPr txBox="1"/>
+          <p:nvPr/>
+        </p:nvSpPr>
+        <p:spPr>
+          <a:xfrm>
+            <a:off x="10101021" y="18990189"/>
+            <a:ext cx="548286" cy="292388"/>
           </a:xfrm>
           <a:prstGeom prst="rect">
             <a:avLst/>
@@ -12144,18 +13079,18 @@
           <a:p>
             <a:pPr algn="ctr"/>
             <a:r>
-              <a:rPr lang="en-US" sz="1200" dirty="0"/>
-              <a:t>-3</a:t>
+              <a:rPr lang="en-US" sz="1300" dirty="0"/>
+              <a:t>-1</a:t>
             </a:r>
           </a:p>
         </p:txBody>
       </p:sp>
       <p:sp>
         <p:nvSpPr>
-          <p:cNvPr id="6" name="TextBox 5">
+          <p:cNvPr id="94" name="TextBox 93">
             <a:extLst>
               <a:ext uri="{FF2B5EF4-FFF2-40B4-BE49-F238E27FC236}">
-                <a16:creationId xmlns:a16="http://schemas.microsoft.com/office/drawing/2014/main" id="{B81D0916-740E-9B20-2CF6-D2307702BA9F}"/>
+                <a16:creationId xmlns:a16="http://schemas.microsoft.com/office/drawing/2014/main" id="{BB08683C-70C6-CDE4-627F-C604DCCCB874}"/>
               </a:ext>
             </a:extLst>
           </p:cNvPr>
@@ -12164,8 +13099,8 @@
         </p:nvSpPr>
         <p:spPr>
           <a:xfrm>
-            <a:off x="12316619" y="15974217"/>
-            <a:ext cx="339726" cy="276999"/>
+            <a:off x="10752051" y="18990190"/>
+            <a:ext cx="548286" cy="292388"/>
           </a:xfrm>
           <a:prstGeom prst="rect">
             <a:avLst/>
@@ -12180,18 +13115,18 @@
           <a:p>
             <a:pPr algn="ctr"/>
             <a:r>
-              <a:rPr lang="en-US" sz="1200" dirty="0"/>
-              <a:t>-2</a:t>
+              <a:rPr lang="en-US" sz="1300" dirty="0"/>
+              <a:t>-0.5</a:t>
             </a:r>
           </a:p>
         </p:txBody>
       </p:sp>
       <p:sp>
         <p:nvSpPr>
-          <p:cNvPr id="8" name="TextBox 7">
+          <p:cNvPr id="95" name="TextBox 94">
             <a:extLst>
               <a:ext uri="{FF2B5EF4-FFF2-40B4-BE49-F238E27FC236}">
-                <a16:creationId xmlns:a16="http://schemas.microsoft.com/office/drawing/2014/main" id="{090C99FB-7CD5-8D22-47D5-49F72E57A4C2}"/>
+                <a16:creationId xmlns:a16="http://schemas.microsoft.com/office/drawing/2014/main" id="{F2927145-C52E-BFB0-875A-DE12A494034F}"/>
               </a:ext>
             </a:extLst>
           </p:cNvPr>
@@ -12200,8 +13135,8 @@
         </p:nvSpPr>
         <p:spPr>
           <a:xfrm>
-            <a:off x="12564270" y="15974216"/>
-            <a:ext cx="339726" cy="276999"/>
+            <a:off x="11407843" y="18990189"/>
+            <a:ext cx="548286" cy="292388"/>
           </a:xfrm>
           <a:prstGeom prst="rect">
             <a:avLst/>
@@ -12216,18 +13151,18 @@
           <a:p>
             <a:pPr algn="ctr"/>
             <a:r>
-              <a:rPr lang="en-US" sz="1200" dirty="0"/>
-              <a:t>-1</a:t>
+              <a:rPr lang="en-US" sz="1300" dirty="0"/>
+              <a:t>0</a:t>
             </a:r>
           </a:p>
         </p:txBody>
       </p:sp>
       <p:sp>
         <p:nvSpPr>
-          <p:cNvPr id="10" name="TextBox 9">
+          <p:cNvPr id="96" name="TextBox 95">
             <a:extLst>
               <a:ext uri="{FF2B5EF4-FFF2-40B4-BE49-F238E27FC236}">
-                <a16:creationId xmlns:a16="http://schemas.microsoft.com/office/drawing/2014/main" id="{E9CFCF61-6E5E-F917-7DA2-D5C9736F9574}"/>
+                <a16:creationId xmlns:a16="http://schemas.microsoft.com/office/drawing/2014/main" id="{BBD5E3CA-A985-B775-6815-5B1B09F78A88}"/>
               </a:ext>
             </a:extLst>
           </p:cNvPr>
@@ -12236,8 +13171,8 @@
         </p:nvSpPr>
         <p:spPr>
           <a:xfrm>
-            <a:off x="12814300" y="15974216"/>
-            <a:ext cx="339726" cy="276999"/>
+            <a:off x="12056492" y="18990189"/>
+            <a:ext cx="548286" cy="292388"/>
           </a:xfrm>
           <a:prstGeom prst="rect">
             <a:avLst/>
@@ -12252,18 +13187,18 @@
           <a:p>
             <a:pPr algn="ctr"/>
             <a:r>
-              <a:rPr lang="en-US" sz="1200" dirty="0"/>
-              <a:t>0</a:t>
+              <a:rPr lang="en-US" sz="1300" dirty="0"/>
+              <a:t>0.5</a:t>
             </a:r>
           </a:p>
         </p:txBody>
       </p:sp>
       <p:sp>
         <p:nvSpPr>
-          <p:cNvPr id="11" name="TextBox 10">
+          <p:cNvPr id="97" name="TextBox 96">
             <a:extLst>
               <a:ext uri="{FF2B5EF4-FFF2-40B4-BE49-F238E27FC236}">
-                <a16:creationId xmlns:a16="http://schemas.microsoft.com/office/drawing/2014/main" id="{9D3F319D-CF11-36B3-394A-06BEA28677AF}"/>
+                <a16:creationId xmlns:a16="http://schemas.microsoft.com/office/drawing/2014/main" id="{DFB5D36E-7F50-86AA-09A5-72168BC58E99}"/>
               </a:ext>
             </a:extLst>
           </p:cNvPr>
@@ -12272,8 +13207,8 @@
         </p:nvSpPr>
         <p:spPr>
           <a:xfrm>
-            <a:off x="13061855" y="15974215"/>
-            <a:ext cx="339726" cy="276999"/>
+            <a:off x="12712284" y="18990189"/>
+            <a:ext cx="548286" cy="292388"/>
           </a:xfrm>
           <a:prstGeom prst="rect">
             <a:avLst/>
@@ -12288,7 +13223,7 @@
           <a:p>
             <a:pPr algn="ctr"/>
             <a:r>
-              <a:rPr lang="en-US" sz="1200" dirty="0"/>
+              <a:rPr lang="en-US" sz="1300" dirty="0"/>
               <a:t>1</a:t>
             </a:r>
           </a:p>
@@ -12296,10 +13231,10 @@
       </p:sp>
       <p:sp>
         <p:nvSpPr>
-          <p:cNvPr id="12" name="TextBox 11">
+          <p:cNvPr id="98" name="TextBox 97">
             <a:extLst>
               <a:ext uri="{FF2B5EF4-FFF2-40B4-BE49-F238E27FC236}">
-                <a16:creationId xmlns:a16="http://schemas.microsoft.com/office/drawing/2014/main" id="{7262A77B-F1A1-BEAB-C368-0FC1100197F7}"/>
+                <a16:creationId xmlns:a16="http://schemas.microsoft.com/office/drawing/2014/main" id="{E996170D-5DB1-0391-6E7D-FA991E307AE3}"/>
               </a:ext>
             </a:extLst>
           </p:cNvPr>
@@ -12308,8 +13243,8 @@
         </p:nvSpPr>
         <p:spPr>
           <a:xfrm>
-            <a:off x="13310837" y="15974214"/>
-            <a:ext cx="339726" cy="276999"/>
+            <a:off x="14873517" y="18990189"/>
+            <a:ext cx="548286" cy="292388"/>
           </a:xfrm>
           <a:prstGeom prst="rect">
             <a:avLst/>
@@ -12324,18 +13259,18 @@
           <a:p>
             <a:pPr algn="ctr"/>
             <a:r>
-              <a:rPr lang="en-US" sz="1200" dirty="0"/>
-              <a:t>2</a:t>
+              <a:rPr lang="en-US" sz="1300" dirty="0"/>
+              <a:t>-4</a:t>
             </a:r>
           </a:p>
         </p:txBody>
       </p:sp>
       <p:sp>
         <p:nvSpPr>
-          <p:cNvPr id="13" name="TextBox 12">
+          <p:cNvPr id="99" name="TextBox 98">
             <a:extLst>
               <a:ext uri="{FF2B5EF4-FFF2-40B4-BE49-F238E27FC236}">
-                <a16:creationId xmlns:a16="http://schemas.microsoft.com/office/drawing/2014/main" id="{FED6B6EF-B473-069B-FBFC-ED1FC029D187}"/>
+                <a16:creationId xmlns:a16="http://schemas.microsoft.com/office/drawing/2014/main" id="{F414A936-3BC7-E891-BB92-9B3809FBD6A5}"/>
               </a:ext>
             </a:extLst>
           </p:cNvPr>
@@ -12344,8 +13279,8 @@
         </p:nvSpPr>
         <p:spPr>
           <a:xfrm>
-            <a:off x="13560174" y="15974203"/>
-            <a:ext cx="339726" cy="276999"/>
+            <a:off x="15290885" y="18987808"/>
+            <a:ext cx="548286" cy="292388"/>
           </a:xfrm>
           <a:prstGeom prst="rect">
             <a:avLst/>
@@ -12360,18 +13295,18 @@
           <a:p>
             <a:pPr algn="ctr"/>
             <a:r>
-              <a:rPr lang="en-US" sz="1200" dirty="0"/>
-              <a:t>3</a:t>
+              <a:rPr lang="en-US" sz="1300" dirty="0"/>
+              <a:t>-3</a:t>
             </a:r>
           </a:p>
         </p:txBody>
       </p:sp>
       <p:sp>
         <p:nvSpPr>
-          <p:cNvPr id="14" name="TextBox 13">
+          <p:cNvPr id="100" name="TextBox 99">
             <a:extLst>
               <a:ext uri="{FF2B5EF4-FFF2-40B4-BE49-F238E27FC236}">
-                <a16:creationId xmlns:a16="http://schemas.microsoft.com/office/drawing/2014/main" id="{296A31F6-DD37-A46C-E14C-AC8705D85C3C}"/>
+                <a16:creationId xmlns:a16="http://schemas.microsoft.com/office/drawing/2014/main" id="{608E0992-941F-BF95-1852-E0ED46760E5E}"/>
               </a:ext>
             </a:extLst>
           </p:cNvPr>
@@ -12380,8 +13315,8 @@
         </p:nvSpPr>
         <p:spPr>
           <a:xfrm>
-            <a:off x="14117638" y="15974212"/>
-            <a:ext cx="339726" cy="276999"/>
+            <a:off x="15711373" y="18990189"/>
+            <a:ext cx="548286" cy="292388"/>
           </a:xfrm>
           <a:prstGeom prst="rect">
             <a:avLst/>
@@ -12396,18 +13331,18 @@
           <a:p>
             <a:pPr algn="ctr"/>
             <a:r>
-              <a:rPr lang="en-US" sz="1200" dirty="0"/>
-              <a:t>-3</a:t>
+              <a:rPr lang="en-US" sz="1300" dirty="0"/>
+              <a:t>-2</a:t>
             </a:r>
           </a:p>
         </p:txBody>
       </p:sp>
       <p:sp>
         <p:nvSpPr>
-          <p:cNvPr id="15" name="TextBox 14">
+          <p:cNvPr id="101" name="TextBox 100">
             <a:extLst>
               <a:ext uri="{FF2B5EF4-FFF2-40B4-BE49-F238E27FC236}">
-                <a16:creationId xmlns:a16="http://schemas.microsoft.com/office/drawing/2014/main" id="{2D5E1DB5-2B51-7A30-1CD6-3045CFB9CBA3}"/>
+                <a16:creationId xmlns:a16="http://schemas.microsoft.com/office/drawing/2014/main" id="{AD007E41-FBBB-6AF2-3D90-94BC6CB095EC}"/>
               </a:ext>
             </a:extLst>
           </p:cNvPr>
@@ -12416,8 +13351,8 @@
         </p:nvSpPr>
         <p:spPr>
           <a:xfrm>
-            <a:off x="14364239" y="15974212"/>
-            <a:ext cx="339726" cy="276999"/>
+            <a:off x="16130814" y="18990189"/>
+            <a:ext cx="548286" cy="292388"/>
           </a:xfrm>
           <a:prstGeom prst="rect">
             <a:avLst/>
@@ -12432,18 +13367,18 @@
           <a:p>
             <a:pPr algn="ctr"/>
             <a:r>
-              <a:rPr lang="en-US" sz="1200" dirty="0"/>
-              <a:t>-2</a:t>
+              <a:rPr lang="en-US" sz="1300" dirty="0"/>
+              <a:t>-1</a:t>
             </a:r>
           </a:p>
         </p:txBody>
       </p:sp>
       <p:sp>
         <p:nvSpPr>
-          <p:cNvPr id="16" name="TextBox 15">
+          <p:cNvPr id="102" name="TextBox 101">
             <a:extLst>
               <a:ext uri="{FF2B5EF4-FFF2-40B4-BE49-F238E27FC236}">
-                <a16:creationId xmlns:a16="http://schemas.microsoft.com/office/drawing/2014/main" id="{518AA3B3-E2A4-DE33-D949-C2EAC79BC3B1}"/>
+                <a16:creationId xmlns:a16="http://schemas.microsoft.com/office/drawing/2014/main" id="{14AFFCEA-8771-41F8-A544-AFCA8CE3F1F6}"/>
               </a:ext>
             </a:extLst>
           </p:cNvPr>
@@ -12452,8 +13387,8 @@
         </p:nvSpPr>
         <p:spPr>
           <a:xfrm>
-            <a:off x="14606078" y="15974212"/>
-            <a:ext cx="339726" cy="276999"/>
+            <a:off x="16552296" y="18990189"/>
+            <a:ext cx="548286" cy="292388"/>
           </a:xfrm>
           <a:prstGeom prst="rect">
             <a:avLst/>
@@ -12468,18 +13403,18 @@
           <a:p>
             <a:pPr algn="ctr"/>
             <a:r>
-              <a:rPr lang="en-US" sz="1200" dirty="0"/>
-              <a:t>-1</a:t>
+              <a:rPr lang="en-US" sz="1300" dirty="0"/>
+              <a:t>0</a:t>
             </a:r>
           </a:p>
         </p:txBody>
       </p:sp>
       <p:sp>
         <p:nvSpPr>
-          <p:cNvPr id="17" name="TextBox 16">
+          <p:cNvPr id="103" name="TextBox 102">
             <a:extLst>
               <a:ext uri="{FF2B5EF4-FFF2-40B4-BE49-F238E27FC236}">
-                <a16:creationId xmlns:a16="http://schemas.microsoft.com/office/drawing/2014/main" id="{E496FFF2-6E8C-48B5-2D4A-DBB55F47A72C}"/>
+                <a16:creationId xmlns:a16="http://schemas.microsoft.com/office/drawing/2014/main" id="{50ADB2C9-6A0E-1272-43E0-039337AECB93}"/>
               </a:ext>
             </a:extLst>
           </p:cNvPr>
@@ -12488,8 +13423,8 @@
         </p:nvSpPr>
         <p:spPr>
           <a:xfrm>
-            <a:off x="14852748" y="15974211"/>
-            <a:ext cx="339726" cy="276999"/>
+            <a:off x="16973124" y="18990189"/>
+            <a:ext cx="548286" cy="292388"/>
           </a:xfrm>
           <a:prstGeom prst="rect">
             <a:avLst/>
@@ -12504,18 +13439,18 @@
           <a:p>
             <a:pPr algn="ctr"/>
             <a:r>
-              <a:rPr lang="en-US" sz="1200" dirty="0"/>
-              <a:t>0</a:t>
+              <a:rPr lang="en-US" sz="1300" dirty="0"/>
+              <a:t>1</a:t>
             </a:r>
           </a:p>
         </p:txBody>
       </p:sp>
       <p:sp>
         <p:nvSpPr>
-          <p:cNvPr id="18" name="TextBox 17">
+          <p:cNvPr id="104" name="TextBox 103">
             <a:extLst>
               <a:ext uri="{FF2B5EF4-FFF2-40B4-BE49-F238E27FC236}">
-                <a16:creationId xmlns:a16="http://schemas.microsoft.com/office/drawing/2014/main" id="{2D80E526-57FE-509A-E6BC-70296D397979}"/>
+                <a16:creationId xmlns:a16="http://schemas.microsoft.com/office/drawing/2014/main" id="{AFD91C31-EF3F-65AD-7292-B611138D877D}"/>
               </a:ext>
             </a:extLst>
           </p:cNvPr>
@@ -12524,8 +13459,8 @@
         </p:nvSpPr>
         <p:spPr>
           <a:xfrm>
-            <a:off x="15098457" y="15974210"/>
-            <a:ext cx="339726" cy="276999"/>
+            <a:off x="17390837" y="18990189"/>
+            <a:ext cx="548286" cy="292388"/>
           </a:xfrm>
           <a:prstGeom prst="rect">
             <a:avLst/>
@@ -12540,18 +13475,18 @@
           <a:p>
             <a:pPr algn="ctr"/>
             <a:r>
-              <a:rPr lang="en-US" sz="1200" dirty="0"/>
-              <a:t>1</a:t>
+              <a:rPr lang="en-US" sz="1300" dirty="0"/>
+              <a:t>2</a:t>
             </a:r>
           </a:p>
         </p:txBody>
       </p:sp>
       <p:sp>
         <p:nvSpPr>
-          <p:cNvPr id="19" name="TextBox 18">
+          <p:cNvPr id="105" name="TextBox 104">
             <a:extLst>
               <a:ext uri="{FF2B5EF4-FFF2-40B4-BE49-F238E27FC236}">
-                <a16:creationId xmlns:a16="http://schemas.microsoft.com/office/drawing/2014/main" id="{E00E6D85-4AF6-A5F4-FC6A-1A6AE1475CD0}"/>
+                <a16:creationId xmlns:a16="http://schemas.microsoft.com/office/drawing/2014/main" id="{1322B6DF-1319-ADDA-11F3-DAEA71D71A68}"/>
               </a:ext>
             </a:extLst>
           </p:cNvPr>
@@ -12560,8 +13495,8 @@
         </p:nvSpPr>
         <p:spPr>
           <a:xfrm>
-            <a:off x="15343186" y="15974210"/>
-            <a:ext cx="339726" cy="276999"/>
+            <a:off x="17181412" y="15916569"/>
+            <a:ext cx="548286" cy="292388"/>
           </a:xfrm>
           <a:prstGeom prst="rect">
             <a:avLst/>
@@ -12576,7 +13511,7 @@
           <a:p>
             <a:pPr algn="ctr"/>
             <a:r>
-              <a:rPr lang="en-US" sz="1200" dirty="0"/>
+              <a:rPr lang="en-US" sz="1300" dirty="0"/>
               <a:t>2</a:t>
             </a:r>
           </a:p>
@@ -12584,10 +13519,10 @@
       </p:sp>
       <p:sp>
         <p:nvSpPr>
-          <p:cNvPr id="20" name="TextBox 19">
+          <p:cNvPr id="106" name="TextBox 105">
             <a:extLst>
               <a:ext uri="{FF2B5EF4-FFF2-40B4-BE49-F238E27FC236}">
-                <a16:creationId xmlns:a16="http://schemas.microsoft.com/office/drawing/2014/main" id="{3F721241-8093-D990-6FA3-8101A645E3B9}"/>
+                <a16:creationId xmlns:a16="http://schemas.microsoft.com/office/drawing/2014/main" id="{2AD35FD3-DF13-3E3D-8299-F427A1EEC0A8}"/>
               </a:ext>
             </a:extLst>
           </p:cNvPr>
@@ -12596,8 +13531,8 @@
         </p:nvSpPr>
         <p:spPr>
           <a:xfrm>
-            <a:off x="15584704" y="15974209"/>
-            <a:ext cx="339726" cy="276999"/>
+            <a:off x="16576110" y="15916569"/>
+            <a:ext cx="548286" cy="292388"/>
           </a:xfrm>
           <a:prstGeom prst="rect">
             <a:avLst/>
@@ -12612,18 +13547,18 @@
           <a:p>
             <a:pPr algn="ctr"/>
             <a:r>
-              <a:rPr lang="en-US" sz="1200" dirty="0"/>
-              <a:t>3</a:t>
+              <a:rPr lang="en-US" sz="1300" dirty="0"/>
+              <a:t>1</a:t>
             </a:r>
           </a:p>
         </p:txBody>
       </p:sp>
       <p:sp>
         <p:nvSpPr>
-          <p:cNvPr id="21" name="TextBox 20">
+          <p:cNvPr id="107" name="TextBox 106">
             <a:extLst>
               <a:ext uri="{FF2B5EF4-FFF2-40B4-BE49-F238E27FC236}">
-                <a16:creationId xmlns:a16="http://schemas.microsoft.com/office/drawing/2014/main" id="{974E9211-4BDB-313A-76BC-D9CE6E132859}"/>
+                <a16:creationId xmlns:a16="http://schemas.microsoft.com/office/drawing/2014/main" id="{22826876-914C-FE08-C79A-1C4B6E310AD8}"/>
               </a:ext>
             </a:extLst>
           </p:cNvPr>
@@ -12632,8 +13567,8 @@
         </p:nvSpPr>
         <p:spPr>
           <a:xfrm>
-            <a:off x="17302202" y="15974209"/>
-            <a:ext cx="339726" cy="276999"/>
+            <a:off x="15966046" y="15916569"/>
+            <a:ext cx="548286" cy="292388"/>
           </a:xfrm>
           <a:prstGeom prst="rect">
             <a:avLst/>
@@ -12648,18 +13583,18 @@
           <a:p>
             <a:pPr algn="ctr"/>
             <a:r>
-              <a:rPr lang="en-US" sz="1200" dirty="0"/>
-              <a:t>-1</a:t>
+              <a:rPr lang="en-US" sz="1300" dirty="0"/>
+              <a:t>0</a:t>
             </a:r>
           </a:p>
         </p:txBody>
       </p:sp>
       <p:sp>
         <p:nvSpPr>
-          <p:cNvPr id="22" name="TextBox 21">
+          <p:cNvPr id="108" name="TextBox 107">
             <a:extLst>
               <a:ext uri="{FF2B5EF4-FFF2-40B4-BE49-F238E27FC236}">
-                <a16:creationId xmlns:a16="http://schemas.microsoft.com/office/drawing/2014/main" id="{9DECE744-AD26-E22D-0DB1-E2EB1D9B7F98}"/>
+                <a16:creationId xmlns:a16="http://schemas.microsoft.com/office/drawing/2014/main" id="{F6590ADA-F3E3-1FDF-5C30-063F45F6603E}"/>
               </a:ext>
             </a:extLst>
           </p:cNvPr>
@@ -12668,8 +13603,8 @@
         </p:nvSpPr>
         <p:spPr>
           <a:xfrm>
-            <a:off x="17626117" y="15974208"/>
-            <a:ext cx="339726" cy="276999"/>
+            <a:off x="15355982" y="15915419"/>
+            <a:ext cx="548286" cy="292388"/>
           </a:xfrm>
           <a:prstGeom prst="rect">
             <a:avLst/>
@@ -12684,18 +13619,18 @@
           <a:p>
             <a:pPr algn="ctr"/>
             <a:r>
-              <a:rPr lang="en-US" sz="1200" dirty="0"/>
-              <a:t>0</a:t>
+              <a:rPr lang="en-US" sz="1300" dirty="0"/>
+              <a:t>-1</a:t>
             </a:r>
           </a:p>
         </p:txBody>
       </p:sp>
       <p:sp>
         <p:nvSpPr>
-          <p:cNvPr id="23" name="TextBox 22">
+          <p:cNvPr id="109" name="TextBox 108">
             <a:extLst>
               <a:ext uri="{FF2B5EF4-FFF2-40B4-BE49-F238E27FC236}">
-                <a16:creationId xmlns:a16="http://schemas.microsoft.com/office/drawing/2014/main" id="{52DDFC11-1406-A288-6504-451E03745736}"/>
+                <a16:creationId xmlns:a16="http://schemas.microsoft.com/office/drawing/2014/main" id="{E81572A7-19DD-9F10-BC73-25554D743B48}"/>
               </a:ext>
             </a:extLst>
           </p:cNvPr>
@@ -12704,8 +13639,8 @@
         </p:nvSpPr>
         <p:spPr>
           <a:xfrm>
-            <a:off x="17954794" y="15974208"/>
-            <a:ext cx="339726" cy="276999"/>
+            <a:off x="14745474" y="15915419"/>
+            <a:ext cx="548286" cy="292388"/>
           </a:xfrm>
           <a:prstGeom prst="rect">
             <a:avLst/>
@@ -12720,18 +13655,18 @@
           <a:p>
             <a:pPr algn="ctr"/>
             <a:r>
-              <a:rPr lang="en-US" sz="1200" dirty="0"/>
-              <a:t>1</a:t>
+              <a:rPr lang="en-US" sz="1300" dirty="0"/>
+              <a:t>-2</a:t>
             </a:r>
           </a:p>
         </p:txBody>
       </p:sp>
       <p:sp>
         <p:nvSpPr>
-          <p:cNvPr id="24" name="TextBox 23">
+          <p:cNvPr id="110" name="TextBox 109">
             <a:extLst>
               <a:ext uri="{FF2B5EF4-FFF2-40B4-BE49-F238E27FC236}">
-                <a16:creationId xmlns:a16="http://schemas.microsoft.com/office/drawing/2014/main" id="{FC4773BF-507C-F3BF-FB08-439CB1D02937}"/>
+                <a16:creationId xmlns:a16="http://schemas.microsoft.com/office/drawing/2014/main" id="{496861EB-171D-8BDE-AFA6-C5E914BE7820}"/>
               </a:ext>
             </a:extLst>
           </p:cNvPr>
@@ -12740,8 +13675,8 @@
         </p:nvSpPr>
         <p:spPr>
           <a:xfrm>
-            <a:off x="18281949" y="15974207"/>
-            <a:ext cx="339726" cy="276999"/>
+            <a:off x="12545433" y="15915419"/>
+            <a:ext cx="548286" cy="292388"/>
           </a:xfrm>
           <a:prstGeom prst="rect">
             <a:avLst/>
@@ -12756,7 +13691,7 @@
           <a:p>
             <a:pPr algn="ctr"/>
             <a:r>
-              <a:rPr lang="en-US" sz="1200" dirty="0"/>
+              <a:rPr lang="en-US" sz="1300" dirty="0"/>
               <a:t>2</a:t>
             </a:r>
           </a:p>
@@ -12764,10 +13699,10 @@
       </p:sp>
       <p:sp>
         <p:nvSpPr>
-          <p:cNvPr id="25" name="TextBox 24">
+          <p:cNvPr id="111" name="TextBox 110">
             <a:extLst>
               <a:ext uri="{FF2B5EF4-FFF2-40B4-BE49-F238E27FC236}">
-                <a16:creationId xmlns:a16="http://schemas.microsoft.com/office/drawing/2014/main" id="{80160AFC-3E31-3CE8-D574-1D757223141F}"/>
+                <a16:creationId xmlns:a16="http://schemas.microsoft.com/office/drawing/2014/main" id="{B978256F-C9DD-7E84-0003-C98F9DCB0A22}"/>
               </a:ext>
             </a:extLst>
           </p:cNvPr>
@@ -12776,8 +13711,8 @@
         </p:nvSpPr>
         <p:spPr>
           <a:xfrm>
-            <a:off x="18604342" y="15974207"/>
-            <a:ext cx="339726" cy="276999"/>
+            <a:off x="11894402" y="15915419"/>
+            <a:ext cx="548286" cy="292388"/>
           </a:xfrm>
           <a:prstGeom prst="rect">
             <a:avLst/>
@@ -12792,18 +13727,18 @@
           <a:p>
             <a:pPr algn="ctr"/>
             <a:r>
-              <a:rPr lang="en-US" sz="1200" dirty="0"/>
-              <a:t>3</a:t>
+              <a:rPr lang="en-US" sz="1300" dirty="0"/>
+              <a:t>1</a:t>
             </a:r>
           </a:p>
         </p:txBody>
       </p:sp>
       <p:sp>
         <p:nvSpPr>
-          <p:cNvPr id="26" name="TextBox 25">
+          <p:cNvPr id="112" name="TextBox 111">
             <a:extLst>
               <a:ext uri="{FF2B5EF4-FFF2-40B4-BE49-F238E27FC236}">
-                <a16:creationId xmlns:a16="http://schemas.microsoft.com/office/drawing/2014/main" id="{489BE4AC-A491-DE0D-EE85-8581BF42F68A}"/>
+                <a16:creationId xmlns:a16="http://schemas.microsoft.com/office/drawing/2014/main" id="{B3CCA778-9EB9-A279-2261-A83CAE3171E0}"/>
               </a:ext>
             </a:extLst>
           </p:cNvPr>
@@ -12812,8 +13747,8 @@
         </p:nvSpPr>
         <p:spPr>
           <a:xfrm>
-            <a:off x="18933878" y="15974206"/>
-            <a:ext cx="339726" cy="276999"/>
+            <a:off x="11248133" y="15915419"/>
+            <a:ext cx="548286" cy="292388"/>
           </a:xfrm>
           <a:prstGeom prst="rect">
             <a:avLst/>
@@ -12828,18 +13763,18 @@
           <a:p>
             <a:pPr algn="ctr"/>
             <a:r>
-              <a:rPr lang="en-US" sz="1200" dirty="0"/>
-              <a:t>4</a:t>
+              <a:rPr lang="en-US" sz="1300" dirty="0"/>
+              <a:t>0</a:t>
             </a:r>
           </a:p>
         </p:txBody>
       </p:sp>
       <p:sp>
         <p:nvSpPr>
-          <p:cNvPr id="27" name="TextBox 26">
+          <p:cNvPr id="113" name="TextBox 112">
             <a:extLst>
               <a:ext uri="{FF2B5EF4-FFF2-40B4-BE49-F238E27FC236}">
-                <a16:creationId xmlns:a16="http://schemas.microsoft.com/office/drawing/2014/main" id="{D8195BE4-F59B-5162-A1DA-3FC101962336}"/>
+                <a16:creationId xmlns:a16="http://schemas.microsoft.com/office/drawing/2014/main" id="{4D33CC74-3CB2-80C1-E844-F07D6E6983F2}"/>
               </a:ext>
             </a:extLst>
           </p:cNvPr>
@@ -12848,8 +13783,8 @@
         </p:nvSpPr>
         <p:spPr>
           <a:xfrm>
-            <a:off x="19327813" y="15974206"/>
-            <a:ext cx="339726" cy="276999"/>
+            <a:off x="10597103" y="15915419"/>
+            <a:ext cx="548286" cy="292388"/>
           </a:xfrm>
           <a:prstGeom prst="rect">
             <a:avLst/>
@@ -12864,7 +13799,7 @@
           <a:p>
             <a:pPr algn="ctr"/>
             <a:r>
-              <a:rPr lang="en-US" sz="1200" dirty="0"/>
+              <a:rPr lang="en-US" sz="1300" dirty="0"/>
               <a:t>-1</a:t>
             </a:r>
           </a:p>
@@ -12872,10 +13807,10 @@
       </p:sp>
       <p:sp>
         <p:nvSpPr>
-          <p:cNvPr id="28" name="TextBox 27">
+          <p:cNvPr id="114" name="TextBox 113">
             <a:extLst>
               <a:ext uri="{FF2B5EF4-FFF2-40B4-BE49-F238E27FC236}">
-                <a16:creationId xmlns:a16="http://schemas.microsoft.com/office/drawing/2014/main" id="{CEF98687-A3D4-9125-5A28-77F14BFD2D63}"/>
+                <a16:creationId xmlns:a16="http://schemas.microsoft.com/office/drawing/2014/main" id="{2D7FAE01-51BA-2556-A4AB-DD2CA686DCF9}"/>
               </a:ext>
             </a:extLst>
           </p:cNvPr>
@@ -12884,8 +13819,8 @@
         </p:nvSpPr>
         <p:spPr>
           <a:xfrm>
-            <a:off x="19651728" y="15974205"/>
-            <a:ext cx="339726" cy="276999"/>
+            <a:off x="9949073" y="15915419"/>
+            <a:ext cx="548286" cy="292388"/>
           </a:xfrm>
           <a:prstGeom prst="rect">
             <a:avLst/>
@@ -12900,18 +13835,49 @@
           <a:p>
             <a:pPr algn="ctr"/>
             <a:r>
-              <a:rPr lang="en-US" sz="1200" dirty="0"/>
-              <a:t>0</a:t>
+              <a:rPr lang="en-US" sz="1300" dirty="0"/>
+              <a:t>-2</a:t>
             </a:r>
           </a:p>
         </p:txBody>
       </p:sp>
+      <p:pic>
+        <p:nvPicPr>
+          <p:cNvPr id="115" name="Picture 114">
+            <a:extLst>
+              <a:ext uri="{FF2B5EF4-FFF2-40B4-BE49-F238E27FC236}">
+                <a16:creationId xmlns:a16="http://schemas.microsoft.com/office/drawing/2014/main" id="{E42A7D95-1C8A-72B7-48AD-7DA42E005301}"/>
+              </a:ext>
+            </a:extLst>
+          </p:cNvPr>
+          <p:cNvPicPr>
+            <a:picLocks noChangeAspect="1"/>
+          </p:cNvPicPr>
+          <p:nvPr/>
+        </p:nvPicPr>
+        <p:blipFill>
+          <a:blip r:embed="rId6"/>
+          <a:srcRect l="73264" t="20922" r="9701" b="66305"/>
+          <a:stretch>
+            <a:fillRect/>
+          </a:stretch>
+        </p:blipFill>
+        <p:spPr>
+          <a:xfrm>
+            <a:off x="17842421" y="14579796"/>
+            <a:ext cx="2187753" cy="934668"/>
+          </a:xfrm>
+          <a:prstGeom prst="rect">
+            <a:avLst/>
+          </a:prstGeom>
+        </p:spPr>
+      </p:pic>
       <p:sp>
         <p:nvSpPr>
-          <p:cNvPr id="29" name="TextBox 28">
+          <p:cNvPr id="117" name="TextBox 116">
             <a:extLst>
               <a:ext uri="{FF2B5EF4-FFF2-40B4-BE49-F238E27FC236}">
-                <a16:creationId xmlns:a16="http://schemas.microsoft.com/office/drawing/2014/main" id="{67959A56-FD76-4B0C-0009-C4511D8D4174}"/>
+                <a16:creationId xmlns:a16="http://schemas.microsoft.com/office/drawing/2014/main" id="{9DECBF54-75AF-45F9-6818-71F5AD7F32AF}"/>
               </a:ext>
             </a:extLst>
           </p:cNvPr>
@@ -12920,8 +13886,256 @@
         </p:nvSpPr>
         <p:spPr>
           <a:xfrm>
-            <a:off x="19980405" y="15974205"/>
-            <a:ext cx="339726" cy="276999"/>
+            <a:off x="9969851" y="13266319"/>
+            <a:ext cx="1684020" cy="338554"/>
+          </a:xfrm>
+          <a:prstGeom prst="rect">
+            <a:avLst/>
+          </a:prstGeom>
+          <a:noFill/>
+        </p:spPr>
+        <p:txBody>
+          <a:bodyPr wrap="square" rtlCol="0">
+            <a:spAutoFit/>
+          </a:bodyPr>
+          <a:lstStyle/>
+          <a:p>
+            <a:r>
+              <a:rPr lang="en-US" sz="1600" dirty="0"/>
+              <a:t>All species</a:t>
+            </a:r>
+          </a:p>
+        </p:txBody>
+      </p:sp>
+      <p:sp>
+        <p:nvSpPr>
+          <p:cNvPr id="118" name="TextBox 117">
+            <a:extLst>
+              <a:ext uri="{FF2B5EF4-FFF2-40B4-BE49-F238E27FC236}">
+                <a16:creationId xmlns:a16="http://schemas.microsoft.com/office/drawing/2014/main" id="{6294FF47-F487-D7CD-AE86-7348ADFBE622}"/>
+              </a:ext>
+            </a:extLst>
+          </p:cNvPr>
+          <p:cNvSpPr txBox="1"/>
+          <p:nvPr/>
+        </p:nvSpPr>
+        <p:spPr>
+          <a:xfrm>
+            <a:off x="14875419" y="13266319"/>
+            <a:ext cx="1684020" cy="338554"/>
+          </a:xfrm>
+          <a:prstGeom prst="rect">
+            <a:avLst/>
+          </a:prstGeom>
+          <a:noFill/>
+        </p:spPr>
+        <p:txBody>
+          <a:bodyPr wrap="square" rtlCol="0">
+            <a:spAutoFit/>
+          </a:bodyPr>
+          <a:lstStyle/>
+          <a:p>
+            <a:r>
+              <a:rPr lang="en-US" sz="1600" dirty="0"/>
+              <a:t>Mammalia</a:t>
+            </a:r>
+          </a:p>
+        </p:txBody>
+      </p:sp>
+      <p:sp>
+        <p:nvSpPr>
+          <p:cNvPr id="119" name="TextBox 118">
+            <a:extLst>
+              <a:ext uri="{FF2B5EF4-FFF2-40B4-BE49-F238E27FC236}">
+                <a16:creationId xmlns:a16="http://schemas.microsoft.com/office/drawing/2014/main" id="{8F613C8E-460C-1A05-8FDD-793137665073}"/>
+              </a:ext>
+            </a:extLst>
+          </p:cNvPr>
+          <p:cNvSpPr txBox="1"/>
+          <p:nvPr/>
+        </p:nvSpPr>
+        <p:spPr>
+          <a:xfrm>
+            <a:off x="9972437" y="16341090"/>
+            <a:ext cx="1684020" cy="338554"/>
+          </a:xfrm>
+          <a:prstGeom prst="rect">
+            <a:avLst/>
+          </a:prstGeom>
+          <a:noFill/>
+        </p:spPr>
+        <p:txBody>
+          <a:bodyPr wrap="square" rtlCol="0">
+            <a:spAutoFit/>
+          </a:bodyPr>
+          <a:lstStyle/>
+          <a:p>
+            <a:r>
+              <a:rPr lang="en-US" sz="1600" dirty="0"/>
+              <a:t>Actinopterygii</a:t>
+            </a:r>
+          </a:p>
+        </p:txBody>
+      </p:sp>
+      <p:sp>
+        <p:nvSpPr>
+          <p:cNvPr id="120" name="TextBox 119">
+            <a:extLst>
+              <a:ext uri="{FF2B5EF4-FFF2-40B4-BE49-F238E27FC236}">
+                <a16:creationId xmlns:a16="http://schemas.microsoft.com/office/drawing/2014/main" id="{4D6B7E08-CE46-7330-9139-D35354443ACB}"/>
+              </a:ext>
+            </a:extLst>
+          </p:cNvPr>
+          <p:cNvSpPr txBox="1"/>
+          <p:nvPr/>
+        </p:nvSpPr>
+        <p:spPr>
+          <a:xfrm>
+            <a:off x="14876340" y="16341293"/>
+            <a:ext cx="1684020" cy="338554"/>
+          </a:xfrm>
+          <a:prstGeom prst="rect">
+            <a:avLst/>
+          </a:prstGeom>
+          <a:noFill/>
+        </p:spPr>
+        <p:txBody>
+          <a:bodyPr wrap="square" rtlCol="0">
+            <a:spAutoFit/>
+          </a:bodyPr>
+          <a:lstStyle/>
+          <a:p>
+            <a:r>
+              <a:rPr lang="en-US" sz="1600" dirty="0" err="1"/>
+              <a:t>Sauropsida</a:t>
+            </a:r>
+            <a:endParaRPr lang="en-US" sz="1600" dirty="0"/>
+          </a:p>
+        </p:txBody>
+      </p:sp>
+      <p:pic>
+        <p:nvPicPr>
+          <p:cNvPr id="121" name="Picture 120">
+            <a:extLst>
+              <a:ext uri="{FF2B5EF4-FFF2-40B4-BE49-F238E27FC236}">
+                <a16:creationId xmlns:a16="http://schemas.microsoft.com/office/drawing/2014/main" id="{E7C1B47B-9EB9-6862-B6DA-6CB03AEF60AB}"/>
+              </a:ext>
+            </a:extLst>
+          </p:cNvPr>
+          <p:cNvPicPr>
+            <a:picLocks noChangeAspect="1"/>
+          </p:cNvPicPr>
+          <p:nvPr/>
+        </p:nvPicPr>
+        <p:blipFill>
+          <a:blip r:embed="rId6"/>
+          <a:srcRect l="73264" t="42542" r="9701" b="49130"/>
+          <a:stretch>
+            <a:fillRect/>
+          </a:stretch>
+        </p:blipFill>
+        <p:spPr>
+          <a:xfrm>
+            <a:off x="18142043" y="16881506"/>
+            <a:ext cx="2187753" cy="609407"/>
+          </a:xfrm>
+          <a:prstGeom prst="rect">
+            <a:avLst/>
+          </a:prstGeom>
+        </p:spPr>
+      </p:pic>
+      <p:sp>
+        <p:nvSpPr>
+          <p:cNvPr id="122" name="TextBox 121">
+            <a:extLst>
+              <a:ext uri="{FF2B5EF4-FFF2-40B4-BE49-F238E27FC236}">
+                <a16:creationId xmlns:a16="http://schemas.microsoft.com/office/drawing/2014/main" id="{68D798CF-9992-C537-7041-0E0B0C475E95}"/>
+              </a:ext>
+            </a:extLst>
+          </p:cNvPr>
+          <p:cNvSpPr txBox="1"/>
+          <p:nvPr/>
+        </p:nvSpPr>
+        <p:spPr>
+          <a:xfrm>
+            <a:off x="18182296" y="13916121"/>
+            <a:ext cx="1684020" cy="646331"/>
+          </a:xfrm>
+          <a:prstGeom prst="rect">
+            <a:avLst/>
+          </a:prstGeom>
+          <a:noFill/>
+        </p:spPr>
+        <p:txBody>
+          <a:bodyPr wrap="square" rtlCol="0">
+            <a:spAutoFit/>
+          </a:bodyPr>
+          <a:lstStyle/>
+          <a:p>
+            <a:r>
+              <a:rPr lang="en-US" sz="1800" dirty="0"/>
+              <a:t>Response</a:t>
+            </a:r>
+          </a:p>
+          <a:p>
+            <a:r>
+              <a:rPr lang="en-US" sz="1800" dirty="0"/>
+              <a:t>metric</a:t>
+            </a:r>
+          </a:p>
+        </p:txBody>
+      </p:sp>
+      <p:sp>
+        <p:nvSpPr>
+          <p:cNvPr id="123" name="TextBox 122">
+            <a:extLst>
+              <a:ext uri="{FF2B5EF4-FFF2-40B4-BE49-F238E27FC236}">
+                <a16:creationId xmlns:a16="http://schemas.microsoft.com/office/drawing/2014/main" id="{9B2F303B-6D7F-5B9E-4B7A-A36BF540E4AC}"/>
+              </a:ext>
+            </a:extLst>
+          </p:cNvPr>
+          <p:cNvSpPr txBox="1"/>
+          <p:nvPr/>
+        </p:nvSpPr>
+        <p:spPr>
+          <a:xfrm>
+            <a:off x="18212744" y="16497790"/>
+            <a:ext cx="1684020" cy="369332"/>
+          </a:xfrm>
+          <a:prstGeom prst="rect">
+            <a:avLst/>
+          </a:prstGeom>
+          <a:noFill/>
+        </p:spPr>
+        <p:txBody>
+          <a:bodyPr wrap="square" rtlCol="0">
+            <a:spAutoFit/>
+          </a:bodyPr>
+          <a:lstStyle/>
+          <a:p>
+            <a:r>
+              <a:rPr lang="en-US" sz="1800" dirty="0"/>
+              <a:t>Adequacy</a:t>
+            </a:r>
+          </a:p>
+        </p:txBody>
+      </p:sp>
+      <p:sp>
+        <p:nvSpPr>
+          <p:cNvPr id="124" name="TextBox 123">
+            <a:extLst>
+              <a:ext uri="{FF2B5EF4-FFF2-40B4-BE49-F238E27FC236}">
+                <a16:creationId xmlns:a16="http://schemas.microsoft.com/office/drawing/2014/main" id="{67D90586-2CBF-9726-DB19-39052AB35979}"/>
+              </a:ext>
+            </a:extLst>
+          </p:cNvPr>
+          <p:cNvSpPr txBox="1"/>
+          <p:nvPr/>
+        </p:nvSpPr>
+        <p:spPr>
+          <a:xfrm>
+            <a:off x="10333423" y="19280196"/>
+            <a:ext cx="2378861" cy="553998"/>
           </a:xfrm>
           <a:prstGeom prst="rect">
             <a:avLst/>
@@ -12936,18 +14150,33 @@
           <a:p>
             <a:pPr algn="ctr"/>
             <a:r>
-              <a:rPr lang="en-US" sz="1200" dirty="0"/>
-              <a:t>1</a:t>
+              <a:rPr lang="en-US" sz="1500" dirty="0"/>
+              <a:t>Sign-aligned </a:t>
+            </a:r>
+            <a:r>
+              <a:rPr lang="el-GR" sz="1500" dirty="0"/>
+              <a:t>β</a:t>
+            </a:r>
+            <a:r>
+              <a:rPr lang="en-US" sz="1500" dirty="0"/>
+              <a:t> </a:t>
+            </a:r>
+          </a:p>
+          <a:p>
+            <a:pPr algn="ctr"/>
+            <a:r>
+              <a:rPr lang="en-US" sz="1500" dirty="0"/>
+              <a:t> </a:t>
             </a:r>
           </a:p>
         </p:txBody>
       </p:sp>
       <p:sp>
         <p:nvSpPr>
-          <p:cNvPr id="30" name="TextBox 29">
+          <p:cNvPr id="125" name="TextBox 124">
             <a:extLst>
               <a:ext uri="{FF2B5EF4-FFF2-40B4-BE49-F238E27FC236}">
-                <a16:creationId xmlns:a16="http://schemas.microsoft.com/office/drawing/2014/main" id="{C09186B1-680F-333A-5166-F5CC9EC943C2}"/>
+                <a16:creationId xmlns:a16="http://schemas.microsoft.com/office/drawing/2014/main" id="{1FBE32D0-E3CF-261C-8EB4-FB9065B70273}"/>
               </a:ext>
             </a:extLst>
           </p:cNvPr>
@@ -12956,8 +14185,8 @@
         </p:nvSpPr>
         <p:spPr>
           <a:xfrm>
-            <a:off x="20307560" y="15974204"/>
-            <a:ext cx="339726" cy="276999"/>
+            <a:off x="15246006" y="19280196"/>
+            <a:ext cx="2378861" cy="553998"/>
           </a:xfrm>
           <a:prstGeom prst="rect">
             <a:avLst/>
@@ -12972,3081 +14201,33 @@
           <a:p>
             <a:pPr algn="ctr"/>
             <a:r>
-              <a:rPr lang="en-US" sz="1200" dirty="0"/>
-              <a:t>2</a:t>
+              <a:rPr lang="en-US" sz="1500" dirty="0"/>
+              <a:t>Sign-aligned </a:t>
+            </a:r>
+            <a:r>
+              <a:rPr lang="el-GR" sz="1500" dirty="0"/>
+              <a:t>β</a:t>
+            </a:r>
+            <a:r>
+              <a:rPr lang="en-US" sz="1500" dirty="0"/>
+              <a:t> </a:t>
             </a:r>
           </a:p>
-        </p:txBody>
-      </p:sp>
-      <p:sp>
-        <p:nvSpPr>
-          <p:cNvPr id="31" name="TextBox 30">
-            <a:extLst>
-              <a:ext uri="{FF2B5EF4-FFF2-40B4-BE49-F238E27FC236}">
-                <a16:creationId xmlns:a16="http://schemas.microsoft.com/office/drawing/2014/main" id="{1629038E-D2B5-8CDA-47C4-0DD1FAB90979}"/>
-              </a:ext>
-            </a:extLst>
-          </p:cNvPr>
-          <p:cNvSpPr txBox="1"/>
-          <p:nvPr/>
-        </p:nvSpPr>
-        <p:spPr>
-          <a:xfrm>
-            <a:off x="20629953" y="15974204"/>
-            <a:ext cx="339726" cy="276999"/>
-          </a:xfrm>
-          <a:prstGeom prst="rect">
-            <a:avLst/>
-          </a:prstGeom>
-          <a:noFill/>
-        </p:spPr>
-        <p:txBody>
-          <a:bodyPr wrap="square" rtlCol="0">
-            <a:spAutoFit/>
-          </a:bodyPr>
-          <a:lstStyle/>
           <a:p>
             <a:pPr algn="ctr"/>
             <a:r>
-              <a:rPr lang="en-US" sz="1200" dirty="0"/>
-              <a:t>3</a:t>
-            </a:r>
-          </a:p>
-        </p:txBody>
-      </p:sp>
-      <p:sp>
-        <p:nvSpPr>
-          <p:cNvPr id="32" name="TextBox 31">
-            <a:extLst>
-              <a:ext uri="{FF2B5EF4-FFF2-40B4-BE49-F238E27FC236}">
-                <a16:creationId xmlns:a16="http://schemas.microsoft.com/office/drawing/2014/main" id="{AC1EF558-FBEE-756F-6127-345086C61A7C}"/>
-              </a:ext>
-            </a:extLst>
-          </p:cNvPr>
-          <p:cNvSpPr txBox="1"/>
-          <p:nvPr/>
-        </p:nvSpPr>
-        <p:spPr>
-          <a:xfrm>
-            <a:off x="20959489" y="15974203"/>
-            <a:ext cx="339726" cy="276999"/>
-          </a:xfrm>
-          <a:prstGeom prst="rect">
-            <a:avLst/>
-          </a:prstGeom>
-          <a:noFill/>
-        </p:spPr>
-        <p:txBody>
-          <a:bodyPr wrap="square" rtlCol="0">
-            <a:spAutoFit/>
-          </a:bodyPr>
-          <a:lstStyle/>
-          <a:p>
-            <a:pPr algn="ctr"/>
-            <a:r>
-              <a:rPr lang="en-US" sz="1200" dirty="0"/>
-              <a:t>4</a:t>
-            </a:r>
-          </a:p>
-        </p:txBody>
-      </p:sp>
-      <p:sp>
-        <p:nvSpPr>
-          <p:cNvPr id="33" name="TextBox 32">
-            <a:extLst>
-              <a:ext uri="{FF2B5EF4-FFF2-40B4-BE49-F238E27FC236}">
-                <a16:creationId xmlns:a16="http://schemas.microsoft.com/office/drawing/2014/main" id="{98B3110B-2775-F089-909D-10DCAA69D746}"/>
-              </a:ext>
-            </a:extLst>
-          </p:cNvPr>
-          <p:cNvSpPr txBox="1"/>
-          <p:nvPr/>
-        </p:nvSpPr>
-        <p:spPr>
-          <a:xfrm>
-            <a:off x="12040395" y="19001344"/>
-            <a:ext cx="339726" cy="276999"/>
-          </a:xfrm>
-          <a:prstGeom prst="rect">
-            <a:avLst/>
-          </a:prstGeom>
-          <a:noFill/>
-        </p:spPr>
-        <p:txBody>
-          <a:bodyPr wrap="square" rtlCol="0">
-            <a:spAutoFit/>
-          </a:bodyPr>
-          <a:lstStyle/>
-          <a:p>
-            <a:pPr algn="ctr"/>
-            <a:r>
-              <a:rPr lang="en-US" sz="1200" dirty="0"/>
-              <a:t>-1</a:t>
-            </a:r>
-          </a:p>
-        </p:txBody>
-      </p:sp>
-      <p:sp>
-        <p:nvSpPr>
-          <p:cNvPr id="34" name="TextBox 33">
-            <a:extLst>
-              <a:ext uri="{FF2B5EF4-FFF2-40B4-BE49-F238E27FC236}">
-                <a16:creationId xmlns:a16="http://schemas.microsoft.com/office/drawing/2014/main" id="{F6917313-55EE-C0B9-4590-7056BBA52849}"/>
-              </a:ext>
-            </a:extLst>
-          </p:cNvPr>
-          <p:cNvSpPr txBox="1"/>
-          <p:nvPr/>
-        </p:nvSpPr>
-        <p:spPr>
-          <a:xfrm>
-            <a:off x="12804775" y="19001343"/>
-            <a:ext cx="339726" cy="276999"/>
-          </a:xfrm>
-          <a:prstGeom prst="rect">
-            <a:avLst/>
-          </a:prstGeom>
-          <a:noFill/>
-        </p:spPr>
-        <p:txBody>
-          <a:bodyPr wrap="square" rtlCol="0">
-            <a:spAutoFit/>
-          </a:bodyPr>
-          <a:lstStyle/>
-          <a:p>
-            <a:pPr algn="ctr"/>
-            <a:r>
-              <a:rPr lang="en-US" sz="1200" dirty="0"/>
-              <a:t>0</a:t>
-            </a:r>
-          </a:p>
-        </p:txBody>
-      </p:sp>
-      <p:sp>
-        <p:nvSpPr>
-          <p:cNvPr id="35" name="TextBox 34">
-            <a:extLst>
-              <a:ext uri="{FF2B5EF4-FFF2-40B4-BE49-F238E27FC236}">
-                <a16:creationId xmlns:a16="http://schemas.microsoft.com/office/drawing/2014/main" id="{54A82166-DEB8-89AB-2176-57EE3FBBE70A}"/>
-              </a:ext>
-            </a:extLst>
-          </p:cNvPr>
-          <p:cNvSpPr txBox="1"/>
-          <p:nvPr/>
-        </p:nvSpPr>
-        <p:spPr>
-          <a:xfrm>
-            <a:off x="13567571" y="19001342"/>
-            <a:ext cx="339726" cy="276999"/>
-          </a:xfrm>
-          <a:prstGeom prst="rect">
-            <a:avLst/>
-          </a:prstGeom>
-          <a:noFill/>
-        </p:spPr>
-        <p:txBody>
-          <a:bodyPr wrap="square" rtlCol="0">
-            <a:spAutoFit/>
-          </a:bodyPr>
-          <a:lstStyle/>
-          <a:p>
-            <a:pPr algn="ctr"/>
-            <a:r>
-              <a:rPr lang="en-US" sz="1200" dirty="0"/>
-              <a:t>1</a:t>
-            </a:r>
-          </a:p>
-        </p:txBody>
-      </p:sp>
-      <p:sp>
-        <p:nvSpPr>
-          <p:cNvPr id="36" name="TextBox 35">
-            <a:extLst>
-              <a:ext uri="{FF2B5EF4-FFF2-40B4-BE49-F238E27FC236}">
-                <a16:creationId xmlns:a16="http://schemas.microsoft.com/office/drawing/2014/main" id="{AD1288F6-6B89-7A9F-D8FA-F3633D582870}"/>
-              </a:ext>
-            </a:extLst>
-          </p:cNvPr>
-          <p:cNvSpPr txBox="1"/>
-          <p:nvPr/>
-        </p:nvSpPr>
-        <p:spPr>
-          <a:xfrm>
-            <a:off x="13154628" y="19001341"/>
-            <a:ext cx="407192" cy="276999"/>
-          </a:xfrm>
-          <a:prstGeom prst="rect">
-            <a:avLst/>
-          </a:prstGeom>
-          <a:noFill/>
-        </p:spPr>
-        <p:txBody>
-          <a:bodyPr wrap="square" rtlCol="0">
-            <a:spAutoFit/>
-          </a:bodyPr>
-          <a:lstStyle/>
-          <a:p>
-            <a:pPr algn="ctr"/>
-            <a:r>
-              <a:rPr lang="en-US" sz="1200" dirty="0"/>
-              <a:t>0.5</a:t>
-            </a:r>
-          </a:p>
-        </p:txBody>
-      </p:sp>
-      <p:sp>
-        <p:nvSpPr>
-          <p:cNvPr id="37" name="TextBox 36">
-            <a:extLst>
-              <a:ext uri="{FF2B5EF4-FFF2-40B4-BE49-F238E27FC236}">
-                <a16:creationId xmlns:a16="http://schemas.microsoft.com/office/drawing/2014/main" id="{0744430D-3B7B-D697-C1DE-E583166ED7FE}"/>
-              </a:ext>
-            </a:extLst>
-          </p:cNvPr>
-          <p:cNvSpPr txBox="1"/>
-          <p:nvPr/>
-        </p:nvSpPr>
-        <p:spPr>
-          <a:xfrm>
-            <a:off x="12367219" y="19001341"/>
-            <a:ext cx="453034" cy="276999"/>
-          </a:xfrm>
-          <a:prstGeom prst="rect">
-            <a:avLst/>
-          </a:prstGeom>
-          <a:noFill/>
-        </p:spPr>
-        <p:txBody>
-          <a:bodyPr wrap="square" rtlCol="0">
-            <a:spAutoFit/>
-          </a:bodyPr>
-          <a:lstStyle/>
-          <a:p>
-            <a:pPr algn="ctr"/>
-            <a:r>
-              <a:rPr lang="en-US" sz="1200" dirty="0"/>
-              <a:t>-0.5</a:t>
-            </a:r>
-          </a:p>
-        </p:txBody>
-      </p:sp>
-      <p:sp>
-        <p:nvSpPr>
-          <p:cNvPr id="38" name="TextBox 37">
-            <a:extLst>
-              <a:ext uri="{FF2B5EF4-FFF2-40B4-BE49-F238E27FC236}">
-                <a16:creationId xmlns:a16="http://schemas.microsoft.com/office/drawing/2014/main" id="{7C8D9860-CF1D-F8DB-D0D6-57D4366633F3}"/>
-              </a:ext>
-            </a:extLst>
-          </p:cNvPr>
-          <p:cNvSpPr txBox="1"/>
-          <p:nvPr/>
-        </p:nvSpPr>
-        <p:spPr>
-          <a:xfrm>
-            <a:off x="14092234" y="19001344"/>
-            <a:ext cx="339726" cy="276999"/>
-          </a:xfrm>
-          <a:prstGeom prst="rect">
-            <a:avLst/>
-          </a:prstGeom>
-          <a:noFill/>
-        </p:spPr>
-        <p:txBody>
-          <a:bodyPr wrap="square" rtlCol="0">
-            <a:spAutoFit/>
-          </a:bodyPr>
-          <a:lstStyle/>
-          <a:p>
-            <a:pPr algn="ctr"/>
-            <a:r>
-              <a:rPr lang="en-US" sz="1200" dirty="0"/>
-              <a:t>-1</a:t>
-            </a:r>
-          </a:p>
-        </p:txBody>
-      </p:sp>
-      <p:sp>
-        <p:nvSpPr>
-          <p:cNvPr id="39" name="TextBox 38">
-            <a:extLst>
-              <a:ext uri="{FF2B5EF4-FFF2-40B4-BE49-F238E27FC236}">
-                <a16:creationId xmlns:a16="http://schemas.microsoft.com/office/drawing/2014/main" id="{5FA550B2-176A-6F12-F663-5296C4A0095E}"/>
-              </a:ext>
-            </a:extLst>
-          </p:cNvPr>
-          <p:cNvSpPr txBox="1"/>
-          <p:nvPr/>
-        </p:nvSpPr>
-        <p:spPr>
-          <a:xfrm>
-            <a:off x="14844709" y="19001343"/>
-            <a:ext cx="339726" cy="276999"/>
-          </a:xfrm>
-          <a:prstGeom prst="rect">
-            <a:avLst/>
-          </a:prstGeom>
-          <a:noFill/>
-        </p:spPr>
-        <p:txBody>
-          <a:bodyPr wrap="square" rtlCol="0">
-            <a:spAutoFit/>
-          </a:bodyPr>
-          <a:lstStyle/>
-          <a:p>
-            <a:pPr algn="ctr"/>
-            <a:r>
-              <a:rPr lang="en-US" sz="1200" dirty="0"/>
-              <a:t>0</a:t>
-            </a:r>
-          </a:p>
-        </p:txBody>
-      </p:sp>
-      <p:sp>
-        <p:nvSpPr>
-          <p:cNvPr id="40" name="TextBox 39">
-            <a:extLst>
-              <a:ext uri="{FF2B5EF4-FFF2-40B4-BE49-F238E27FC236}">
-                <a16:creationId xmlns:a16="http://schemas.microsoft.com/office/drawing/2014/main" id="{81E0A588-03AF-4025-7C36-3C0029BE907E}"/>
-              </a:ext>
-            </a:extLst>
-          </p:cNvPr>
-          <p:cNvSpPr txBox="1"/>
-          <p:nvPr/>
-        </p:nvSpPr>
-        <p:spPr>
-          <a:xfrm>
-            <a:off x="15602743" y="19001342"/>
-            <a:ext cx="339726" cy="276999"/>
-          </a:xfrm>
-          <a:prstGeom prst="rect">
-            <a:avLst/>
-          </a:prstGeom>
-          <a:noFill/>
-        </p:spPr>
-        <p:txBody>
-          <a:bodyPr wrap="square" rtlCol="0">
-            <a:spAutoFit/>
-          </a:bodyPr>
-          <a:lstStyle/>
-          <a:p>
-            <a:pPr algn="ctr"/>
-            <a:r>
-              <a:rPr lang="en-US" sz="1200" dirty="0"/>
-              <a:t>1</a:t>
-            </a:r>
-          </a:p>
-        </p:txBody>
-      </p:sp>
-      <p:sp>
-        <p:nvSpPr>
-          <p:cNvPr id="41" name="TextBox 40">
-            <a:extLst>
-              <a:ext uri="{FF2B5EF4-FFF2-40B4-BE49-F238E27FC236}">
-                <a16:creationId xmlns:a16="http://schemas.microsoft.com/office/drawing/2014/main" id="{F8DBBD69-F065-8BBD-0E58-AC0FA61D90C9}"/>
-              </a:ext>
-            </a:extLst>
-          </p:cNvPr>
-          <p:cNvSpPr txBox="1"/>
-          <p:nvPr/>
-        </p:nvSpPr>
-        <p:spPr>
-          <a:xfrm>
-            <a:off x="15187419" y="19001341"/>
-            <a:ext cx="407192" cy="276999"/>
-          </a:xfrm>
-          <a:prstGeom prst="rect">
-            <a:avLst/>
-          </a:prstGeom>
-          <a:noFill/>
-        </p:spPr>
-        <p:txBody>
-          <a:bodyPr wrap="square" rtlCol="0">
-            <a:spAutoFit/>
-          </a:bodyPr>
-          <a:lstStyle/>
-          <a:p>
-            <a:pPr algn="ctr"/>
-            <a:r>
-              <a:rPr lang="en-US" sz="1200" dirty="0"/>
-              <a:t>0.5</a:t>
-            </a:r>
-          </a:p>
-        </p:txBody>
-      </p:sp>
-      <p:sp>
-        <p:nvSpPr>
-          <p:cNvPr id="42" name="TextBox 41">
-            <a:extLst>
-              <a:ext uri="{FF2B5EF4-FFF2-40B4-BE49-F238E27FC236}">
-                <a16:creationId xmlns:a16="http://schemas.microsoft.com/office/drawing/2014/main" id="{E33A828B-3F64-C12E-FCCB-987C64EBC6D2}"/>
-              </a:ext>
-            </a:extLst>
-          </p:cNvPr>
-          <p:cNvSpPr txBox="1"/>
-          <p:nvPr/>
-        </p:nvSpPr>
-        <p:spPr>
-          <a:xfrm>
-            <a:off x="14411915" y="19001341"/>
-            <a:ext cx="453034" cy="276999"/>
-          </a:xfrm>
-          <a:prstGeom prst="rect">
-            <a:avLst/>
-          </a:prstGeom>
-          <a:noFill/>
-        </p:spPr>
-        <p:txBody>
-          <a:bodyPr wrap="square" rtlCol="0">
-            <a:spAutoFit/>
-          </a:bodyPr>
-          <a:lstStyle/>
-          <a:p>
-            <a:pPr algn="ctr"/>
-            <a:r>
-              <a:rPr lang="en-US" sz="1200" dirty="0"/>
-              <a:t>-0.5</a:t>
-            </a:r>
-          </a:p>
-        </p:txBody>
-      </p:sp>
-      <p:sp>
-        <p:nvSpPr>
-          <p:cNvPr id="43" name="TextBox 42">
-            <a:extLst>
-              <a:ext uri="{FF2B5EF4-FFF2-40B4-BE49-F238E27FC236}">
-                <a16:creationId xmlns:a16="http://schemas.microsoft.com/office/drawing/2014/main" id="{7ABF4356-B37C-532A-471E-B498B0FC4945}"/>
-              </a:ext>
-            </a:extLst>
-          </p:cNvPr>
-          <p:cNvSpPr txBox="1"/>
-          <p:nvPr/>
-        </p:nvSpPr>
-        <p:spPr>
-          <a:xfrm>
-            <a:off x="17282424" y="19001341"/>
-            <a:ext cx="339726" cy="261610"/>
-          </a:xfrm>
-          <a:prstGeom prst="rect">
-            <a:avLst/>
-          </a:prstGeom>
-          <a:noFill/>
-        </p:spPr>
-        <p:txBody>
-          <a:bodyPr wrap="square" rtlCol="0">
-            <a:spAutoFit/>
-          </a:bodyPr>
-          <a:lstStyle/>
-          <a:p>
-            <a:pPr algn="ctr"/>
-            <a:r>
-              <a:rPr lang="en-US" sz="1100" dirty="0"/>
-              <a:t>-8</a:t>
-            </a:r>
-          </a:p>
-        </p:txBody>
-      </p:sp>
-      <p:sp>
-        <p:nvSpPr>
-          <p:cNvPr id="44" name="TextBox 43">
-            <a:extLst>
-              <a:ext uri="{FF2B5EF4-FFF2-40B4-BE49-F238E27FC236}">
-                <a16:creationId xmlns:a16="http://schemas.microsoft.com/office/drawing/2014/main" id="{9089ED85-B426-4811-7F82-3672715B1E95}"/>
-              </a:ext>
-            </a:extLst>
-          </p:cNvPr>
-          <p:cNvSpPr txBox="1"/>
-          <p:nvPr/>
-        </p:nvSpPr>
-        <p:spPr>
-          <a:xfrm>
-            <a:off x="17784871" y="19001341"/>
-            <a:ext cx="339726" cy="261610"/>
-          </a:xfrm>
-          <a:prstGeom prst="rect">
-            <a:avLst/>
-          </a:prstGeom>
-          <a:noFill/>
-        </p:spPr>
-        <p:txBody>
-          <a:bodyPr wrap="square" rtlCol="0">
-            <a:spAutoFit/>
-          </a:bodyPr>
-          <a:lstStyle/>
-          <a:p>
-            <a:pPr algn="ctr"/>
-            <a:r>
-              <a:rPr lang="en-US" sz="1100" dirty="0"/>
-              <a:t>-4</a:t>
-            </a:r>
-          </a:p>
-        </p:txBody>
-      </p:sp>
-      <p:sp>
-        <p:nvSpPr>
-          <p:cNvPr id="45" name="TextBox 44">
-            <a:extLst>
-              <a:ext uri="{FF2B5EF4-FFF2-40B4-BE49-F238E27FC236}">
-                <a16:creationId xmlns:a16="http://schemas.microsoft.com/office/drawing/2014/main" id="{437C5666-7311-2515-F938-970B7DA62232}"/>
-              </a:ext>
-            </a:extLst>
-          </p:cNvPr>
-          <p:cNvSpPr txBox="1"/>
-          <p:nvPr/>
-        </p:nvSpPr>
-        <p:spPr>
-          <a:xfrm>
-            <a:off x="18287699" y="19001332"/>
-            <a:ext cx="339726" cy="261610"/>
-          </a:xfrm>
-          <a:prstGeom prst="rect">
-            <a:avLst/>
-          </a:prstGeom>
-          <a:noFill/>
-        </p:spPr>
-        <p:txBody>
-          <a:bodyPr wrap="square" rtlCol="0">
-            <a:spAutoFit/>
-          </a:bodyPr>
-          <a:lstStyle/>
-          <a:p>
-            <a:pPr algn="ctr"/>
-            <a:r>
-              <a:rPr lang="en-US" sz="1100" dirty="0"/>
-              <a:t>0</a:t>
-            </a:r>
-          </a:p>
-        </p:txBody>
-      </p:sp>
-      <p:sp>
-        <p:nvSpPr>
-          <p:cNvPr id="47" name="TextBox 46">
-            <a:extLst>
-              <a:ext uri="{FF2B5EF4-FFF2-40B4-BE49-F238E27FC236}">
-                <a16:creationId xmlns:a16="http://schemas.microsoft.com/office/drawing/2014/main" id="{196CC9EB-E9AA-7C59-B356-748946C83BE4}"/>
-              </a:ext>
-            </a:extLst>
-          </p:cNvPr>
-          <p:cNvSpPr txBox="1"/>
-          <p:nvPr/>
-        </p:nvSpPr>
-        <p:spPr>
-          <a:xfrm>
-            <a:off x="18540112" y="19001331"/>
-            <a:ext cx="339726" cy="261610"/>
-          </a:xfrm>
-          <a:prstGeom prst="rect">
-            <a:avLst/>
-          </a:prstGeom>
-          <a:noFill/>
-        </p:spPr>
-        <p:txBody>
-          <a:bodyPr wrap="square" rtlCol="0">
-            <a:spAutoFit/>
-          </a:bodyPr>
-          <a:lstStyle/>
-          <a:p>
-            <a:pPr algn="ctr"/>
-            <a:r>
-              <a:rPr lang="en-US" sz="1100" dirty="0"/>
-              <a:t>2</a:t>
-            </a:r>
-          </a:p>
-        </p:txBody>
-      </p:sp>
-      <p:sp>
-        <p:nvSpPr>
-          <p:cNvPr id="48" name="TextBox 47">
-            <a:extLst>
-              <a:ext uri="{FF2B5EF4-FFF2-40B4-BE49-F238E27FC236}">
-                <a16:creationId xmlns:a16="http://schemas.microsoft.com/office/drawing/2014/main" id="{29D5BAA2-8C3D-615F-33AC-6CC2DA2986DD}"/>
-              </a:ext>
-            </a:extLst>
-          </p:cNvPr>
-          <p:cNvSpPr txBox="1"/>
-          <p:nvPr/>
-        </p:nvSpPr>
-        <p:spPr>
-          <a:xfrm>
-            <a:off x="18792525" y="19001330"/>
-            <a:ext cx="339726" cy="261610"/>
-          </a:xfrm>
-          <a:prstGeom prst="rect">
-            <a:avLst/>
-          </a:prstGeom>
-          <a:noFill/>
-        </p:spPr>
-        <p:txBody>
-          <a:bodyPr wrap="square" rtlCol="0">
-            <a:spAutoFit/>
-          </a:bodyPr>
-          <a:lstStyle/>
-          <a:p>
-            <a:pPr algn="ctr"/>
-            <a:r>
-              <a:rPr lang="en-US" sz="1100" dirty="0"/>
-              <a:t>4</a:t>
-            </a:r>
-          </a:p>
-        </p:txBody>
-      </p:sp>
-      <p:sp>
-        <p:nvSpPr>
-          <p:cNvPr id="49" name="TextBox 48">
-            <a:extLst>
-              <a:ext uri="{FF2B5EF4-FFF2-40B4-BE49-F238E27FC236}">
-                <a16:creationId xmlns:a16="http://schemas.microsoft.com/office/drawing/2014/main" id="{B6D7A18B-2F01-7883-0030-D14FA697BF6E}"/>
-              </a:ext>
-            </a:extLst>
-          </p:cNvPr>
-          <p:cNvSpPr txBox="1"/>
-          <p:nvPr/>
-        </p:nvSpPr>
-        <p:spPr>
-          <a:xfrm>
-            <a:off x="19042559" y="19001330"/>
-            <a:ext cx="339726" cy="261610"/>
-          </a:xfrm>
-          <a:prstGeom prst="rect">
-            <a:avLst/>
-          </a:prstGeom>
-          <a:noFill/>
-        </p:spPr>
-        <p:txBody>
-          <a:bodyPr wrap="square" rtlCol="0">
-            <a:spAutoFit/>
-          </a:bodyPr>
-          <a:lstStyle/>
-          <a:p>
-            <a:pPr algn="ctr"/>
-            <a:r>
-              <a:rPr lang="en-US" sz="1100" dirty="0"/>
-              <a:t>6</a:t>
-            </a:r>
-          </a:p>
-        </p:txBody>
-      </p:sp>
-      <p:sp>
-        <p:nvSpPr>
-          <p:cNvPr id="50" name="TextBox 49">
-            <a:extLst>
-              <a:ext uri="{FF2B5EF4-FFF2-40B4-BE49-F238E27FC236}">
-                <a16:creationId xmlns:a16="http://schemas.microsoft.com/office/drawing/2014/main" id="{3BCB0472-CC38-595E-4955-929E25714C5F}"/>
-              </a:ext>
-            </a:extLst>
-          </p:cNvPr>
-          <p:cNvSpPr txBox="1"/>
-          <p:nvPr/>
-        </p:nvSpPr>
-        <p:spPr>
-          <a:xfrm>
-            <a:off x="18037286" y="19001329"/>
-            <a:ext cx="339726" cy="261610"/>
-          </a:xfrm>
-          <a:prstGeom prst="rect">
-            <a:avLst/>
-          </a:prstGeom>
-          <a:noFill/>
-        </p:spPr>
-        <p:txBody>
-          <a:bodyPr wrap="square" rtlCol="0">
-            <a:spAutoFit/>
-          </a:bodyPr>
-          <a:lstStyle/>
-          <a:p>
-            <a:pPr algn="ctr"/>
-            <a:r>
-              <a:rPr lang="en-US" sz="1100" dirty="0"/>
-              <a:t>-2</a:t>
-            </a:r>
-          </a:p>
-        </p:txBody>
-      </p:sp>
-      <p:sp>
-        <p:nvSpPr>
-          <p:cNvPr id="51" name="TextBox 50">
-            <a:extLst>
-              <a:ext uri="{FF2B5EF4-FFF2-40B4-BE49-F238E27FC236}">
-                <a16:creationId xmlns:a16="http://schemas.microsoft.com/office/drawing/2014/main" id="{49BB7541-A03F-1189-759A-1AB0067CF741}"/>
-              </a:ext>
-            </a:extLst>
-          </p:cNvPr>
-          <p:cNvSpPr txBox="1"/>
-          <p:nvPr/>
-        </p:nvSpPr>
-        <p:spPr>
-          <a:xfrm>
-            <a:off x="17532847" y="19001329"/>
-            <a:ext cx="339726" cy="261610"/>
-          </a:xfrm>
-          <a:prstGeom prst="rect">
-            <a:avLst/>
-          </a:prstGeom>
-          <a:noFill/>
-        </p:spPr>
-        <p:txBody>
-          <a:bodyPr wrap="square" rtlCol="0">
-            <a:spAutoFit/>
-          </a:bodyPr>
-          <a:lstStyle/>
-          <a:p>
-            <a:pPr algn="ctr"/>
-            <a:r>
-              <a:rPr lang="en-US" sz="1100" dirty="0"/>
-              <a:t>-6</a:t>
-            </a:r>
-          </a:p>
-        </p:txBody>
-      </p:sp>
-      <p:sp>
-        <p:nvSpPr>
-          <p:cNvPr id="60" name="TextBox 59">
-            <a:extLst>
-              <a:ext uri="{FF2B5EF4-FFF2-40B4-BE49-F238E27FC236}">
-                <a16:creationId xmlns:a16="http://schemas.microsoft.com/office/drawing/2014/main" id="{82BADAB7-E49E-3F3D-F8E7-65241F819131}"/>
-              </a:ext>
-            </a:extLst>
-          </p:cNvPr>
-          <p:cNvSpPr txBox="1"/>
-          <p:nvPr/>
-        </p:nvSpPr>
-        <p:spPr>
-          <a:xfrm>
-            <a:off x="19336644" y="19001329"/>
-            <a:ext cx="339726" cy="261610"/>
-          </a:xfrm>
-          <a:prstGeom prst="rect">
-            <a:avLst/>
-          </a:prstGeom>
-          <a:noFill/>
-        </p:spPr>
-        <p:txBody>
-          <a:bodyPr wrap="square" rtlCol="0">
-            <a:spAutoFit/>
-          </a:bodyPr>
-          <a:lstStyle/>
-          <a:p>
-            <a:pPr algn="ctr"/>
-            <a:r>
-              <a:rPr lang="en-US" sz="1100" dirty="0"/>
-              <a:t>-8</a:t>
-            </a:r>
-          </a:p>
-        </p:txBody>
-      </p:sp>
-      <p:sp>
-        <p:nvSpPr>
-          <p:cNvPr id="61" name="TextBox 60">
-            <a:extLst>
-              <a:ext uri="{FF2B5EF4-FFF2-40B4-BE49-F238E27FC236}">
-                <a16:creationId xmlns:a16="http://schemas.microsoft.com/office/drawing/2014/main" id="{71FD222C-9F7C-B419-48B3-F2B9E92B4C25}"/>
-              </a:ext>
-            </a:extLst>
-          </p:cNvPr>
-          <p:cNvSpPr txBox="1"/>
-          <p:nvPr/>
-        </p:nvSpPr>
-        <p:spPr>
-          <a:xfrm>
-            <a:off x="19839091" y="19001329"/>
-            <a:ext cx="339726" cy="261610"/>
-          </a:xfrm>
-          <a:prstGeom prst="rect">
-            <a:avLst/>
-          </a:prstGeom>
-          <a:noFill/>
-        </p:spPr>
-        <p:txBody>
-          <a:bodyPr wrap="square" rtlCol="0">
-            <a:spAutoFit/>
-          </a:bodyPr>
-          <a:lstStyle/>
-          <a:p>
-            <a:pPr algn="ctr"/>
-            <a:r>
-              <a:rPr lang="en-US" sz="1100" dirty="0"/>
-              <a:t>-4</a:t>
-            </a:r>
-          </a:p>
-        </p:txBody>
-      </p:sp>
-      <p:sp>
-        <p:nvSpPr>
-          <p:cNvPr id="62" name="TextBox 61">
-            <a:extLst>
-              <a:ext uri="{FF2B5EF4-FFF2-40B4-BE49-F238E27FC236}">
-                <a16:creationId xmlns:a16="http://schemas.microsoft.com/office/drawing/2014/main" id="{B036FDA3-5F79-968E-1E69-F1B57C3C80C9}"/>
-              </a:ext>
-            </a:extLst>
-          </p:cNvPr>
-          <p:cNvSpPr txBox="1"/>
-          <p:nvPr/>
-        </p:nvSpPr>
-        <p:spPr>
-          <a:xfrm>
-            <a:off x="20341919" y="19001320"/>
-            <a:ext cx="339726" cy="261610"/>
-          </a:xfrm>
-          <a:prstGeom prst="rect">
-            <a:avLst/>
-          </a:prstGeom>
-          <a:noFill/>
-        </p:spPr>
-        <p:txBody>
-          <a:bodyPr wrap="square" rtlCol="0">
-            <a:spAutoFit/>
-          </a:bodyPr>
-          <a:lstStyle/>
-          <a:p>
-            <a:pPr algn="ctr"/>
-            <a:r>
-              <a:rPr lang="en-US" sz="1100" dirty="0"/>
-              <a:t>0</a:t>
-            </a:r>
-          </a:p>
-        </p:txBody>
-      </p:sp>
-      <p:sp>
-        <p:nvSpPr>
-          <p:cNvPr id="63" name="TextBox 62">
-            <a:extLst>
-              <a:ext uri="{FF2B5EF4-FFF2-40B4-BE49-F238E27FC236}">
-                <a16:creationId xmlns:a16="http://schemas.microsoft.com/office/drawing/2014/main" id="{CBEADC6F-2FD8-42C0-F4EC-7D2BB92035A4}"/>
-              </a:ext>
-            </a:extLst>
-          </p:cNvPr>
-          <p:cNvSpPr txBox="1"/>
-          <p:nvPr/>
-        </p:nvSpPr>
-        <p:spPr>
-          <a:xfrm>
-            <a:off x="20594332" y="19001319"/>
-            <a:ext cx="339726" cy="261610"/>
-          </a:xfrm>
-          <a:prstGeom prst="rect">
-            <a:avLst/>
-          </a:prstGeom>
-          <a:noFill/>
-        </p:spPr>
-        <p:txBody>
-          <a:bodyPr wrap="square" rtlCol="0">
-            <a:spAutoFit/>
-          </a:bodyPr>
-          <a:lstStyle/>
-          <a:p>
-            <a:pPr algn="ctr"/>
-            <a:r>
-              <a:rPr lang="en-US" sz="1100" dirty="0"/>
-              <a:t>2</a:t>
-            </a:r>
-          </a:p>
-        </p:txBody>
-      </p:sp>
-      <p:sp>
-        <p:nvSpPr>
-          <p:cNvPr id="64" name="TextBox 63">
-            <a:extLst>
-              <a:ext uri="{FF2B5EF4-FFF2-40B4-BE49-F238E27FC236}">
-                <a16:creationId xmlns:a16="http://schemas.microsoft.com/office/drawing/2014/main" id="{7ED26D36-D7FD-0AEF-679D-A18C191DA2DB}"/>
-              </a:ext>
-            </a:extLst>
-          </p:cNvPr>
-          <p:cNvSpPr txBox="1"/>
-          <p:nvPr/>
-        </p:nvSpPr>
-        <p:spPr>
-          <a:xfrm>
-            <a:off x="20846745" y="19001318"/>
-            <a:ext cx="339726" cy="261610"/>
-          </a:xfrm>
-          <a:prstGeom prst="rect">
-            <a:avLst/>
-          </a:prstGeom>
-          <a:noFill/>
-        </p:spPr>
-        <p:txBody>
-          <a:bodyPr wrap="square" rtlCol="0">
-            <a:spAutoFit/>
-          </a:bodyPr>
-          <a:lstStyle/>
-          <a:p>
-            <a:pPr algn="ctr"/>
-            <a:r>
-              <a:rPr lang="en-US" sz="1100" dirty="0"/>
-              <a:t>4</a:t>
-            </a:r>
-          </a:p>
-        </p:txBody>
-      </p:sp>
-      <p:sp>
-        <p:nvSpPr>
-          <p:cNvPr id="65" name="TextBox 64">
-            <a:extLst>
-              <a:ext uri="{FF2B5EF4-FFF2-40B4-BE49-F238E27FC236}">
-                <a16:creationId xmlns:a16="http://schemas.microsoft.com/office/drawing/2014/main" id="{E27E783E-F99B-E81F-1098-04B843DCC79E}"/>
-              </a:ext>
-            </a:extLst>
-          </p:cNvPr>
-          <p:cNvSpPr txBox="1"/>
-          <p:nvPr/>
-        </p:nvSpPr>
-        <p:spPr>
-          <a:xfrm>
-            <a:off x="21096779" y="19001318"/>
-            <a:ext cx="339726" cy="261610"/>
-          </a:xfrm>
-          <a:prstGeom prst="rect">
-            <a:avLst/>
-          </a:prstGeom>
-          <a:noFill/>
-        </p:spPr>
-        <p:txBody>
-          <a:bodyPr wrap="square" rtlCol="0">
-            <a:spAutoFit/>
-          </a:bodyPr>
-          <a:lstStyle/>
-          <a:p>
-            <a:pPr algn="ctr"/>
-            <a:r>
-              <a:rPr lang="en-US" sz="1100" dirty="0"/>
-              <a:t>6</a:t>
-            </a:r>
-          </a:p>
-        </p:txBody>
-      </p:sp>
-      <p:sp>
-        <p:nvSpPr>
-          <p:cNvPr id="66" name="TextBox 65">
-            <a:extLst>
-              <a:ext uri="{FF2B5EF4-FFF2-40B4-BE49-F238E27FC236}">
-                <a16:creationId xmlns:a16="http://schemas.microsoft.com/office/drawing/2014/main" id="{157F2156-EB90-DF26-B88D-6CE4A0C9F98F}"/>
-              </a:ext>
-            </a:extLst>
-          </p:cNvPr>
-          <p:cNvSpPr txBox="1"/>
-          <p:nvPr/>
-        </p:nvSpPr>
-        <p:spPr>
-          <a:xfrm>
-            <a:off x="20091506" y="19001317"/>
-            <a:ext cx="339726" cy="261610"/>
-          </a:xfrm>
-          <a:prstGeom prst="rect">
-            <a:avLst/>
-          </a:prstGeom>
-          <a:noFill/>
-        </p:spPr>
-        <p:txBody>
-          <a:bodyPr wrap="square" rtlCol="0">
-            <a:spAutoFit/>
-          </a:bodyPr>
-          <a:lstStyle/>
-          <a:p>
-            <a:pPr algn="ctr"/>
-            <a:r>
-              <a:rPr lang="en-US" sz="1100" dirty="0"/>
-              <a:t>-2</a:t>
-            </a:r>
-          </a:p>
-        </p:txBody>
-      </p:sp>
-      <p:sp>
-        <p:nvSpPr>
-          <p:cNvPr id="67" name="TextBox 66">
-            <a:extLst>
-              <a:ext uri="{FF2B5EF4-FFF2-40B4-BE49-F238E27FC236}">
-                <a16:creationId xmlns:a16="http://schemas.microsoft.com/office/drawing/2014/main" id="{B9E4426E-420E-B68E-E4E4-4AF5908012F6}"/>
-              </a:ext>
-            </a:extLst>
-          </p:cNvPr>
-          <p:cNvSpPr txBox="1"/>
-          <p:nvPr/>
-        </p:nvSpPr>
-        <p:spPr>
-          <a:xfrm>
-            <a:off x="19587067" y="19001317"/>
-            <a:ext cx="339726" cy="261610"/>
-          </a:xfrm>
-          <a:prstGeom prst="rect">
-            <a:avLst/>
-          </a:prstGeom>
-          <a:noFill/>
-        </p:spPr>
-        <p:txBody>
-          <a:bodyPr wrap="square" rtlCol="0">
-            <a:spAutoFit/>
-          </a:bodyPr>
-          <a:lstStyle/>
-          <a:p>
-            <a:pPr algn="ctr"/>
-            <a:r>
-              <a:rPr lang="en-US" sz="1100" dirty="0"/>
-              <a:t>-6</a:t>
-            </a:r>
-          </a:p>
-        </p:txBody>
-      </p:sp>
-      <p:sp>
-        <p:nvSpPr>
-          <p:cNvPr id="68" name="TextBox 67">
-            <a:extLst>
-              <a:ext uri="{FF2B5EF4-FFF2-40B4-BE49-F238E27FC236}">
-                <a16:creationId xmlns:a16="http://schemas.microsoft.com/office/drawing/2014/main" id="{8363BCE0-20EE-BB05-6BD2-FFB7AB12AA7F}"/>
-              </a:ext>
-            </a:extLst>
-          </p:cNvPr>
-          <p:cNvSpPr txBox="1"/>
-          <p:nvPr/>
-        </p:nvSpPr>
-        <p:spPr>
-          <a:xfrm>
-            <a:off x="15818874" y="16775700"/>
-            <a:ext cx="1524000" cy="215444"/>
-          </a:xfrm>
-          <a:prstGeom prst="rect">
-            <a:avLst/>
-          </a:prstGeom>
-          <a:noFill/>
-        </p:spPr>
-        <p:txBody>
-          <a:bodyPr wrap="square" rtlCol="0">
-            <a:spAutoFit/>
-          </a:bodyPr>
-          <a:lstStyle/>
-          <a:p>
-            <a:pPr algn="r"/>
-            <a:r>
-              <a:rPr lang="en-US" sz="800" dirty="0"/>
-              <a:t>DNA age</a:t>
-            </a:r>
-          </a:p>
-        </p:txBody>
-      </p:sp>
-      <p:sp>
-        <p:nvSpPr>
-          <p:cNvPr id="69" name="TextBox 68">
-            <a:extLst>
-              <a:ext uri="{FF2B5EF4-FFF2-40B4-BE49-F238E27FC236}">
-                <a16:creationId xmlns:a16="http://schemas.microsoft.com/office/drawing/2014/main" id="{B27E41CF-44FF-0D54-A73D-79E298C48173}"/>
-              </a:ext>
-            </a:extLst>
-          </p:cNvPr>
-          <p:cNvSpPr txBox="1"/>
-          <p:nvPr/>
-        </p:nvSpPr>
-        <p:spPr>
-          <a:xfrm>
-            <a:off x="15818874" y="17006532"/>
-            <a:ext cx="1524000" cy="215444"/>
-          </a:xfrm>
-          <a:prstGeom prst="rect">
-            <a:avLst/>
-          </a:prstGeom>
-          <a:noFill/>
-        </p:spPr>
-        <p:txBody>
-          <a:bodyPr wrap="square" rtlCol="0">
-            <a:spAutoFit/>
-          </a:bodyPr>
-          <a:lstStyle/>
-          <a:p>
-            <a:pPr algn="r"/>
-            <a:r>
-              <a:rPr lang="en-US" sz="800" dirty="0"/>
-              <a:t>LINE age</a:t>
-            </a:r>
-          </a:p>
-        </p:txBody>
-      </p:sp>
-      <p:sp>
-        <p:nvSpPr>
-          <p:cNvPr id="70" name="TextBox 69">
-            <a:extLst>
-              <a:ext uri="{FF2B5EF4-FFF2-40B4-BE49-F238E27FC236}">
-                <a16:creationId xmlns:a16="http://schemas.microsoft.com/office/drawing/2014/main" id="{86BFA92A-FA7D-05F0-044F-08FB460C8F7F}"/>
-              </a:ext>
-            </a:extLst>
-          </p:cNvPr>
-          <p:cNvSpPr txBox="1"/>
-          <p:nvPr/>
-        </p:nvSpPr>
-        <p:spPr>
-          <a:xfrm>
-            <a:off x="15818874" y="17237364"/>
-            <a:ext cx="1524000" cy="215444"/>
-          </a:xfrm>
-          <a:prstGeom prst="rect">
-            <a:avLst/>
-          </a:prstGeom>
-          <a:noFill/>
-        </p:spPr>
-        <p:txBody>
-          <a:bodyPr wrap="square" rtlCol="0">
-            <a:spAutoFit/>
-          </a:bodyPr>
-          <a:lstStyle/>
-          <a:p>
-            <a:pPr algn="r"/>
-            <a:r>
-              <a:rPr lang="en-US" sz="800" dirty="0"/>
-              <a:t>LINE age</a:t>
-            </a:r>
-          </a:p>
-        </p:txBody>
-      </p:sp>
-      <p:sp>
-        <p:nvSpPr>
-          <p:cNvPr id="71" name="TextBox 70">
-            <a:extLst>
-              <a:ext uri="{FF2B5EF4-FFF2-40B4-BE49-F238E27FC236}">
-                <a16:creationId xmlns:a16="http://schemas.microsoft.com/office/drawing/2014/main" id="{8F55A254-B588-FBCF-5712-C0E2822902EE}"/>
-              </a:ext>
-            </a:extLst>
-          </p:cNvPr>
-          <p:cNvSpPr txBox="1"/>
-          <p:nvPr/>
-        </p:nvSpPr>
-        <p:spPr>
-          <a:xfrm>
-            <a:off x="15818874" y="17470926"/>
-            <a:ext cx="1524000" cy="215444"/>
-          </a:xfrm>
-          <a:prstGeom prst="rect">
-            <a:avLst/>
-          </a:prstGeom>
-          <a:noFill/>
-        </p:spPr>
-        <p:txBody>
-          <a:bodyPr wrap="square" rtlCol="0">
-            <a:spAutoFit/>
-          </a:bodyPr>
-          <a:lstStyle/>
-          <a:p>
-            <a:pPr algn="r"/>
-            <a:r>
-              <a:rPr lang="en-US" sz="800" dirty="0"/>
-              <a:t>Others age</a:t>
-            </a:r>
-          </a:p>
-        </p:txBody>
-      </p:sp>
-      <p:sp>
-        <p:nvSpPr>
-          <p:cNvPr id="72" name="TextBox 71">
-            <a:extLst>
-              <a:ext uri="{FF2B5EF4-FFF2-40B4-BE49-F238E27FC236}">
-                <a16:creationId xmlns:a16="http://schemas.microsoft.com/office/drawing/2014/main" id="{D6F7BD20-87DC-829B-6DE6-CB0646E137A9}"/>
-              </a:ext>
-            </a:extLst>
-          </p:cNvPr>
-          <p:cNvSpPr txBox="1"/>
-          <p:nvPr/>
-        </p:nvSpPr>
-        <p:spPr>
-          <a:xfrm>
-            <a:off x="15818874" y="17706171"/>
-            <a:ext cx="1524000" cy="215444"/>
-          </a:xfrm>
-          <a:prstGeom prst="rect">
-            <a:avLst/>
-          </a:prstGeom>
-          <a:noFill/>
-        </p:spPr>
-        <p:txBody>
-          <a:bodyPr wrap="square" rtlCol="0">
-            <a:spAutoFit/>
-          </a:bodyPr>
-          <a:lstStyle/>
-          <a:p>
-            <a:pPr algn="r"/>
-            <a:r>
-              <a:rPr lang="en-US" sz="800" dirty="0"/>
-              <a:t>SINE age</a:t>
-            </a:r>
-          </a:p>
-        </p:txBody>
-      </p:sp>
-      <p:sp>
-        <p:nvSpPr>
-          <p:cNvPr id="73" name="TextBox 72">
-            <a:extLst>
-              <a:ext uri="{FF2B5EF4-FFF2-40B4-BE49-F238E27FC236}">
-                <a16:creationId xmlns:a16="http://schemas.microsoft.com/office/drawing/2014/main" id="{3A41FB5C-DF29-6CE6-CF1E-C2ED01BC8716}"/>
-              </a:ext>
-            </a:extLst>
-          </p:cNvPr>
-          <p:cNvSpPr txBox="1"/>
-          <p:nvPr/>
-        </p:nvSpPr>
-        <p:spPr>
-          <a:xfrm>
-            <a:off x="15818874" y="17937003"/>
-            <a:ext cx="1524000" cy="215444"/>
-          </a:xfrm>
-          <a:prstGeom prst="rect">
-            <a:avLst/>
-          </a:prstGeom>
-          <a:noFill/>
-        </p:spPr>
-        <p:txBody>
-          <a:bodyPr wrap="square" rtlCol="0">
-            <a:spAutoFit/>
-          </a:bodyPr>
-          <a:lstStyle/>
-          <a:p>
-            <a:pPr algn="r"/>
-            <a:r>
-              <a:rPr lang="en-US" sz="800" dirty="0"/>
-              <a:t>Unknown age x prop.</a:t>
-            </a:r>
-          </a:p>
-        </p:txBody>
-      </p:sp>
-      <p:sp>
-        <p:nvSpPr>
-          <p:cNvPr id="74" name="TextBox 73">
-            <a:extLst>
-              <a:ext uri="{FF2B5EF4-FFF2-40B4-BE49-F238E27FC236}">
-                <a16:creationId xmlns:a16="http://schemas.microsoft.com/office/drawing/2014/main" id="{00351ADD-B5BB-808D-BD5E-1A7B8246AE71}"/>
-              </a:ext>
-            </a:extLst>
-          </p:cNvPr>
-          <p:cNvSpPr txBox="1"/>
-          <p:nvPr/>
-        </p:nvSpPr>
-        <p:spPr>
-          <a:xfrm>
-            <a:off x="15818874" y="18170216"/>
-            <a:ext cx="1524000" cy="215444"/>
-          </a:xfrm>
-          <a:prstGeom prst="rect">
-            <a:avLst/>
-          </a:prstGeom>
-          <a:noFill/>
-        </p:spPr>
-        <p:txBody>
-          <a:bodyPr wrap="square" rtlCol="0">
-            <a:spAutoFit/>
-          </a:bodyPr>
-          <a:lstStyle/>
-          <a:p>
-            <a:pPr algn="r"/>
-            <a:r>
-              <a:rPr lang="en-US" sz="800" dirty="0"/>
-              <a:t>LINE proportion</a:t>
-            </a:r>
-          </a:p>
-        </p:txBody>
-      </p:sp>
-      <p:sp>
-        <p:nvSpPr>
-          <p:cNvPr id="75" name="TextBox 74">
-            <a:extLst>
-              <a:ext uri="{FF2B5EF4-FFF2-40B4-BE49-F238E27FC236}">
-                <a16:creationId xmlns:a16="http://schemas.microsoft.com/office/drawing/2014/main" id="{4EF86A72-1C7A-1653-7AF4-DB70AEABF595}"/>
-              </a:ext>
-            </a:extLst>
-          </p:cNvPr>
-          <p:cNvSpPr txBox="1"/>
-          <p:nvPr/>
-        </p:nvSpPr>
-        <p:spPr>
-          <a:xfrm>
-            <a:off x="15818874" y="18403429"/>
-            <a:ext cx="1524000" cy="215444"/>
-          </a:xfrm>
-          <a:prstGeom prst="rect">
-            <a:avLst/>
-          </a:prstGeom>
-          <a:noFill/>
-        </p:spPr>
-        <p:txBody>
-          <a:bodyPr wrap="square" rtlCol="0">
-            <a:spAutoFit/>
-          </a:bodyPr>
-          <a:lstStyle/>
-          <a:p>
-            <a:pPr algn="r"/>
-            <a:r>
-              <a:rPr lang="en-US" sz="800" dirty="0"/>
-              <a:t>Others proportion</a:t>
-            </a:r>
-          </a:p>
-        </p:txBody>
-      </p:sp>
-      <p:sp>
-        <p:nvSpPr>
-          <p:cNvPr id="76" name="TextBox 75">
-            <a:extLst>
-              <a:ext uri="{FF2B5EF4-FFF2-40B4-BE49-F238E27FC236}">
-                <a16:creationId xmlns:a16="http://schemas.microsoft.com/office/drawing/2014/main" id="{874F92EC-7018-0838-73B8-5B160D30DB6E}"/>
-              </a:ext>
-            </a:extLst>
-          </p:cNvPr>
-          <p:cNvSpPr txBox="1"/>
-          <p:nvPr/>
-        </p:nvSpPr>
-        <p:spPr>
-          <a:xfrm>
-            <a:off x="15818874" y="18636642"/>
-            <a:ext cx="1524000" cy="215444"/>
-          </a:xfrm>
-          <a:prstGeom prst="rect">
-            <a:avLst/>
-          </a:prstGeom>
-          <a:noFill/>
-        </p:spPr>
-        <p:txBody>
-          <a:bodyPr wrap="square" rtlCol="0">
-            <a:spAutoFit/>
-          </a:bodyPr>
-          <a:lstStyle/>
-          <a:p>
-            <a:pPr algn="r"/>
-            <a:r>
-              <a:rPr lang="en-US" sz="800" dirty="0"/>
-              <a:t>Unknown proportion</a:t>
-            </a:r>
-          </a:p>
-        </p:txBody>
-      </p:sp>
-      <p:sp>
-        <p:nvSpPr>
-          <p:cNvPr id="77" name="TextBox 76">
-            <a:extLst>
-              <a:ext uri="{FF2B5EF4-FFF2-40B4-BE49-F238E27FC236}">
-                <a16:creationId xmlns:a16="http://schemas.microsoft.com/office/drawing/2014/main" id="{42A8FE68-27BA-7288-4CC7-9F1BA9B3F771}"/>
-              </a:ext>
-            </a:extLst>
-          </p:cNvPr>
-          <p:cNvSpPr txBox="1"/>
-          <p:nvPr/>
-        </p:nvSpPr>
-        <p:spPr>
-          <a:xfrm>
-            <a:off x="15818874" y="16891465"/>
-            <a:ext cx="1524000" cy="215444"/>
-          </a:xfrm>
-          <a:prstGeom prst="rect">
-            <a:avLst/>
-          </a:prstGeom>
-          <a:noFill/>
-        </p:spPr>
-        <p:txBody>
-          <a:bodyPr wrap="square" rtlCol="0">
-            <a:spAutoFit/>
-          </a:bodyPr>
-          <a:lstStyle/>
-          <a:p>
-            <a:pPr algn="r"/>
-            <a:r>
-              <a:rPr lang="en-US" sz="800" dirty="0"/>
-              <a:t>DNA age x prop.</a:t>
-            </a:r>
-          </a:p>
-        </p:txBody>
-      </p:sp>
-      <p:sp>
-        <p:nvSpPr>
-          <p:cNvPr id="78" name="TextBox 77">
-            <a:extLst>
-              <a:ext uri="{FF2B5EF4-FFF2-40B4-BE49-F238E27FC236}">
-                <a16:creationId xmlns:a16="http://schemas.microsoft.com/office/drawing/2014/main" id="{39325659-4890-5C11-A4AF-8CACD7EDDFA7}"/>
-              </a:ext>
-            </a:extLst>
-          </p:cNvPr>
-          <p:cNvSpPr txBox="1"/>
-          <p:nvPr/>
-        </p:nvSpPr>
-        <p:spPr>
-          <a:xfrm>
-            <a:off x="15818683" y="17124374"/>
-            <a:ext cx="1524000" cy="215444"/>
-          </a:xfrm>
-          <a:prstGeom prst="rect">
-            <a:avLst/>
-          </a:prstGeom>
-          <a:noFill/>
-        </p:spPr>
-        <p:txBody>
-          <a:bodyPr wrap="square" rtlCol="0">
-            <a:spAutoFit/>
-          </a:bodyPr>
-          <a:lstStyle/>
-          <a:p>
-            <a:pPr algn="r"/>
-            <a:r>
-              <a:rPr lang="en-US" sz="800" dirty="0"/>
-              <a:t>LINE age x prop.</a:t>
-            </a:r>
-          </a:p>
-        </p:txBody>
-      </p:sp>
-      <p:sp>
-        <p:nvSpPr>
-          <p:cNvPr id="79" name="TextBox 78">
-            <a:extLst>
-              <a:ext uri="{FF2B5EF4-FFF2-40B4-BE49-F238E27FC236}">
-                <a16:creationId xmlns:a16="http://schemas.microsoft.com/office/drawing/2014/main" id="{07CA8625-0741-BF34-96CA-38949C84C5C8}"/>
-              </a:ext>
-            </a:extLst>
-          </p:cNvPr>
-          <p:cNvSpPr txBox="1"/>
-          <p:nvPr/>
-        </p:nvSpPr>
-        <p:spPr>
-          <a:xfrm>
-            <a:off x="15818264" y="17354812"/>
-            <a:ext cx="1524000" cy="215444"/>
-          </a:xfrm>
-          <a:prstGeom prst="rect">
-            <a:avLst/>
-          </a:prstGeom>
-          <a:noFill/>
-        </p:spPr>
-        <p:txBody>
-          <a:bodyPr wrap="square" rtlCol="0">
-            <a:spAutoFit/>
-          </a:bodyPr>
-          <a:lstStyle/>
-          <a:p>
-            <a:pPr algn="r"/>
-            <a:r>
-              <a:rPr lang="en-US" sz="800" dirty="0"/>
-              <a:t>LTR age x prop.</a:t>
-            </a:r>
-          </a:p>
-        </p:txBody>
-      </p:sp>
-      <p:sp>
-        <p:nvSpPr>
-          <p:cNvPr id="80" name="TextBox 79">
-            <a:extLst>
-              <a:ext uri="{FF2B5EF4-FFF2-40B4-BE49-F238E27FC236}">
-                <a16:creationId xmlns:a16="http://schemas.microsoft.com/office/drawing/2014/main" id="{0081DD2E-9FB7-BCCA-A674-CE371FD63317}"/>
-              </a:ext>
-            </a:extLst>
-          </p:cNvPr>
-          <p:cNvSpPr txBox="1"/>
-          <p:nvPr/>
-        </p:nvSpPr>
-        <p:spPr>
-          <a:xfrm>
-            <a:off x="15818683" y="17588329"/>
-            <a:ext cx="1524000" cy="215444"/>
-          </a:xfrm>
-          <a:prstGeom prst="rect">
-            <a:avLst/>
-          </a:prstGeom>
-          <a:noFill/>
-        </p:spPr>
-        <p:txBody>
-          <a:bodyPr wrap="square" rtlCol="0">
-            <a:spAutoFit/>
-          </a:bodyPr>
-          <a:lstStyle/>
-          <a:p>
-            <a:pPr algn="r"/>
-            <a:r>
-              <a:rPr lang="en-US" sz="800" dirty="0"/>
-              <a:t>Others age x prop.</a:t>
-            </a:r>
-          </a:p>
-        </p:txBody>
-      </p:sp>
-      <p:sp>
-        <p:nvSpPr>
-          <p:cNvPr id="81" name="TextBox 80">
-            <a:extLst>
-              <a:ext uri="{FF2B5EF4-FFF2-40B4-BE49-F238E27FC236}">
-                <a16:creationId xmlns:a16="http://schemas.microsoft.com/office/drawing/2014/main" id="{8E5EB311-BF47-869F-2CFC-9ED53ABD5061}"/>
-              </a:ext>
-            </a:extLst>
-          </p:cNvPr>
-          <p:cNvSpPr txBox="1"/>
-          <p:nvPr/>
-        </p:nvSpPr>
-        <p:spPr>
-          <a:xfrm>
-            <a:off x="15818264" y="17821635"/>
-            <a:ext cx="1524000" cy="215444"/>
-          </a:xfrm>
-          <a:prstGeom prst="rect">
-            <a:avLst/>
-          </a:prstGeom>
-          <a:noFill/>
-        </p:spPr>
-        <p:txBody>
-          <a:bodyPr wrap="square" rtlCol="0">
-            <a:spAutoFit/>
-          </a:bodyPr>
-          <a:lstStyle/>
-          <a:p>
-            <a:pPr algn="r"/>
-            <a:r>
-              <a:rPr lang="en-US" sz="800" dirty="0"/>
-              <a:t>Unknown age</a:t>
-            </a:r>
-          </a:p>
-        </p:txBody>
-      </p:sp>
-      <p:sp>
-        <p:nvSpPr>
-          <p:cNvPr id="82" name="TextBox 81">
-            <a:extLst>
-              <a:ext uri="{FF2B5EF4-FFF2-40B4-BE49-F238E27FC236}">
-                <a16:creationId xmlns:a16="http://schemas.microsoft.com/office/drawing/2014/main" id="{7223B53B-F300-0201-737B-5C47A5908E0C}"/>
-              </a:ext>
-            </a:extLst>
-          </p:cNvPr>
-          <p:cNvSpPr txBox="1"/>
-          <p:nvPr/>
-        </p:nvSpPr>
-        <p:spPr>
-          <a:xfrm>
-            <a:off x="15819730" y="18052374"/>
-            <a:ext cx="1524000" cy="215444"/>
-          </a:xfrm>
-          <a:prstGeom prst="rect">
-            <a:avLst/>
-          </a:prstGeom>
-          <a:noFill/>
-        </p:spPr>
-        <p:txBody>
-          <a:bodyPr wrap="square" rtlCol="0">
-            <a:spAutoFit/>
-          </a:bodyPr>
-          <a:lstStyle/>
-          <a:p>
-            <a:pPr algn="r"/>
-            <a:r>
-              <a:rPr lang="en-US" sz="800" dirty="0"/>
-              <a:t>DNA proportion</a:t>
-            </a:r>
-          </a:p>
-        </p:txBody>
-      </p:sp>
-      <p:sp>
-        <p:nvSpPr>
-          <p:cNvPr id="83" name="TextBox 82">
-            <a:extLst>
-              <a:ext uri="{FF2B5EF4-FFF2-40B4-BE49-F238E27FC236}">
-                <a16:creationId xmlns:a16="http://schemas.microsoft.com/office/drawing/2014/main" id="{1779232D-30BD-7528-5E44-936B0CC1E9CA}"/>
-              </a:ext>
-            </a:extLst>
-          </p:cNvPr>
-          <p:cNvSpPr txBox="1"/>
-          <p:nvPr/>
-        </p:nvSpPr>
-        <p:spPr>
-          <a:xfrm>
-            <a:off x="15818264" y="18285494"/>
-            <a:ext cx="1524000" cy="215444"/>
-          </a:xfrm>
-          <a:prstGeom prst="rect">
-            <a:avLst/>
-          </a:prstGeom>
-          <a:noFill/>
-        </p:spPr>
-        <p:txBody>
-          <a:bodyPr wrap="square" rtlCol="0">
-            <a:spAutoFit/>
-          </a:bodyPr>
-          <a:lstStyle/>
-          <a:p>
-            <a:pPr algn="r"/>
-            <a:r>
-              <a:rPr lang="en-US" sz="800" dirty="0"/>
-              <a:t>LTR proportion</a:t>
-            </a:r>
-          </a:p>
-        </p:txBody>
-      </p:sp>
-      <p:sp>
-        <p:nvSpPr>
-          <p:cNvPr id="84" name="TextBox 83">
-            <a:extLst>
-              <a:ext uri="{FF2B5EF4-FFF2-40B4-BE49-F238E27FC236}">
-                <a16:creationId xmlns:a16="http://schemas.microsoft.com/office/drawing/2014/main" id="{C01643B8-DE22-DF1E-3724-AE0CF28EF8F2}"/>
-              </a:ext>
-            </a:extLst>
-          </p:cNvPr>
-          <p:cNvSpPr txBox="1"/>
-          <p:nvPr/>
-        </p:nvSpPr>
-        <p:spPr>
-          <a:xfrm>
-            <a:off x="15818264" y="18517710"/>
-            <a:ext cx="1524000" cy="215444"/>
-          </a:xfrm>
-          <a:prstGeom prst="rect">
-            <a:avLst/>
-          </a:prstGeom>
-          <a:noFill/>
-        </p:spPr>
-        <p:txBody>
-          <a:bodyPr wrap="square" rtlCol="0">
-            <a:spAutoFit/>
-          </a:bodyPr>
-          <a:lstStyle/>
-          <a:p>
-            <a:pPr algn="r"/>
-            <a:r>
-              <a:rPr lang="en-US" sz="800" dirty="0"/>
-              <a:t>SINE proportion</a:t>
-            </a:r>
-          </a:p>
-        </p:txBody>
-      </p:sp>
-      <p:sp>
-        <p:nvSpPr>
-          <p:cNvPr id="86" name="TextBox 85">
-            <a:extLst>
-              <a:ext uri="{FF2B5EF4-FFF2-40B4-BE49-F238E27FC236}">
-                <a16:creationId xmlns:a16="http://schemas.microsoft.com/office/drawing/2014/main" id="{72F6B63F-0C6F-8251-58D9-558045B3AED0}"/>
-              </a:ext>
-            </a:extLst>
-          </p:cNvPr>
-          <p:cNvSpPr txBox="1"/>
-          <p:nvPr/>
-        </p:nvSpPr>
-        <p:spPr>
-          <a:xfrm>
-            <a:off x="10254063" y="15519671"/>
-            <a:ext cx="1717685" cy="261610"/>
-          </a:xfrm>
-          <a:prstGeom prst="rect">
-            <a:avLst/>
-          </a:prstGeom>
-          <a:noFill/>
-        </p:spPr>
-        <p:txBody>
-          <a:bodyPr wrap="square" rtlCol="0">
-            <a:spAutoFit/>
-          </a:bodyPr>
-          <a:lstStyle/>
-          <a:p>
-            <a:pPr algn="r"/>
-            <a:r>
-              <a:rPr lang="en-US" sz="1100" dirty="0"/>
-              <a:t>SINE proportion</a:t>
-            </a:r>
-          </a:p>
-        </p:txBody>
-      </p:sp>
-      <p:sp>
-        <p:nvSpPr>
-          <p:cNvPr id="87" name="TextBox 86">
-            <a:extLst>
-              <a:ext uri="{FF2B5EF4-FFF2-40B4-BE49-F238E27FC236}">
-                <a16:creationId xmlns:a16="http://schemas.microsoft.com/office/drawing/2014/main" id="{CFBAB527-1E4F-6584-3F04-124F43FAD108}"/>
-              </a:ext>
-            </a:extLst>
-          </p:cNvPr>
-          <p:cNvSpPr txBox="1"/>
-          <p:nvPr/>
-        </p:nvSpPr>
-        <p:spPr>
-          <a:xfrm>
-            <a:off x="10254063" y="15305357"/>
-            <a:ext cx="1717685" cy="261610"/>
-          </a:xfrm>
-          <a:prstGeom prst="rect">
-            <a:avLst/>
-          </a:prstGeom>
-          <a:noFill/>
-        </p:spPr>
-        <p:txBody>
-          <a:bodyPr wrap="square" rtlCol="0">
-            <a:spAutoFit/>
-          </a:bodyPr>
-          <a:lstStyle/>
-          <a:p>
-            <a:pPr algn="r"/>
-            <a:r>
-              <a:rPr lang="en-US" sz="1100" dirty="0"/>
-              <a:t>LTR proportion</a:t>
-            </a:r>
-          </a:p>
-        </p:txBody>
-      </p:sp>
-      <p:sp>
-        <p:nvSpPr>
-          <p:cNvPr id="88" name="TextBox 87">
-            <a:extLst>
-              <a:ext uri="{FF2B5EF4-FFF2-40B4-BE49-F238E27FC236}">
-                <a16:creationId xmlns:a16="http://schemas.microsoft.com/office/drawing/2014/main" id="{8119EE48-36C7-2F90-95A2-70E00A27E616}"/>
-              </a:ext>
-            </a:extLst>
-          </p:cNvPr>
-          <p:cNvSpPr txBox="1"/>
-          <p:nvPr/>
-        </p:nvSpPr>
-        <p:spPr>
-          <a:xfrm>
-            <a:off x="10254061" y="14661213"/>
-            <a:ext cx="1717685" cy="261610"/>
-          </a:xfrm>
-          <a:prstGeom prst="rect">
-            <a:avLst/>
-          </a:prstGeom>
-          <a:noFill/>
-        </p:spPr>
-        <p:txBody>
-          <a:bodyPr wrap="square" rtlCol="0">
-            <a:spAutoFit/>
-          </a:bodyPr>
-          <a:lstStyle/>
-          <a:p>
-            <a:pPr algn="r"/>
-            <a:r>
-              <a:rPr lang="en-US" sz="1100" dirty="0"/>
-              <a:t>Unknown age</a:t>
-            </a:r>
-          </a:p>
-        </p:txBody>
-      </p:sp>
-      <p:sp>
-        <p:nvSpPr>
-          <p:cNvPr id="89" name="TextBox 88">
-            <a:extLst>
-              <a:ext uri="{FF2B5EF4-FFF2-40B4-BE49-F238E27FC236}">
-                <a16:creationId xmlns:a16="http://schemas.microsoft.com/office/drawing/2014/main" id="{715BE5EA-D37E-4FE9-8613-500C30F1125F}"/>
-              </a:ext>
-            </a:extLst>
-          </p:cNvPr>
-          <p:cNvSpPr txBox="1"/>
-          <p:nvPr/>
-        </p:nvSpPr>
-        <p:spPr>
-          <a:xfrm>
-            <a:off x="10254061" y="14874340"/>
-            <a:ext cx="1717685" cy="261610"/>
-          </a:xfrm>
-          <a:prstGeom prst="rect">
-            <a:avLst/>
-          </a:prstGeom>
-          <a:noFill/>
-        </p:spPr>
-        <p:txBody>
-          <a:bodyPr wrap="square" rtlCol="0">
-            <a:spAutoFit/>
-          </a:bodyPr>
-          <a:lstStyle/>
-          <a:p>
-            <a:pPr algn="r"/>
-            <a:r>
-              <a:rPr lang="en-US" sz="1100" dirty="0"/>
-              <a:t>DNA proportion</a:t>
-            </a:r>
-          </a:p>
-        </p:txBody>
-      </p:sp>
-      <p:sp>
-        <p:nvSpPr>
-          <p:cNvPr id="90" name="TextBox 89">
-            <a:extLst>
-              <a:ext uri="{FF2B5EF4-FFF2-40B4-BE49-F238E27FC236}">
-                <a16:creationId xmlns:a16="http://schemas.microsoft.com/office/drawing/2014/main" id="{6CEA434B-4745-01F4-46B1-6F0EDC994956}"/>
-              </a:ext>
-            </a:extLst>
-          </p:cNvPr>
-          <p:cNvSpPr txBox="1"/>
-          <p:nvPr/>
-        </p:nvSpPr>
-        <p:spPr>
-          <a:xfrm>
-            <a:off x="10254060" y="15091505"/>
-            <a:ext cx="1717685" cy="261610"/>
-          </a:xfrm>
-          <a:prstGeom prst="rect">
-            <a:avLst/>
-          </a:prstGeom>
-          <a:noFill/>
-        </p:spPr>
-        <p:txBody>
-          <a:bodyPr wrap="square" rtlCol="0">
-            <a:spAutoFit/>
-          </a:bodyPr>
-          <a:lstStyle/>
-          <a:p>
-            <a:pPr algn="r"/>
-            <a:r>
-              <a:rPr lang="en-US" sz="1100" dirty="0"/>
-              <a:t>LINE proportion</a:t>
-            </a:r>
-          </a:p>
-        </p:txBody>
-      </p:sp>
-      <p:sp>
-        <p:nvSpPr>
-          <p:cNvPr id="91" name="TextBox 90">
-            <a:extLst>
-              <a:ext uri="{FF2B5EF4-FFF2-40B4-BE49-F238E27FC236}">
-                <a16:creationId xmlns:a16="http://schemas.microsoft.com/office/drawing/2014/main" id="{5737D8B8-34C6-AFDD-876B-3522BC31D684}"/>
-              </a:ext>
-            </a:extLst>
-          </p:cNvPr>
-          <p:cNvSpPr txBox="1"/>
-          <p:nvPr/>
-        </p:nvSpPr>
-        <p:spPr>
-          <a:xfrm>
-            <a:off x="10254061" y="14443433"/>
-            <a:ext cx="1717685" cy="261610"/>
-          </a:xfrm>
-          <a:prstGeom prst="rect">
-            <a:avLst/>
-          </a:prstGeom>
-          <a:noFill/>
-        </p:spPr>
-        <p:txBody>
-          <a:bodyPr wrap="square" rtlCol="0">
-            <a:spAutoFit/>
-          </a:bodyPr>
-          <a:lstStyle/>
-          <a:p>
-            <a:pPr algn="r"/>
-            <a:r>
-              <a:rPr lang="en-US" sz="1100" dirty="0"/>
-              <a:t>SINE age x prop.</a:t>
-            </a:r>
-          </a:p>
-        </p:txBody>
-      </p:sp>
-      <p:sp>
-        <p:nvSpPr>
-          <p:cNvPr id="92" name="TextBox 91">
-            <a:extLst>
-              <a:ext uri="{FF2B5EF4-FFF2-40B4-BE49-F238E27FC236}">
-                <a16:creationId xmlns:a16="http://schemas.microsoft.com/office/drawing/2014/main" id="{C4E579DB-323D-8E02-A92E-2457CE852EF8}"/>
-              </a:ext>
-            </a:extLst>
-          </p:cNvPr>
-          <p:cNvSpPr txBox="1"/>
-          <p:nvPr/>
-        </p:nvSpPr>
-        <p:spPr>
-          <a:xfrm>
-            <a:off x="10254061" y="14230108"/>
-            <a:ext cx="1717685" cy="261610"/>
-          </a:xfrm>
-          <a:prstGeom prst="rect">
-            <a:avLst/>
-          </a:prstGeom>
-          <a:noFill/>
-        </p:spPr>
-        <p:txBody>
-          <a:bodyPr wrap="square" rtlCol="0">
-            <a:spAutoFit/>
-          </a:bodyPr>
-          <a:lstStyle/>
-          <a:p>
-            <a:pPr algn="r"/>
-            <a:r>
-              <a:rPr lang="en-US" sz="1100" dirty="0"/>
-              <a:t>SINE age</a:t>
-            </a:r>
-          </a:p>
-        </p:txBody>
-      </p:sp>
-      <p:sp>
-        <p:nvSpPr>
-          <p:cNvPr id="93" name="TextBox 92">
-            <a:extLst>
-              <a:ext uri="{FF2B5EF4-FFF2-40B4-BE49-F238E27FC236}">
-                <a16:creationId xmlns:a16="http://schemas.microsoft.com/office/drawing/2014/main" id="{1391FEB1-C23D-4C85-19C4-AD4E155FE5D1}"/>
-              </a:ext>
-            </a:extLst>
-          </p:cNvPr>
-          <p:cNvSpPr txBox="1"/>
-          <p:nvPr/>
-        </p:nvSpPr>
-        <p:spPr>
-          <a:xfrm>
-            <a:off x="10254060" y="14015796"/>
-            <a:ext cx="1717685" cy="261610"/>
-          </a:xfrm>
-          <a:prstGeom prst="rect">
-            <a:avLst/>
-          </a:prstGeom>
-          <a:noFill/>
-        </p:spPr>
-        <p:txBody>
-          <a:bodyPr wrap="square" rtlCol="0">
-            <a:spAutoFit/>
-          </a:bodyPr>
-          <a:lstStyle/>
-          <a:p>
-            <a:pPr algn="r"/>
-            <a:r>
-              <a:rPr lang="en-US" sz="1100" dirty="0"/>
-              <a:t>LTR age x prop.</a:t>
-            </a:r>
-          </a:p>
-        </p:txBody>
-      </p:sp>
-      <p:sp>
-        <p:nvSpPr>
-          <p:cNvPr id="94" name="TextBox 93">
-            <a:extLst>
-              <a:ext uri="{FF2B5EF4-FFF2-40B4-BE49-F238E27FC236}">
-                <a16:creationId xmlns:a16="http://schemas.microsoft.com/office/drawing/2014/main" id="{2B8895EB-DA35-91DF-7EF2-6A3784F97B56}"/>
-              </a:ext>
-            </a:extLst>
-          </p:cNvPr>
-          <p:cNvSpPr txBox="1"/>
-          <p:nvPr/>
-        </p:nvSpPr>
-        <p:spPr>
-          <a:xfrm>
-            <a:off x="10254060" y="13802031"/>
-            <a:ext cx="1717685" cy="261610"/>
-          </a:xfrm>
-          <a:prstGeom prst="rect">
-            <a:avLst/>
-          </a:prstGeom>
-          <a:noFill/>
-        </p:spPr>
-        <p:txBody>
-          <a:bodyPr wrap="square" rtlCol="0">
-            <a:spAutoFit/>
-          </a:bodyPr>
-          <a:lstStyle/>
-          <a:p>
-            <a:pPr algn="r"/>
-            <a:r>
-              <a:rPr lang="en-US" sz="1100" dirty="0"/>
-              <a:t>LINE age</a:t>
-            </a:r>
-          </a:p>
-        </p:txBody>
-      </p:sp>
-      <p:sp>
-        <p:nvSpPr>
-          <p:cNvPr id="96" name="TextBox 95">
-            <a:extLst>
-              <a:ext uri="{FF2B5EF4-FFF2-40B4-BE49-F238E27FC236}">
-                <a16:creationId xmlns:a16="http://schemas.microsoft.com/office/drawing/2014/main" id="{2A5DC0B7-A43A-ED6F-A95F-554209E19714}"/>
-              </a:ext>
-            </a:extLst>
-          </p:cNvPr>
-          <p:cNvSpPr txBox="1"/>
-          <p:nvPr/>
-        </p:nvSpPr>
-        <p:spPr>
-          <a:xfrm>
-            <a:off x="15624998" y="13911093"/>
-            <a:ext cx="1717685" cy="261610"/>
-          </a:xfrm>
-          <a:prstGeom prst="rect">
-            <a:avLst/>
-          </a:prstGeom>
-          <a:noFill/>
-        </p:spPr>
-        <p:txBody>
-          <a:bodyPr wrap="square" rtlCol="0">
-            <a:spAutoFit/>
-          </a:bodyPr>
-          <a:lstStyle/>
-          <a:p>
-            <a:pPr algn="r"/>
-            <a:r>
-              <a:rPr lang="en-US" sz="1100" dirty="0"/>
-              <a:t>LINE age x prop.</a:t>
-            </a:r>
-          </a:p>
-        </p:txBody>
-      </p:sp>
-      <p:sp>
-        <p:nvSpPr>
-          <p:cNvPr id="97" name="TextBox 96">
-            <a:extLst>
-              <a:ext uri="{FF2B5EF4-FFF2-40B4-BE49-F238E27FC236}">
-                <a16:creationId xmlns:a16="http://schemas.microsoft.com/office/drawing/2014/main" id="{B5470715-D0E5-4C36-319F-460BB8E4F41C}"/>
-              </a:ext>
-            </a:extLst>
-          </p:cNvPr>
-          <p:cNvSpPr txBox="1"/>
-          <p:nvPr/>
-        </p:nvSpPr>
-        <p:spPr>
-          <a:xfrm>
-            <a:off x="15623735" y="14287247"/>
-            <a:ext cx="1717685" cy="261610"/>
-          </a:xfrm>
-          <a:prstGeom prst="rect">
-            <a:avLst/>
-          </a:prstGeom>
-          <a:noFill/>
-        </p:spPr>
-        <p:txBody>
-          <a:bodyPr wrap="square" rtlCol="0">
-            <a:spAutoFit/>
-          </a:bodyPr>
-          <a:lstStyle/>
-          <a:p>
-            <a:pPr algn="r"/>
-            <a:r>
-              <a:rPr lang="en-US" sz="1100" dirty="0"/>
-              <a:t>SINE age</a:t>
-            </a:r>
-          </a:p>
-        </p:txBody>
-      </p:sp>
-      <p:sp>
-        <p:nvSpPr>
-          <p:cNvPr id="98" name="TextBox 97">
-            <a:extLst>
-              <a:ext uri="{FF2B5EF4-FFF2-40B4-BE49-F238E27FC236}">
-                <a16:creationId xmlns:a16="http://schemas.microsoft.com/office/drawing/2014/main" id="{8453CD2C-03E0-93E6-0B16-C92F18D33472}"/>
-              </a:ext>
-            </a:extLst>
-          </p:cNvPr>
-          <p:cNvSpPr txBox="1"/>
-          <p:nvPr/>
-        </p:nvSpPr>
-        <p:spPr>
-          <a:xfrm>
-            <a:off x="15622617" y="14659451"/>
-            <a:ext cx="1717685" cy="261610"/>
-          </a:xfrm>
-          <a:prstGeom prst="rect">
-            <a:avLst/>
-          </a:prstGeom>
-          <a:noFill/>
-        </p:spPr>
-        <p:txBody>
-          <a:bodyPr wrap="square" rtlCol="0">
-            <a:spAutoFit/>
-          </a:bodyPr>
-          <a:lstStyle/>
-          <a:p>
-            <a:pPr algn="r"/>
-            <a:r>
-              <a:rPr lang="en-US" sz="1100" dirty="0"/>
-              <a:t>SINE age x prop.</a:t>
-            </a:r>
-          </a:p>
-        </p:txBody>
-      </p:sp>
-      <p:sp>
-        <p:nvSpPr>
-          <p:cNvPr id="99" name="TextBox 98">
-            <a:extLst>
-              <a:ext uri="{FF2B5EF4-FFF2-40B4-BE49-F238E27FC236}">
-                <a16:creationId xmlns:a16="http://schemas.microsoft.com/office/drawing/2014/main" id="{481C070B-D2B5-3351-CF79-04FEF927CAF7}"/>
-              </a:ext>
-            </a:extLst>
-          </p:cNvPr>
-          <p:cNvSpPr txBox="1"/>
-          <p:nvPr/>
-        </p:nvSpPr>
-        <p:spPr>
-          <a:xfrm>
-            <a:off x="15622016" y="15032077"/>
-            <a:ext cx="1717685" cy="261610"/>
-          </a:xfrm>
-          <a:prstGeom prst="rect">
-            <a:avLst/>
-          </a:prstGeom>
-          <a:noFill/>
-        </p:spPr>
-        <p:txBody>
-          <a:bodyPr wrap="square" rtlCol="0">
-            <a:spAutoFit/>
-          </a:bodyPr>
-          <a:lstStyle/>
-          <a:p>
-            <a:pPr algn="r"/>
-            <a:r>
-              <a:rPr lang="en-US" sz="1100" dirty="0"/>
-              <a:t>DNA proportion</a:t>
-            </a:r>
-          </a:p>
-        </p:txBody>
-      </p:sp>
-      <p:sp>
-        <p:nvSpPr>
-          <p:cNvPr id="100" name="TextBox 99">
-            <a:extLst>
-              <a:ext uri="{FF2B5EF4-FFF2-40B4-BE49-F238E27FC236}">
-                <a16:creationId xmlns:a16="http://schemas.microsoft.com/office/drawing/2014/main" id="{78B2C7D9-7595-89D8-B484-B437AB593CAA}"/>
-              </a:ext>
-            </a:extLst>
-          </p:cNvPr>
-          <p:cNvSpPr txBox="1"/>
-          <p:nvPr/>
-        </p:nvSpPr>
-        <p:spPr>
-          <a:xfrm>
-            <a:off x="15623735" y="15407629"/>
-            <a:ext cx="1717685" cy="261610"/>
-          </a:xfrm>
-          <a:prstGeom prst="rect">
-            <a:avLst/>
-          </a:prstGeom>
-          <a:noFill/>
-        </p:spPr>
-        <p:txBody>
-          <a:bodyPr wrap="square" rtlCol="0">
-            <a:spAutoFit/>
-          </a:bodyPr>
-          <a:lstStyle/>
-          <a:p>
-            <a:pPr algn="r"/>
-            <a:r>
-              <a:rPr lang="en-US" sz="1100" dirty="0"/>
-              <a:t>LINE proportion</a:t>
-            </a:r>
-          </a:p>
-        </p:txBody>
-      </p:sp>
-      <p:sp>
-        <p:nvSpPr>
-          <p:cNvPr id="101" name="TextBox 100">
-            <a:extLst>
-              <a:ext uri="{FF2B5EF4-FFF2-40B4-BE49-F238E27FC236}">
-                <a16:creationId xmlns:a16="http://schemas.microsoft.com/office/drawing/2014/main" id="{87857918-917B-BA48-0250-D81886DBE8BF}"/>
-              </a:ext>
-            </a:extLst>
-          </p:cNvPr>
-          <p:cNvSpPr txBox="1"/>
-          <p:nvPr/>
-        </p:nvSpPr>
-        <p:spPr>
-          <a:xfrm>
-            <a:off x="10254061" y="17092495"/>
-            <a:ext cx="1717685" cy="261610"/>
-          </a:xfrm>
-          <a:prstGeom prst="rect">
-            <a:avLst/>
-          </a:prstGeom>
-          <a:noFill/>
-        </p:spPr>
-        <p:txBody>
-          <a:bodyPr wrap="square" rtlCol="0">
-            <a:spAutoFit/>
-          </a:bodyPr>
-          <a:lstStyle/>
-          <a:p>
-            <a:pPr algn="r"/>
-            <a:r>
-              <a:rPr lang="en-US" sz="1100" dirty="0"/>
-              <a:t>Others age x prop.</a:t>
-            </a:r>
-          </a:p>
-        </p:txBody>
-      </p:sp>
-      <p:sp>
-        <p:nvSpPr>
-          <p:cNvPr id="102" name="TextBox 101">
-            <a:extLst>
-              <a:ext uri="{FF2B5EF4-FFF2-40B4-BE49-F238E27FC236}">
-                <a16:creationId xmlns:a16="http://schemas.microsoft.com/office/drawing/2014/main" id="{FDAB623B-BDFB-A5CD-1BFE-CFB90A1ACB5F}"/>
-              </a:ext>
-            </a:extLst>
-          </p:cNvPr>
-          <p:cNvSpPr txBox="1"/>
-          <p:nvPr/>
-        </p:nvSpPr>
-        <p:spPr>
-          <a:xfrm>
-            <a:off x="10251994" y="17687298"/>
-            <a:ext cx="1717685" cy="261610"/>
-          </a:xfrm>
-          <a:prstGeom prst="rect">
-            <a:avLst/>
-          </a:prstGeom>
-          <a:noFill/>
-        </p:spPr>
-        <p:txBody>
-          <a:bodyPr wrap="square" rtlCol="0">
-            <a:spAutoFit/>
-          </a:bodyPr>
-          <a:lstStyle/>
-          <a:p>
-            <a:pPr algn="r"/>
-            <a:r>
-              <a:rPr lang="en-US" sz="1100" dirty="0"/>
-              <a:t>Others proportion</a:t>
-            </a:r>
-          </a:p>
-        </p:txBody>
-      </p:sp>
-      <p:sp>
-        <p:nvSpPr>
-          <p:cNvPr id="103" name="TextBox 102">
-            <a:extLst>
-              <a:ext uri="{FF2B5EF4-FFF2-40B4-BE49-F238E27FC236}">
-                <a16:creationId xmlns:a16="http://schemas.microsoft.com/office/drawing/2014/main" id="{3334C90F-6C10-8444-7283-C973F18D0E21}"/>
-              </a:ext>
-            </a:extLst>
-          </p:cNvPr>
-          <p:cNvSpPr txBox="1"/>
-          <p:nvPr/>
-        </p:nvSpPr>
-        <p:spPr>
-          <a:xfrm>
-            <a:off x="10251680" y="18280319"/>
-            <a:ext cx="1717685" cy="261610"/>
-          </a:xfrm>
-          <a:prstGeom prst="rect">
-            <a:avLst/>
-          </a:prstGeom>
-          <a:noFill/>
-        </p:spPr>
-        <p:txBody>
-          <a:bodyPr wrap="square" rtlCol="0">
-            <a:spAutoFit/>
-          </a:bodyPr>
-          <a:lstStyle/>
-          <a:p>
-            <a:pPr algn="r"/>
-            <a:r>
-              <a:rPr lang="en-US" sz="1100" dirty="0"/>
-              <a:t>SINE proportion</a:t>
-            </a:r>
-          </a:p>
-        </p:txBody>
-      </p:sp>
-      <p:sp>
-        <p:nvSpPr>
-          <p:cNvPr id="104" name="TextBox 103">
-            <a:extLst>
-              <a:ext uri="{FF2B5EF4-FFF2-40B4-BE49-F238E27FC236}">
-                <a16:creationId xmlns:a16="http://schemas.microsoft.com/office/drawing/2014/main" id="{6513559C-516D-2A0B-3574-C593CF5CCC86}"/>
-              </a:ext>
-            </a:extLst>
-          </p:cNvPr>
-          <p:cNvSpPr txBox="1"/>
-          <p:nvPr/>
-        </p:nvSpPr>
-        <p:spPr>
-          <a:xfrm>
-            <a:off x="10572463" y="13350197"/>
-            <a:ext cx="3400931" cy="307777"/>
-          </a:xfrm>
-          <a:prstGeom prst="rect">
-            <a:avLst/>
-          </a:prstGeom>
-          <a:noFill/>
-        </p:spPr>
-        <p:txBody>
-          <a:bodyPr wrap="square" rtlCol="0">
-            <a:spAutoFit/>
-          </a:bodyPr>
-          <a:lstStyle/>
-          <a:p>
-            <a:pPr algn="r"/>
-            <a:r>
-              <a:rPr lang="en-US" dirty="0"/>
-              <a:t>Full data: all species (3783 models)</a:t>
-            </a:r>
-          </a:p>
-        </p:txBody>
-      </p:sp>
-      <p:sp>
-        <p:nvSpPr>
-          <p:cNvPr id="105" name="TextBox 104">
-            <a:extLst>
-              <a:ext uri="{FF2B5EF4-FFF2-40B4-BE49-F238E27FC236}">
-                <a16:creationId xmlns:a16="http://schemas.microsoft.com/office/drawing/2014/main" id="{77518695-F5C2-B06E-F813-C03ECD051776}"/>
-              </a:ext>
-            </a:extLst>
-          </p:cNvPr>
-          <p:cNvSpPr txBox="1"/>
-          <p:nvPr/>
-        </p:nvSpPr>
-        <p:spPr>
-          <a:xfrm>
-            <a:off x="14076558" y="13348661"/>
-            <a:ext cx="1849054" cy="307777"/>
-          </a:xfrm>
-          <a:prstGeom prst="rect">
-            <a:avLst/>
-          </a:prstGeom>
-          <a:noFill/>
-        </p:spPr>
-        <p:txBody>
-          <a:bodyPr wrap="square" rtlCol="0">
-            <a:spAutoFit/>
-          </a:bodyPr>
-          <a:lstStyle/>
-          <a:p>
-            <a:pPr algn="ctr"/>
-            <a:r>
-              <a:rPr lang="en-US" dirty="0"/>
-              <a:t>11 species dropped</a:t>
-            </a:r>
-          </a:p>
-        </p:txBody>
-      </p:sp>
-      <p:sp>
-        <p:nvSpPr>
-          <p:cNvPr id="106" name="TextBox 105">
-            <a:extLst>
-              <a:ext uri="{FF2B5EF4-FFF2-40B4-BE49-F238E27FC236}">
-                <a16:creationId xmlns:a16="http://schemas.microsoft.com/office/drawing/2014/main" id="{BECF9B75-341F-683A-9DF2-BA4F3F993C56}"/>
-              </a:ext>
-            </a:extLst>
-          </p:cNvPr>
-          <p:cNvSpPr txBox="1"/>
-          <p:nvPr/>
-        </p:nvSpPr>
-        <p:spPr>
-          <a:xfrm>
-            <a:off x="15945263" y="13349486"/>
-            <a:ext cx="3400931" cy="307777"/>
-          </a:xfrm>
-          <a:prstGeom prst="rect">
-            <a:avLst/>
-          </a:prstGeom>
-          <a:noFill/>
-        </p:spPr>
-        <p:txBody>
-          <a:bodyPr wrap="square" rtlCol="0">
-            <a:spAutoFit/>
-          </a:bodyPr>
-          <a:lstStyle/>
-          <a:p>
-            <a:pPr algn="r"/>
-            <a:r>
-              <a:rPr lang="en-US" dirty="0"/>
-              <a:t>Full data: Mammalia (2428 models)</a:t>
-            </a:r>
-          </a:p>
-        </p:txBody>
-      </p:sp>
-      <p:sp>
-        <p:nvSpPr>
-          <p:cNvPr id="107" name="TextBox 106">
-            <a:extLst>
-              <a:ext uri="{FF2B5EF4-FFF2-40B4-BE49-F238E27FC236}">
-                <a16:creationId xmlns:a16="http://schemas.microsoft.com/office/drawing/2014/main" id="{6D87292E-543D-0BC6-9CA1-859301F6161A}"/>
-              </a:ext>
-            </a:extLst>
-          </p:cNvPr>
-          <p:cNvSpPr txBox="1"/>
-          <p:nvPr/>
-        </p:nvSpPr>
-        <p:spPr>
-          <a:xfrm>
-            <a:off x="19441617" y="13349095"/>
-            <a:ext cx="1849054" cy="307777"/>
-          </a:xfrm>
-          <a:prstGeom prst="rect">
-            <a:avLst/>
-          </a:prstGeom>
-          <a:noFill/>
-        </p:spPr>
-        <p:txBody>
-          <a:bodyPr wrap="square" rtlCol="0">
-            <a:spAutoFit/>
-          </a:bodyPr>
-          <a:lstStyle/>
-          <a:p>
-            <a:pPr algn="ctr"/>
-            <a:r>
-              <a:rPr lang="en-US" dirty="0"/>
-              <a:t>5 species dropped</a:t>
-            </a:r>
-          </a:p>
-        </p:txBody>
-      </p:sp>
-      <p:sp>
-        <p:nvSpPr>
-          <p:cNvPr id="108" name="TextBox 107">
-            <a:extLst>
-              <a:ext uri="{FF2B5EF4-FFF2-40B4-BE49-F238E27FC236}">
-                <a16:creationId xmlns:a16="http://schemas.microsoft.com/office/drawing/2014/main" id="{D6B21C64-CD62-2598-32F8-0829BFE8FA04}"/>
-              </a:ext>
-            </a:extLst>
-          </p:cNvPr>
-          <p:cNvSpPr txBox="1"/>
-          <p:nvPr/>
-        </p:nvSpPr>
-        <p:spPr>
-          <a:xfrm>
-            <a:off x="10572463" y="16379046"/>
-            <a:ext cx="3400931" cy="307777"/>
-          </a:xfrm>
-          <a:prstGeom prst="rect">
-            <a:avLst/>
-          </a:prstGeom>
-          <a:noFill/>
-        </p:spPr>
-        <p:txBody>
-          <a:bodyPr wrap="square" rtlCol="0">
-            <a:spAutoFit/>
-          </a:bodyPr>
-          <a:lstStyle/>
-          <a:p>
-            <a:pPr algn="r"/>
-            <a:r>
-              <a:rPr lang="en-US" dirty="0"/>
-              <a:t>Full data: Actinopterygii (1866 models)</a:t>
-            </a:r>
-          </a:p>
-        </p:txBody>
-      </p:sp>
-      <p:sp>
-        <p:nvSpPr>
-          <p:cNvPr id="109" name="TextBox 108">
-            <a:extLst>
-              <a:ext uri="{FF2B5EF4-FFF2-40B4-BE49-F238E27FC236}">
-                <a16:creationId xmlns:a16="http://schemas.microsoft.com/office/drawing/2014/main" id="{2283E6C1-1DE0-A7AC-3C4F-361B859638C9}"/>
-              </a:ext>
-            </a:extLst>
-          </p:cNvPr>
-          <p:cNvSpPr txBox="1"/>
-          <p:nvPr/>
-        </p:nvSpPr>
-        <p:spPr>
-          <a:xfrm>
-            <a:off x="14076558" y="16377510"/>
-            <a:ext cx="1849054" cy="307777"/>
-          </a:xfrm>
-          <a:prstGeom prst="rect">
-            <a:avLst/>
-          </a:prstGeom>
-          <a:noFill/>
-        </p:spPr>
-        <p:txBody>
-          <a:bodyPr wrap="square" rtlCol="0">
-            <a:spAutoFit/>
-          </a:bodyPr>
-          <a:lstStyle/>
-          <a:p>
-            <a:pPr algn="ctr"/>
-            <a:r>
-              <a:rPr lang="en-US" dirty="0"/>
-              <a:t>4 species dropped</a:t>
-            </a:r>
-          </a:p>
-        </p:txBody>
-      </p:sp>
-      <p:sp>
-        <p:nvSpPr>
-          <p:cNvPr id="110" name="TextBox 109">
-            <a:extLst>
-              <a:ext uri="{FF2B5EF4-FFF2-40B4-BE49-F238E27FC236}">
-                <a16:creationId xmlns:a16="http://schemas.microsoft.com/office/drawing/2014/main" id="{8F33C608-ABF1-551B-A60C-6EBEF00FD9B0}"/>
-              </a:ext>
-            </a:extLst>
-          </p:cNvPr>
-          <p:cNvSpPr txBox="1"/>
-          <p:nvPr/>
-        </p:nvSpPr>
-        <p:spPr>
-          <a:xfrm>
-            <a:off x="15945263" y="16377040"/>
-            <a:ext cx="3400931" cy="307777"/>
-          </a:xfrm>
-          <a:prstGeom prst="rect">
-            <a:avLst/>
-          </a:prstGeom>
-          <a:noFill/>
-        </p:spPr>
-        <p:txBody>
-          <a:bodyPr wrap="square" rtlCol="0">
-            <a:spAutoFit/>
-          </a:bodyPr>
-          <a:lstStyle/>
-          <a:p>
-            <a:pPr algn="r"/>
-            <a:r>
-              <a:rPr lang="en-US" dirty="0"/>
-              <a:t>Full data: </a:t>
-            </a:r>
-            <a:r>
-              <a:rPr lang="en-US" dirty="0" err="1"/>
-              <a:t>Sauropsida</a:t>
-            </a:r>
-            <a:r>
-              <a:rPr lang="en-US" dirty="0"/>
-              <a:t> (2 models)</a:t>
-            </a:r>
-          </a:p>
-        </p:txBody>
-      </p:sp>
-      <p:sp>
-        <p:nvSpPr>
-          <p:cNvPr id="111" name="TextBox 110">
-            <a:extLst>
-              <a:ext uri="{FF2B5EF4-FFF2-40B4-BE49-F238E27FC236}">
-                <a16:creationId xmlns:a16="http://schemas.microsoft.com/office/drawing/2014/main" id="{7C759011-4FC7-F15A-2F7D-818D48C9C67D}"/>
-              </a:ext>
-            </a:extLst>
-          </p:cNvPr>
-          <p:cNvSpPr txBox="1"/>
-          <p:nvPr/>
-        </p:nvSpPr>
-        <p:spPr>
-          <a:xfrm>
-            <a:off x="19441617" y="16376649"/>
-            <a:ext cx="1849054" cy="307777"/>
-          </a:xfrm>
-          <a:prstGeom prst="rect">
-            <a:avLst/>
-          </a:prstGeom>
-          <a:noFill/>
-        </p:spPr>
-        <p:txBody>
-          <a:bodyPr wrap="square" rtlCol="0">
-            <a:spAutoFit/>
-          </a:bodyPr>
-          <a:lstStyle/>
-          <a:p>
-            <a:pPr algn="ctr"/>
-            <a:r>
-              <a:rPr lang="en-US" dirty="0"/>
-              <a:t>2 species dropped</a:t>
-            </a:r>
-          </a:p>
-        </p:txBody>
-      </p:sp>
-      <p:sp>
-        <p:nvSpPr>
-          <p:cNvPr id="112" name="TextBox 111">
-            <a:extLst>
-              <a:ext uri="{FF2B5EF4-FFF2-40B4-BE49-F238E27FC236}">
-                <a16:creationId xmlns:a16="http://schemas.microsoft.com/office/drawing/2014/main" id="{21831138-8A15-C786-7EED-4878851405D7}"/>
-              </a:ext>
-            </a:extLst>
-          </p:cNvPr>
-          <p:cNvSpPr txBox="1"/>
-          <p:nvPr/>
-        </p:nvSpPr>
-        <p:spPr>
-          <a:xfrm>
-            <a:off x="17803014" y="19293583"/>
-            <a:ext cx="3127374" cy="307777"/>
-          </a:xfrm>
-          <a:prstGeom prst="rect">
-            <a:avLst/>
-          </a:prstGeom>
-          <a:noFill/>
-        </p:spPr>
-        <p:txBody>
-          <a:bodyPr wrap="square" rtlCol="0">
-            <a:spAutoFit/>
-          </a:bodyPr>
-          <a:lstStyle/>
-          <a:p>
-            <a:pPr algn="ctr"/>
-            <a:r>
-              <a:rPr lang="en-US" dirty="0"/>
-              <a:t>Sign-aligned </a:t>
-            </a:r>
-            <a:r>
-              <a:rPr lang="el-GR" dirty="0"/>
-              <a:t>β</a:t>
-            </a:r>
-            <a:endParaRPr lang="en-US" dirty="0"/>
-          </a:p>
-        </p:txBody>
-      </p:sp>
-      <p:sp>
-        <p:nvSpPr>
-          <p:cNvPr id="113" name="TextBox 112">
-            <a:extLst>
-              <a:ext uri="{FF2B5EF4-FFF2-40B4-BE49-F238E27FC236}">
-                <a16:creationId xmlns:a16="http://schemas.microsoft.com/office/drawing/2014/main" id="{7820E75C-25D3-1FAF-D190-43855E99FD4E}"/>
-              </a:ext>
-            </a:extLst>
-          </p:cNvPr>
-          <p:cNvSpPr txBox="1"/>
-          <p:nvPr/>
-        </p:nvSpPr>
-        <p:spPr>
-          <a:xfrm>
-            <a:off x="12369146" y="19310066"/>
-            <a:ext cx="3127374" cy="307777"/>
-          </a:xfrm>
-          <a:prstGeom prst="rect">
-            <a:avLst/>
-          </a:prstGeom>
-          <a:noFill/>
-        </p:spPr>
-        <p:txBody>
-          <a:bodyPr wrap="square" rtlCol="0">
-            <a:spAutoFit/>
-          </a:bodyPr>
-          <a:lstStyle/>
-          <a:p>
-            <a:pPr algn="ctr"/>
-            <a:r>
-              <a:rPr lang="en-US" dirty="0"/>
-              <a:t>Sign-aligned </a:t>
-            </a:r>
-            <a:r>
-              <a:rPr lang="el-GR" dirty="0"/>
-              <a:t>β</a:t>
-            </a:r>
-            <a:endParaRPr lang="en-US" dirty="0"/>
-          </a:p>
-        </p:txBody>
-      </p:sp>
-      <p:pic>
-        <p:nvPicPr>
-          <p:cNvPr id="115" name="Picture 114">
-            <a:extLst>
-              <a:ext uri="{FF2B5EF4-FFF2-40B4-BE49-F238E27FC236}">
-                <a16:creationId xmlns:a16="http://schemas.microsoft.com/office/drawing/2014/main" id="{70526C40-A766-5508-F8B7-190940D4710B}"/>
-              </a:ext>
-            </a:extLst>
-          </p:cNvPr>
-          <p:cNvPicPr>
-            <a:picLocks noChangeAspect="1"/>
-          </p:cNvPicPr>
-          <p:nvPr/>
-        </p:nvPicPr>
-        <p:blipFill>
-          <a:blip r:embed="rId7"/>
-          <a:srcRect l="72582" t="21697" r="10049" b="63999"/>
-          <a:stretch>
-            <a:fillRect/>
-          </a:stretch>
-        </p:blipFill>
-        <p:spPr>
-          <a:xfrm>
-            <a:off x="21133571" y="14477760"/>
-            <a:ext cx="1811622" cy="850123"/>
-          </a:xfrm>
-          <a:prstGeom prst="rect">
-            <a:avLst/>
-          </a:prstGeom>
-        </p:spPr>
-      </p:pic>
-      <p:grpSp>
-        <p:nvGrpSpPr>
-          <p:cNvPr id="116" name="Group 115">
-            <a:extLst>
-              <a:ext uri="{FF2B5EF4-FFF2-40B4-BE49-F238E27FC236}">
-                <a16:creationId xmlns:a16="http://schemas.microsoft.com/office/drawing/2014/main" id="{843378AC-F4D7-C74C-00B0-DAF3BCBC51C8}"/>
-              </a:ext>
-            </a:extLst>
-          </p:cNvPr>
-          <p:cNvGrpSpPr/>
-          <p:nvPr/>
-        </p:nvGrpSpPr>
-        <p:grpSpPr>
-          <a:xfrm>
-            <a:off x="21456564" y="15554947"/>
-            <a:ext cx="3436207" cy="3316189"/>
-            <a:chOff x="22197688" y="19295876"/>
-            <a:chExt cx="3436207" cy="3316189"/>
-          </a:xfrm>
-        </p:grpSpPr>
-        <p:sp>
-          <p:nvSpPr>
-            <p:cNvPr id="117" name="TextBox 116">
-              <a:extLst>
-                <a:ext uri="{FF2B5EF4-FFF2-40B4-BE49-F238E27FC236}">
-                  <a16:creationId xmlns:a16="http://schemas.microsoft.com/office/drawing/2014/main" id="{D406FC7C-4BCF-9422-7E77-57ECA3A0A8DF}"/>
-                </a:ext>
-              </a:extLst>
-            </p:cNvPr>
-            <p:cNvSpPr txBox="1"/>
-            <p:nvPr/>
-          </p:nvSpPr>
-          <p:spPr>
-            <a:xfrm>
-              <a:off x="23075506" y="22304288"/>
-              <a:ext cx="2558389" cy="307777"/>
-            </a:xfrm>
-            <a:prstGeom prst="rect">
-              <a:avLst/>
-            </a:prstGeom>
-            <a:noFill/>
-          </p:spPr>
-          <p:txBody>
-            <a:bodyPr wrap="square" rtlCol="0">
-              <a:spAutoFit/>
-            </a:bodyPr>
-            <a:lstStyle/>
-            <a:p>
-              <a:r>
-                <a:rPr lang="en-US" dirty="0"/>
-                <a:t>0.5</a:t>
-              </a:r>
-            </a:p>
-          </p:txBody>
-        </p:sp>
-        <p:sp>
-          <p:nvSpPr>
-            <p:cNvPr id="118" name="TextBox 117">
-              <a:extLst>
-                <a:ext uri="{FF2B5EF4-FFF2-40B4-BE49-F238E27FC236}">
-                  <a16:creationId xmlns:a16="http://schemas.microsoft.com/office/drawing/2014/main" id="{F4486D64-59D3-CE30-ECB8-0E764C3C00C3}"/>
-                </a:ext>
-              </a:extLst>
-            </p:cNvPr>
-            <p:cNvSpPr txBox="1"/>
-            <p:nvPr/>
-          </p:nvSpPr>
-          <p:spPr>
-            <a:xfrm>
-              <a:off x="23075506" y="19295876"/>
-              <a:ext cx="2558389" cy="307777"/>
-            </a:xfrm>
-            <a:prstGeom prst="rect">
-              <a:avLst/>
-            </a:prstGeom>
-            <a:noFill/>
-          </p:spPr>
-          <p:txBody>
-            <a:bodyPr wrap="square" rtlCol="0">
-              <a:spAutoFit/>
-            </a:bodyPr>
-            <a:lstStyle/>
-            <a:p>
-              <a:r>
-                <a:rPr lang="en-US" dirty="0"/>
-                <a:t>1</a:t>
-              </a:r>
-            </a:p>
-          </p:txBody>
-        </p:sp>
-        <p:sp>
-          <p:nvSpPr>
-            <p:cNvPr id="119" name="TextBox 118">
-              <a:extLst>
-                <a:ext uri="{FF2B5EF4-FFF2-40B4-BE49-F238E27FC236}">
-                  <a16:creationId xmlns:a16="http://schemas.microsoft.com/office/drawing/2014/main" id="{AC29F38E-2D4C-C66C-3F76-DBBEF6E8F3DD}"/>
-                </a:ext>
-              </a:extLst>
-            </p:cNvPr>
-            <p:cNvSpPr txBox="1"/>
-            <p:nvPr/>
-          </p:nvSpPr>
-          <p:spPr>
-            <a:xfrm>
-              <a:off x="23075506" y="20799937"/>
-              <a:ext cx="2558389" cy="307777"/>
-            </a:xfrm>
-            <a:prstGeom prst="rect">
-              <a:avLst/>
-            </a:prstGeom>
-            <a:noFill/>
-          </p:spPr>
-          <p:txBody>
-            <a:bodyPr wrap="square" rtlCol="0">
-              <a:spAutoFit/>
-            </a:bodyPr>
-            <a:lstStyle/>
-            <a:p>
-              <a:r>
-                <a:rPr lang="en-US" dirty="0"/>
-                <a:t>0.75</a:t>
-              </a:r>
-            </a:p>
-          </p:txBody>
-        </p:sp>
-        <p:grpSp>
-          <p:nvGrpSpPr>
-            <p:cNvPr id="120" name="Group 119">
-              <a:extLst>
-                <a:ext uri="{FF2B5EF4-FFF2-40B4-BE49-F238E27FC236}">
-                  <a16:creationId xmlns:a16="http://schemas.microsoft.com/office/drawing/2014/main" id="{B370C637-52AF-C0F4-1DD3-C01F361E89FF}"/>
-                </a:ext>
-              </a:extLst>
-            </p:cNvPr>
-            <p:cNvGrpSpPr/>
-            <p:nvPr/>
-          </p:nvGrpSpPr>
-          <p:grpSpPr>
-            <a:xfrm>
-              <a:off x="22197688" y="19439268"/>
-              <a:ext cx="862338" cy="3033525"/>
-              <a:chOff x="22197688" y="19439268"/>
-              <a:chExt cx="862338" cy="3033525"/>
-            </a:xfrm>
-          </p:grpSpPr>
-          <p:pic>
-            <p:nvPicPr>
-              <p:cNvPr id="121" name="Picture 120">
-                <a:extLst>
-                  <a:ext uri="{FF2B5EF4-FFF2-40B4-BE49-F238E27FC236}">
-                    <a16:creationId xmlns:a16="http://schemas.microsoft.com/office/drawing/2014/main" id="{C7F36B1D-DDFC-3D88-47A2-D093EBDC4185}"/>
-                  </a:ext>
-                </a:extLst>
-              </p:cNvPr>
-              <p:cNvPicPr>
-                <a:picLocks noChangeAspect="1"/>
-              </p:cNvPicPr>
-              <p:nvPr/>
-            </p:nvPicPr>
-            <p:blipFill>
-              <a:blip r:embed="rId7"/>
-              <a:srcRect l="77335" t="70454" r="2272" b="27368"/>
-              <a:stretch>
-                <a:fillRect/>
-              </a:stretch>
-            </p:blipFill>
-            <p:spPr>
-              <a:xfrm rot="16200000">
-                <a:off x="21236269" y="20777491"/>
-                <a:ext cx="3033524" cy="357080"/>
-              </a:xfrm>
-              <a:prstGeom prst="rect">
-                <a:avLst/>
-              </a:prstGeom>
-            </p:spPr>
-          </p:pic>
-          <p:sp>
-            <p:nvSpPr>
-              <p:cNvPr id="122" name="TextBox 121">
-                <a:extLst>
-                  <a:ext uri="{FF2B5EF4-FFF2-40B4-BE49-F238E27FC236}">
-                    <a16:creationId xmlns:a16="http://schemas.microsoft.com/office/drawing/2014/main" id="{DC264A71-BF68-5923-C7D5-A982A2CB70E2}"/>
-                  </a:ext>
-                </a:extLst>
-              </p:cNvPr>
-              <p:cNvSpPr txBox="1"/>
-              <p:nvPr/>
-            </p:nvSpPr>
-            <p:spPr>
-              <a:xfrm rot="16200000">
-                <a:off x="21087770" y="20786752"/>
-                <a:ext cx="2558389" cy="338554"/>
-              </a:xfrm>
-              <a:prstGeom prst="rect">
-                <a:avLst/>
-              </a:prstGeom>
-              <a:noFill/>
-            </p:spPr>
-            <p:txBody>
-              <a:bodyPr wrap="square" rtlCol="0">
-                <a:spAutoFit/>
-              </a:bodyPr>
-              <a:lstStyle/>
-              <a:p>
-                <a:pPr algn="ctr"/>
-                <a:r>
-                  <a:rPr lang="en-US" sz="1600" dirty="0"/>
-                  <a:t>Variable importance</a:t>
-                </a:r>
-              </a:p>
-            </p:txBody>
-          </p:sp>
-          <p:cxnSp>
-            <p:nvCxnSpPr>
-              <p:cNvPr id="123" name="Straight Connector 122">
-                <a:extLst>
-                  <a:ext uri="{FF2B5EF4-FFF2-40B4-BE49-F238E27FC236}">
-                    <a16:creationId xmlns:a16="http://schemas.microsoft.com/office/drawing/2014/main" id="{32AB9730-4A43-F1E3-E438-17158F62503B}"/>
-                  </a:ext>
-                </a:extLst>
-              </p:cNvPr>
-              <p:cNvCxnSpPr>
-                <a:cxnSpLocks/>
-              </p:cNvCxnSpPr>
-              <p:nvPr/>
-            </p:nvCxnSpPr>
-            <p:spPr>
-              <a:xfrm>
-                <a:off x="22970490" y="19439268"/>
-                <a:ext cx="0" cy="3033525"/>
-              </a:xfrm>
-              <a:prstGeom prst="line">
-                <a:avLst/>
-              </a:prstGeom>
-              <a:ln w="28575">
-                <a:solidFill>
-                  <a:schemeClr val="tx1"/>
-                </a:solidFill>
-              </a:ln>
-            </p:spPr>
-            <p:style>
-              <a:lnRef idx="1">
-                <a:schemeClr val="accent1"/>
-              </a:lnRef>
-              <a:fillRef idx="0">
-                <a:schemeClr val="accent1"/>
-              </a:fillRef>
-              <a:effectRef idx="0">
-                <a:schemeClr val="accent1"/>
-              </a:effectRef>
-              <a:fontRef idx="minor">
-                <a:schemeClr val="tx1"/>
-              </a:fontRef>
-            </p:style>
-          </p:cxnSp>
-          <p:cxnSp>
-            <p:nvCxnSpPr>
-              <p:cNvPr id="124" name="Straight Connector 123">
-                <a:extLst>
-                  <a:ext uri="{FF2B5EF4-FFF2-40B4-BE49-F238E27FC236}">
-                    <a16:creationId xmlns:a16="http://schemas.microsoft.com/office/drawing/2014/main" id="{74C115B7-3309-DB18-0E44-533F1C27E9B2}"/>
-                  </a:ext>
-                </a:extLst>
-              </p:cNvPr>
-              <p:cNvCxnSpPr>
-                <a:cxnSpLocks/>
-              </p:cNvCxnSpPr>
-              <p:nvPr/>
-            </p:nvCxnSpPr>
-            <p:spPr>
-              <a:xfrm flipH="1">
-                <a:off x="22958585" y="22460380"/>
-                <a:ext cx="101441" cy="0"/>
-              </a:xfrm>
-              <a:prstGeom prst="line">
-                <a:avLst/>
-              </a:prstGeom>
-              <a:ln w="28575">
-                <a:solidFill>
-                  <a:schemeClr val="tx1"/>
-                </a:solidFill>
-              </a:ln>
-            </p:spPr>
-            <p:style>
-              <a:lnRef idx="1">
-                <a:schemeClr val="accent1"/>
-              </a:lnRef>
-              <a:fillRef idx="0">
-                <a:schemeClr val="accent1"/>
-              </a:fillRef>
-              <a:effectRef idx="0">
-                <a:schemeClr val="accent1"/>
-              </a:effectRef>
-              <a:fontRef idx="minor">
-                <a:schemeClr val="tx1"/>
-              </a:fontRef>
-            </p:style>
-          </p:cxnSp>
-          <p:cxnSp>
-            <p:nvCxnSpPr>
-              <p:cNvPr id="125" name="Straight Connector 124">
-                <a:extLst>
-                  <a:ext uri="{FF2B5EF4-FFF2-40B4-BE49-F238E27FC236}">
-                    <a16:creationId xmlns:a16="http://schemas.microsoft.com/office/drawing/2014/main" id="{919B9B79-070D-7C17-4435-5A06FADD5626}"/>
-                  </a:ext>
-                </a:extLst>
-              </p:cNvPr>
-              <p:cNvCxnSpPr>
-                <a:cxnSpLocks/>
-              </p:cNvCxnSpPr>
-              <p:nvPr/>
-            </p:nvCxnSpPr>
-            <p:spPr>
-              <a:xfrm flipH="1">
-                <a:off x="22958584" y="19451587"/>
-                <a:ext cx="101441" cy="0"/>
-              </a:xfrm>
-              <a:prstGeom prst="line">
-                <a:avLst/>
-              </a:prstGeom>
-              <a:ln w="28575">
-                <a:solidFill>
-                  <a:schemeClr val="tx1"/>
-                </a:solidFill>
-              </a:ln>
-            </p:spPr>
-            <p:style>
-              <a:lnRef idx="1">
-                <a:schemeClr val="accent1"/>
-              </a:lnRef>
-              <a:fillRef idx="0">
-                <a:schemeClr val="accent1"/>
-              </a:fillRef>
-              <a:effectRef idx="0">
-                <a:schemeClr val="accent1"/>
-              </a:effectRef>
-              <a:fontRef idx="minor">
-                <a:schemeClr val="tx1"/>
-              </a:fontRef>
-            </p:style>
-          </p:cxnSp>
-          <p:cxnSp>
-            <p:nvCxnSpPr>
-              <p:cNvPr id="126" name="Straight Connector 125">
-                <a:extLst>
-                  <a:ext uri="{FF2B5EF4-FFF2-40B4-BE49-F238E27FC236}">
-                    <a16:creationId xmlns:a16="http://schemas.microsoft.com/office/drawing/2014/main" id="{241B54AC-B8C6-5386-1328-781DCBD37EFD}"/>
-                  </a:ext>
-                </a:extLst>
-              </p:cNvPr>
-              <p:cNvCxnSpPr>
-                <a:cxnSpLocks/>
-              </p:cNvCxnSpPr>
-              <p:nvPr/>
-            </p:nvCxnSpPr>
-            <p:spPr>
-              <a:xfrm flipH="1">
-                <a:off x="22958583" y="20956029"/>
-                <a:ext cx="101441" cy="0"/>
-              </a:xfrm>
-              <a:prstGeom prst="line">
-                <a:avLst/>
-              </a:prstGeom>
-              <a:ln w="28575">
-                <a:solidFill>
-                  <a:schemeClr val="tx1"/>
-                </a:solidFill>
-              </a:ln>
-            </p:spPr>
-            <p:style>
-              <a:lnRef idx="1">
-                <a:schemeClr val="accent1"/>
-              </a:lnRef>
-              <a:fillRef idx="0">
-                <a:schemeClr val="accent1"/>
-              </a:fillRef>
-              <a:effectRef idx="0">
-                <a:schemeClr val="accent1"/>
-              </a:effectRef>
-              <a:fontRef idx="minor">
-                <a:schemeClr val="tx1"/>
-              </a:fontRef>
-            </p:style>
-          </p:cxnSp>
-        </p:grpSp>
-      </p:grpSp>
-      <p:sp>
-        <p:nvSpPr>
-          <p:cNvPr id="127" name="TextBox 126">
-            <a:extLst>
-              <a:ext uri="{FF2B5EF4-FFF2-40B4-BE49-F238E27FC236}">
-                <a16:creationId xmlns:a16="http://schemas.microsoft.com/office/drawing/2014/main" id="{5FA7343D-ADAB-CB26-26BE-BCE357510971}"/>
-              </a:ext>
-            </a:extLst>
-          </p:cNvPr>
-          <p:cNvSpPr txBox="1"/>
-          <p:nvPr/>
-        </p:nvSpPr>
-        <p:spPr>
-          <a:xfrm>
-            <a:off x="21439680" y="13827276"/>
-            <a:ext cx="2039618" cy="584775"/>
-          </a:xfrm>
-          <a:prstGeom prst="rect">
-            <a:avLst/>
-          </a:prstGeom>
-          <a:noFill/>
-        </p:spPr>
-        <p:txBody>
-          <a:bodyPr wrap="square" rtlCol="0">
-            <a:spAutoFit/>
-          </a:bodyPr>
-          <a:lstStyle/>
-          <a:p>
-            <a:r>
-              <a:rPr lang="en-US" sz="1600" dirty="0"/>
-              <a:t>Response</a:t>
-            </a:r>
-          </a:p>
-          <a:p>
-            <a:r>
-              <a:rPr lang="en-US" sz="1600" dirty="0"/>
-              <a:t>metric</a:t>
+              <a:rPr lang="en-US" sz="1500" dirty="0"/>
+              <a:t> </a:t>
             </a:r>
           </a:p>
         </p:txBody>
       </p:sp>
     </p:spTree>
+    <p:extLst>
+      <p:ext uri="{BB962C8B-B14F-4D97-AF65-F5344CB8AC3E}">
+        <p14:creationId xmlns:p14="http://schemas.microsoft.com/office/powerpoint/2010/main" val="138087873"/>
+      </p:ext>
+    </p:extLst>
   </p:cSld>
   <p:clrMapOvr>
     <a:masterClrMapping/>

--- a/figures/fig5/fig5.pptx
+++ b/figures/fig5/fig5.pptx
@@ -258,7 +258,7 @@
       </p15:sldGuideLst>
     </p:ext>
     <p:ext uri="http://customooxmlschemas.google.com/">
-      <go:slidesCustomData xmlns:go="http://customooxmlschemas.google.com/" xmlns:ahyp="http://schemas.microsoft.com/office/drawing/2018/hyperlinkcolor" xmlns:p15="http://schemas.microsoft.com/office/powerpoint/2012/main" xmlns:p14="http://schemas.microsoft.com/office/powerpoint/2010/main" xmlns:com="http://schemas.openxmlformats.org/drawingml/2006/compatibility" xmlns:pvml="urn:schemas-microsoft-com:office:powerpoint" xmlns:v="urn:schemas-microsoft-com:vml" xmlns:o="urn:schemas-microsoft-com:office:office" xmlns:dgm="http://schemas.openxmlformats.org/drawingml/2006/diagram" xmlns:c="http://schemas.openxmlformats.org/drawingml/2006/chart" xmlns:mv="urn:schemas-microsoft-com:mac:vml" xmlns:mc="http://schemas.openxmlformats.org/markup-compatibility/2006" xmlns="" r:id="rId10" roundtripDataSignature="AMtx7mhiytGPk8UOxiAGs9KaAxakDbg4SQ=="/>
+      <go:slidesCustomData xmlns="" xmlns:mc="http://schemas.openxmlformats.org/markup-compatibility/2006" xmlns:mv="urn:schemas-microsoft-com:mac:vml" xmlns:c="http://schemas.openxmlformats.org/drawingml/2006/chart" xmlns:dgm="http://schemas.openxmlformats.org/drawingml/2006/diagram" xmlns:o="urn:schemas-microsoft-com:office:office" xmlns:v="urn:schemas-microsoft-com:vml" xmlns:pvml="urn:schemas-microsoft-com:office:powerpoint" xmlns:com="http://schemas.openxmlformats.org/drawingml/2006/compatibility" xmlns:p14="http://schemas.microsoft.com/office/powerpoint/2010/main" xmlns:p15="http://schemas.microsoft.com/office/powerpoint/2012/main" xmlns:ahyp="http://schemas.microsoft.com/office/drawing/2018/hyperlinkcolor" xmlns:go="http://customooxmlschemas.google.com/" r:id="rId10" roundtripDataSignature="AMtx7mhiytGPk8UOxiAGs9KaAxakDbg4SQ=="/>
     </p:ext>
   </p:extLst>
 </p:presentation>
@@ -11946,10 +11946,10 @@
       </p:graphicFrame>
       <p:pic>
         <p:nvPicPr>
-          <p:cNvPr id="3" name="Graphic 2">
+          <p:cNvPr id="4" name="Graphic 3">
             <a:extLst>
               <a:ext uri="{FF2B5EF4-FFF2-40B4-BE49-F238E27FC236}">
-                <a16:creationId xmlns:a16="http://schemas.microsoft.com/office/drawing/2014/main" id="{BD4FF4B5-F40C-1277-82C3-AC2200357785}"/>
+                <a16:creationId xmlns:a16="http://schemas.microsoft.com/office/drawing/2014/main" id="{8F51A865-9AF0-DCF9-2DB0-D95FF7F7F5E3}"/>
               </a:ext>
             </a:extLst>
           </p:cNvPr>
@@ -11966,15 +11966,15 @@
               </a:ext>
             </a:extLst>
           </a:blip>
-          <a:srcRect l="1363" r="1770" b="3275"/>
+          <a:srcRect l="2456" r="2381" b="3384"/>
           <a:stretch>
             <a:fillRect/>
           </a:stretch>
         </p:blipFill>
         <p:spPr>
           <a:xfrm>
-            <a:off x="498474" y="6511332"/>
-            <a:ext cx="35429825" cy="19244268"/>
+            <a:off x="898525" y="6511332"/>
+            <a:ext cx="34806618" cy="19222497"/>
           </a:xfrm>
           <a:prstGeom prst="rect">
             <a:avLst/>
@@ -12027,10 +12027,10 @@
       </p:grpSpPr>
       <p:pic>
         <p:nvPicPr>
-          <p:cNvPr id="19" name="Picture 18">
+          <p:cNvPr id="3" name="Picture 2">
             <a:extLst>
               <a:ext uri="{FF2B5EF4-FFF2-40B4-BE49-F238E27FC236}">
-                <a16:creationId xmlns:a16="http://schemas.microsoft.com/office/drawing/2014/main" id="{C5FD35D8-9E5D-55C8-F4D0-FA18897F521B}"/>
+                <a16:creationId xmlns:a16="http://schemas.microsoft.com/office/drawing/2014/main" id="{DD0162E0-59B8-7B8B-ED02-255376F103A1}"/>
               </a:ext>
             </a:extLst>
           </p:cNvPr>
@@ -12041,15 +12041,15 @@
         </p:nvPicPr>
         <p:blipFill>
           <a:blip r:embed="rId3"/>
-          <a:srcRect l="20408" t="14365" r="27480" b="21992"/>
+          <a:srcRect l="20775" t="14682" r="27841" b="20828"/>
           <a:stretch>
             <a:fillRect/>
           </a:stretch>
         </p:blipFill>
         <p:spPr>
           <a:xfrm>
-            <a:off x="9819833" y="16665358"/>
-            <a:ext cx="3334052" cy="2320069"/>
+            <a:off x="14745474" y="13603066"/>
+            <a:ext cx="3287448" cy="2350935"/>
           </a:xfrm>
           <a:prstGeom prst="rect">
             <a:avLst/>
@@ -12058,10 +12058,10 @@
       </p:pic>
       <p:pic>
         <p:nvPicPr>
-          <p:cNvPr id="23" name="Picture 22">
+          <p:cNvPr id="7" name="Picture 6">
             <a:extLst>
               <a:ext uri="{FF2B5EF4-FFF2-40B4-BE49-F238E27FC236}">
-                <a16:creationId xmlns:a16="http://schemas.microsoft.com/office/drawing/2014/main" id="{E9F90D9A-5BAA-A6AD-BF8D-427963088A92}"/>
+                <a16:creationId xmlns:a16="http://schemas.microsoft.com/office/drawing/2014/main" id="{3ECF94C6-D025-4D57-5918-244D62EEB09B}"/>
               </a:ext>
             </a:extLst>
           </p:cNvPr>
@@ -12072,15 +12072,15 @@
         </p:nvPicPr>
         <p:blipFill>
           <a:blip r:embed="rId4"/>
-          <a:srcRect l="21053" t="14440" r="26834" b="21916"/>
+          <a:srcRect l="20498" t="14067" r="27343" b="20754"/>
           <a:stretch>
             <a:fillRect/>
           </a:stretch>
         </p:blipFill>
         <p:spPr>
           <a:xfrm>
-            <a:off x="9861113" y="13595349"/>
-            <a:ext cx="3334052" cy="2320069"/>
+            <a:off x="9825131" y="16655403"/>
+            <a:ext cx="3337016" cy="2376037"/>
           </a:xfrm>
           <a:prstGeom prst="rect">
             <a:avLst/>
@@ -12089,10 +12089,10 @@
       </p:pic>
       <p:pic>
         <p:nvPicPr>
-          <p:cNvPr id="25" name="Picture 24">
+          <p:cNvPr id="5" name="Picture 4">
             <a:extLst>
               <a:ext uri="{FF2B5EF4-FFF2-40B4-BE49-F238E27FC236}">
-                <a16:creationId xmlns:a16="http://schemas.microsoft.com/office/drawing/2014/main" id="{E030E5A2-E92C-C40A-E253-ED39327BEB5E}"/>
+                <a16:creationId xmlns:a16="http://schemas.microsoft.com/office/drawing/2014/main" id="{C4DA5FE9-C991-90E3-A578-5EF68AA0BDAC}"/>
               </a:ext>
             </a:extLst>
           </p:cNvPr>
@@ -12103,15 +12103,15 @@
         </p:nvPicPr>
         <p:blipFill>
           <a:blip r:embed="rId5"/>
-          <a:srcRect l="20420" t="14440" r="27467" b="20905"/>
+          <a:srcRect l="20995" t="14136" r="27837" b="21373"/>
           <a:stretch>
             <a:fillRect/>
           </a:stretch>
         </p:blipFill>
         <p:spPr>
           <a:xfrm>
-            <a:off x="14722808" y="13595349"/>
-            <a:ext cx="3334052" cy="2356939"/>
+            <a:off x="14759031" y="16655403"/>
+            <a:ext cx="3273542" cy="2350936"/>
           </a:xfrm>
           <a:prstGeom prst="rect">
             <a:avLst/>
@@ -12120,10 +12120,10 @@
       </p:pic>
       <p:pic>
         <p:nvPicPr>
-          <p:cNvPr id="30" name="Picture 29">
+          <p:cNvPr id="9" name="Picture 8">
             <a:extLst>
               <a:ext uri="{FF2B5EF4-FFF2-40B4-BE49-F238E27FC236}">
-                <a16:creationId xmlns:a16="http://schemas.microsoft.com/office/drawing/2014/main" id="{091EEE0F-FACF-9C33-3851-7B6AC4A932BE}"/>
+                <a16:creationId xmlns:a16="http://schemas.microsoft.com/office/drawing/2014/main" id="{EDAE4FD2-6A9D-3558-4638-A72B39982F89}"/>
               </a:ext>
             </a:extLst>
           </p:cNvPr>
@@ -12134,15 +12134,15 @@
         </p:nvPicPr>
         <p:blipFill>
           <a:blip r:embed="rId6"/>
-          <a:srcRect l="21058" t="13906" r="27467" b="21992"/>
+          <a:srcRect l="20487" t="14680" r="28129" b="21888"/>
           <a:stretch>
             <a:fillRect/>
           </a:stretch>
         </p:blipFill>
         <p:spPr>
           <a:xfrm>
-            <a:off x="14763630" y="16648612"/>
-            <a:ext cx="3293230" cy="2336815"/>
+            <a:off x="9825131" y="13603066"/>
+            <a:ext cx="3287449" cy="2312352"/>
           </a:xfrm>
           <a:prstGeom prst="rect">
             <a:avLst/>
@@ -13027,7 +13027,7 @@
         </p:nvSpPr>
         <p:spPr>
           <a:xfrm>
-            <a:off x="8228247" y="18006348"/>
+            <a:off x="8228247" y="18003967"/>
             <a:ext cx="1684020" cy="292388"/>
           </a:xfrm>
           <a:prstGeom prst="rect">
@@ -13063,7 +13063,7 @@
         </p:nvSpPr>
         <p:spPr>
           <a:xfrm>
-            <a:off x="10101021" y="18990189"/>
+            <a:off x="10070064" y="18990189"/>
             <a:ext cx="548286" cy="292388"/>
           </a:xfrm>
           <a:prstGeom prst="rect">
@@ -13099,7 +13099,7 @@
         </p:nvSpPr>
         <p:spPr>
           <a:xfrm>
-            <a:off x="10752051" y="18990190"/>
+            <a:off x="10747289" y="18990190"/>
             <a:ext cx="548286" cy="292388"/>
           </a:xfrm>
           <a:prstGeom prst="rect">
@@ -13135,7 +13135,7 @@
         </p:nvSpPr>
         <p:spPr>
           <a:xfrm>
-            <a:off x="11407843" y="18990189"/>
+            <a:off x="11424511" y="18990189"/>
             <a:ext cx="548286" cy="292388"/>
           </a:xfrm>
           <a:prstGeom prst="rect">
@@ -13171,7 +13171,7 @@
         </p:nvSpPr>
         <p:spPr>
           <a:xfrm>
-            <a:off x="12056492" y="18990189"/>
+            <a:off x="12096973" y="18990189"/>
             <a:ext cx="548286" cy="292388"/>
           </a:xfrm>
           <a:prstGeom prst="rect">
@@ -13207,7 +13207,7 @@
         </p:nvSpPr>
         <p:spPr>
           <a:xfrm>
-            <a:off x="12712284" y="18990189"/>
+            <a:off x="12774197" y="18990189"/>
             <a:ext cx="548286" cy="292388"/>
           </a:xfrm>
           <a:prstGeom prst="rect">
@@ -13231,10 +13231,10 @@
       </p:sp>
       <p:sp>
         <p:nvSpPr>
-          <p:cNvPr id="98" name="TextBox 97">
+          <p:cNvPr id="99" name="TextBox 98">
             <a:extLst>
               <a:ext uri="{FF2B5EF4-FFF2-40B4-BE49-F238E27FC236}">
-                <a16:creationId xmlns:a16="http://schemas.microsoft.com/office/drawing/2014/main" id="{E996170D-5DB1-0391-6E7D-FA991E307AE3}"/>
+                <a16:creationId xmlns:a16="http://schemas.microsoft.com/office/drawing/2014/main" id="{F414A936-3BC7-E891-BB92-9B3809FBD6A5}"/>
               </a:ext>
             </a:extLst>
           </p:cNvPr>
@@ -13243,7 +13243,7 @@
         </p:nvSpPr>
         <p:spPr>
           <a:xfrm>
-            <a:off x="14873517" y="18990189"/>
+            <a:off x="15267074" y="18987808"/>
             <a:ext cx="548286" cy="292388"/>
           </a:xfrm>
           <a:prstGeom prst="rect">
@@ -13260,79 +13260,7 @@
             <a:pPr algn="ctr"/>
             <a:r>
               <a:rPr lang="en-US" sz="1300" dirty="0"/>
-              <a:t>-4</a:t>
-            </a:r>
-          </a:p>
-        </p:txBody>
-      </p:sp>
-      <p:sp>
-        <p:nvSpPr>
-          <p:cNvPr id="99" name="TextBox 98">
-            <a:extLst>
-              <a:ext uri="{FF2B5EF4-FFF2-40B4-BE49-F238E27FC236}">
-                <a16:creationId xmlns:a16="http://schemas.microsoft.com/office/drawing/2014/main" id="{F414A936-3BC7-E891-BB92-9B3809FBD6A5}"/>
-              </a:ext>
-            </a:extLst>
-          </p:cNvPr>
-          <p:cNvSpPr txBox="1"/>
-          <p:nvPr/>
-        </p:nvSpPr>
-        <p:spPr>
-          <a:xfrm>
-            <a:off x="15290885" y="18987808"/>
-            <a:ext cx="548286" cy="292388"/>
-          </a:xfrm>
-          <a:prstGeom prst="rect">
-            <a:avLst/>
-          </a:prstGeom>
-          <a:noFill/>
-        </p:spPr>
-        <p:txBody>
-          <a:bodyPr wrap="square" rtlCol="0">
-            <a:spAutoFit/>
-          </a:bodyPr>
-          <a:lstStyle/>
-          <a:p>
-            <a:pPr algn="ctr"/>
-            <a:r>
-              <a:rPr lang="en-US" sz="1300" dirty="0"/>
-              <a:t>-3</a:t>
-            </a:r>
-          </a:p>
-        </p:txBody>
-      </p:sp>
-      <p:sp>
-        <p:nvSpPr>
-          <p:cNvPr id="100" name="TextBox 99">
-            <a:extLst>
-              <a:ext uri="{FF2B5EF4-FFF2-40B4-BE49-F238E27FC236}">
-                <a16:creationId xmlns:a16="http://schemas.microsoft.com/office/drawing/2014/main" id="{608E0992-941F-BF95-1852-E0ED46760E5E}"/>
-              </a:ext>
-            </a:extLst>
-          </p:cNvPr>
-          <p:cNvSpPr txBox="1"/>
-          <p:nvPr/>
-        </p:nvSpPr>
-        <p:spPr>
-          <a:xfrm>
-            <a:off x="15711373" y="18990189"/>
-            <a:ext cx="548286" cy="292388"/>
-          </a:xfrm>
-          <a:prstGeom prst="rect">
-            <a:avLst/>
-          </a:prstGeom>
-          <a:noFill/>
-        </p:spPr>
-        <p:txBody>
-          <a:bodyPr wrap="square" rtlCol="0">
-            <a:spAutoFit/>
-          </a:bodyPr>
-          <a:lstStyle/>
-          <a:p>
-            <a:pPr algn="ctr"/>
-            <a:r>
-              <a:rPr lang="en-US" sz="1300" dirty="0"/>
-              <a:t>-2</a:t>
+              <a:t>-0.5</a:t>
             </a:r>
           </a:p>
         </p:txBody>
@@ -13351,43 +13279,7 @@
         </p:nvSpPr>
         <p:spPr>
           <a:xfrm>
-            <a:off x="16130814" y="18990189"/>
-            <a:ext cx="548286" cy="292388"/>
-          </a:xfrm>
-          <a:prstGeom prst="rect">
-            <a:avLst/>
-          </a:prstGeom>
-          <a:noFill/>
-        </p:spPr>
-        <p:txBody>
-          <a:bodyPr wrap="square" rtlCol="0">
-            <a:spAutoFit/>
-          </a:bodyPr>
-          <a:lstStyle/>
-          <a:p>
-            <a:pPr algn="ctr"/>
-            <a:r>
-              <a:rPr lang="en-US" sz="1300" dirty="0"/>
-              <a:t>-1</a:t>
-            </a:r>
-          </a:p>
-        </p:txBody>
-      </p:sp>
-      <p:sp>
-        <p:nvSpPr>
-          <p:cNvPr id="102" name="TextBox 101">
-            <a:extLst>
-              <a:ext uri="{FF2B5EF4-FFF2-40B4-BE49-F238E27FC236}">
-                <a16:creationId xmlns:a16="http://schemas.microsoft.com/office/drawing/2014/main" id="{14AFFCEA-8771-41F8-A544-AFCA8CE3F1F6}"/>
-              </a:ext>
-            </a:extLst>
-          </p:cNvPr>
-          <p:cNvSpPr txBox="1"/>
-          <p:nvPr/>
-        </p:nvSpPr>
-        <p:spPr>
-          <a:xfrm>
-            <a:off x="16552296" y="18990189"/>
+            <a:off x="16157008" y="18990189"/>
             <a:ext cx="548286" cy="292388"/>
           </a:xfrm>
           <a:prstGeom prst="rect">
@@ -13423,7 +13315,7 @@
         </p:nvSpPr>
         <p:spPr>
           <a:xfrm>
-            <a:off x="16973124" y="18990189"/>
+            <a:off x="17051707" y="18990189"/>
             <a:ext cx="548286" cy="292388"/>
           </a:xfrm>
           <a:prstGeom prst="rect">
@@ -13440,43 +13332,7 @@
             <a:pPr algn="ctr"/>
             <a:r>
               <a:rPr lang="en-US" sz="1300" dirty="0"/>
-              <a:t>1</a:t>
-            </a:r>
-          </a:p>
-        </p:txBody>
-      </p:sp>
-      <p:sp>
-        <p:nvSpPr>
-          <p:cNvPr id="104" name="TextBox 103">
-            <a:extLst>
-              <a:ext uri="{FF2B5EF4-FFF2-40B4-BE49-F238E27FC236}">
-                <a16:creationId xmlns:a16="http://schemas.microsoft.com/office/drawing/2014/main" id="{AFD91C31-EF3F-65AD-7292-B611138D877D}"/>
-              </a:ext>
-            </a:extLst>
-          </p:cNvPr>
-          <p:cNvSpPr txBox="1"/>
-          <p:nvPr/>
-        </p:nvSpPr>
-        <p:spPr>
-          <a:xfrm>
-            <a:off x="17390837" y="18990189"/>
-            <a:ext cx="548286" cy="292388"/>
-          </a:xfrm>
-          <a:prstGeom prst="rect">
-            <a:avLst/>
-          </a:prstGeom>
-          <a:noFill/>
-        </p:spPr>
-        <p:txBody>
-          <a:bodyPr wrap="square" rtlCol="0">
-            <a:spAutoFit/>
-          </a:bodyPr>
-          <a:lstStyle/>
-          <a:p>
-            <a:pPr algn="ctr"/>
-            <a:r>
-              <a:rPr lang="en-US" sz="1300" dirty="0"/>
-              <a:t>2</a:t>
+              <a:t>0.5</a:t>
             </a:r>
           </a:p>
         </p:txBody>
@@ -13495,7 +13351,7 @@
         </p:nvSpPr>
         <p:spPr>
           <a:xfrm>
-            <a:off x="17181412" y="15916569"/>
+            <a:off x="17190936" y="15916569"/>
             <a:ext cx="548286" cy="292388"/>
           </a:xfrm>
           <a:prstGeom prst="rect">
@@ -13531,7 +13387,7 @@
         </p:nvSpPr>
         <p:spPr>
           <a:xfrm>
-            <a:off x="16576110" y="15916569"/>
+            <a:off x="16590397" y="15916569"/>
             <a:ext cx="548286" cy="292388"/>
           </a:xfrm>
           <a:prstGeom prst="rect">
@@ -13567,7 +13423,7 @@
         </p:nvSpPr>
         <p:spPr>
           <a:xfrm>
-            <a:off x="15966046" y="15916569"/>
+            <a:off x="15992240" y="15916569"/>
             <a:ext cx="548286" cy="292388"/>
           </a:xfrm>
           <a:prstGeom prst="rect">
@@ -13603,7 +13459,7 @@
         </p:nvSpPr>
         <p:spPr>
           <a:xfrm>
-            <a:off x="15355982" y="15915419"/>
+            <a:off x="15398846" y="15915419"/>
             <a:ext cx="548286" cy="292388"/>
           </a:xfrm>
           <a:prstGeom prst="rect">
@@ -13639,7 +13495,7 @@
         </p:nvSpPr>
         <p:spPr>
           <a:xfrm>
-            <a:off x="14745474" y="15915419"/>
+            <a:off x="14795480" y="15915419"/>
             <a:ext cx="548286" cy="292388"/>
           </a:xfrm>
           <a:prstGeom prst="rect">
@@ -13675,7 +13531,7 @@
         </p:nvSpPr>
         <p:spPr>
           <a:xfrm>
-            <a:off x="12545433" y="15915419"/>
+            <a:off x="12547814" y="15915419"/>
             <a:ext cx="548286" cy="292388"/>
           </a:xfrm>
           <a:prstGeom prst="rect">
@@ -13711,7 +13567,7 @@
         </p:nvSpPr>
         <p:spPr>
           <a:xfrm>
-            <a:off x="11894402" y="15915419"/>
+            <a:off x="11896783" y="15915419"/>
             <a:ext cx="548286" cy="292388"/>
           </a:xfrm>
           <a:prstGeom prst="rect">
@@ -13783,7 +13639,7 @@
         </p:nvSpPr>
         <p:spPr>
           <a:xfrm>
-            <a:off x="10597103" y="15915419"/>
+            <a:off x="10599484" y="15915419"/>
             <a:ext cx="548286" cy="292388"/>
           </a:xfrm>
           <a:prstGeom prst="rect">
@@ -13819,7 +13675,7 @@
         </p:nvSpPr>
         <p:spPr>
           <a:xfrm>
-            <a:off x="9949073" y="15915419"/>
+            <a:off x="9951454" y="15915419"/>
             <a:ext cx="548286" cy="292388"/>
           </a:xfrm>
           <a:prstGeom prst="rect">
@@ -13856,7 +13712,7 @@
           <p:nvPr/>
         </p:nvPicPr>
         <p:blipFill>
-          <a:blip r:embed="rId6"/>
+          <a:blip r:embed="rId7"/>
           <a:srcRect l="73264" t="20922" r="9701" b="66305"/>
           <a:stretch>
             <a:fillRect/>
@@ -14028,7 +13884,7 @@
           <p:nvPr/>
         </p:nvPicPr>
         <p:blipFill>
-          <a:blip r:embed="rId6"/>
+          <a:blip r:embed="rId7"/>
           <a:srcRect l="73264" t="42542" r="9701" b="49130"/>
           <a:stretch>
             <a:fillRect/>

--- a/figures/fig5/fig5.pptx
+++ b/figures/fig5/fig5.pptx
@@ -258,7 +258,7 @@
       </p15:sldGuideLst>
     </p:ext>
     <p:ext uri="http://customooxmlschemas.google.com/">
-      <go:slidesCustomData xmlns="" xmlns:mc="http://schemas.openxmlformats.org/markup-compatibility/2006" xmlns:mv="urn:schemas-microsoft-com:mac:vml" xmlns:c="http://schemas.openxmlformats.org/drawingml/2006/chart" xmlns:dgm="http://schemas.openxmlformats.org/drawingml/2006/diagram" xmlns:o="urn:schemas-microsoft-com:office:office" xmlns:v="urn:schemas-microsoft-com:vml" xmlns:pvml="urn:schemas-microsoft-com:office:powerpoint" xmlns:com="http://schemas.openxmlformats.org/drawingml/2006/compatibility" xmlns:p14="http://schemas.microsoft.com/office/powerpoint/2010/main" xmlns:p15="http://schemas.microsoft.com/office/powerpoint/2012/main" xmlns:ahyp="http://schemas.microsoft.com/office/drawing/2018/hyperlinkcolor" xmlns:go="http://customooxmlschemas.google.com/" r:id="rId10" roundtripDataSignature="AMtx7mhiytGPk8UOxiAGs9KaAxakDbg4SQ=="/>
+      <go:slidesCustomData xmlns:go="http://customooxmlschemas.google.com/" xmlns:ahyp="http://schemas.microsoft.com/office/drawing/2018/hyperlinkcolor" xmlns:p15="http://schemas.microsoft.com/office/powerpoint/2012/main" xmlns:p14="http://schemas.microsoft.com/office/powerpoint/2010/main" xmlns:com="http://schemas.openxmlformats.org/drawingml/2006/compatibility" xmlns:pvml="urn:schemas-microsoft-com:office:powerpoint" xmlns:v="urn:schemas-microsoft-com:vml" xmlns:o="urn:schemas-microsoft-com:office:office" xmlns:dgm="http://schemas.openxmlformats.org/drawingml/2006/diagram" xmlns:c="http://schemas.openxmlformats.org/drawingml/2006/chart" xmlns:mv="urn:schemas-microsoft-com:mac:vml" xmlns:mc="http://schemas.openxmlformats.org/markup-compatibility/2006" xmlns="" r:id="rId10" roundtripDataSignature="AMtx7mhiytGPk8UOxiAGs9KaAxakDbg4SQ=="/>
     </p:ext>
   </p:extLst>
 </p:presentation>
@@ -11946,10 +11946,10 @@
       </p:graphicFrame>
       <p:pic>
         <p:nvPicPr>
-          <p:cNvPr id="4" name="Graphic 3">
+          <p:cNvPr id="3" name="Graphic 2">
             <a:extLst>
               <a:ext uri="{FF2B5EF4-FFF2-40B4-BE49-F238E27FC236}">
-                <a16:creationId xmlns:a16="http://schemas.microsoft.com/office/drawing/2014/main" id="{8F51A865-9AF0-DCF9-2DB0-D95FF7F7F5E3}"/>
+                <a16:creationId xmlns:a16="http://schemas.microsoft.com/office/drawing/2014/main" id="{3181FD7B-49B9-1912-A3B2-E9AA8D38179E}"/>
               </a:ext>
             </a:extLst>
           </p:cNvPr>
@@ -11966,15 +11966,15 @@
               </a:ext>
             </a:extLst>
           </a:blip>
-          <a:srcRect l="2456" r="2381" b="3384"/>
+          <a:srcRect l="1875" r="2361" b="3020"/>
           <a:stretch>
             <a:fillRect/>
           </a:stretch>
         </p:blipFill>
         <p:spPr>
           <a:xfrm>
-            <a:off x="898525" y="6511332"/>
-            <a:ext cx="34806618" cy="19222497"/>
+            <a:off x="685800" y="6511332"/>
+            <a:ext cx="35026600" cy="19295068"/>
           </a:xfrm>
           <a:prstGeom prst="rect">
             <a:avLst/>
@@ -12149,510 +12149,6 @@
           </a:prstGeom>
         </p:spPr>
       </p:pic>
-      <p:sp>
-        <p:nvSpPr>
-          <p:cNvPr id="31" name="TextBox 30">
-            <a:extLst>
-              <a:ext uri="{FF2B5EF4-FFF2-40B4-BE49-F238E27FC236}">
-                <a16:creationId xmlns:a16="http://schemas.microsoft.com/office/drawing/2014/main" id="{2410C392-4511-5330-48DC-1AA35F808C54}"/>
-              </a:ext>
-            </a:extLst>
-          </p:cNvPr>
-          <p:cNvSpPr txBox="1"/>
-          <p:nvPr/>
-        </p:nvSpPr>
-        <p:spPr>
-          <a:xfrm>
-            <a:off x="13130410" y="16761301"/>
-            <a:ext cx="1684020" cy="230832"/>
-          </a:xfrm>
-          <a:prstGeom prst="rect">
-            <a:avLst/>
-          </a:prstGeom>
-          <a:noFill/>
-        </p:spPr>
-        <p:txBody>
-          <a:bodyPr wrap="square" rtlCol="0">
-            <a:spAutoFit/>
-          </a:bodyPr>
-          <a:lstStyle/>
-          <a:p>
-            <a:pPr algn="r"/>
-            <a:r>
-              <a:rPr lang="en-US" sz="900" dirty="0"/>
-              <a:t>DNA age</a:t>
-            </a:r>
-          </a:p>
-        </p:txBody>
-      </p:sp>
-      <p:sp>
-        <p:nvSpPr>
-          <p:cNvPr id="32" name="TextBox 31">
-            <a:extLst>
-              <a:ext uri="{FF2B5EF4-FFF2-40B4-BE49-F238E27FC236}">
-                <a16:creationId xmlns:a16="http://schemas.microsoft.com/office/drawing/2014/main" id="{2F6171B2-4D8C-D163-8A37-A4B27E57624E}"/>
-              </a:ext>
-            </a:extLst>
-          </p:cNvPr>
-          <p:cNvSpPr txBox="1"/>
-          <p:nvPr/>
-        </p:nvSpPr>
-        <p:spPr>
-          <a:xfrm>
-            <a:off x="13130410" y="16899413"/>
-            <a:ext cx="1684020" cy="230832"/>
-          </a:xfrm>
-          <a:prstGeom prst="rect">
-            <a:avLst/>
-          </a:prstGeom>
-          <a:noFill/>
-        </p:spPr>
-        <p:txBody>
-          <a:bodyPr wrap="square" rtlCol="0">
-            <a:spAutoFit/>
-          </a:bodyPr>
-          <a:lstStyle/>
-          <a:p>
-            <a:pPr algn="r"/>
-            <a:r>
-              <a:rPr lang="en-US" sz="900" dirty="0"/>
-              <a:t>DNA age x prop.</a:t>
-            </a:r>
-          </a:p>
-        </p:txBody>
-      </p:sp>
-      <p:sp>
-        <p:nvSpPr>
-          <p:cNvPr id="36" name="TextBox 35">
-            <a:extLst>
-              <a:ext uri="{FF2B5EF4-FFF2-40B4-BE49-F238E27FC236}">
-                <a16:creationId xmlns:a16="http://schemas.microsoft.com/office/drawing/2014/main" id="{E8AA23AD-EAC5-6D61-AE97-77E3AF46CEEB}"/>
-              </a:ext>
-            </a:extLst>
-          </p:cNvPr>
-          <p:cNvSpPr txBox="1"/>
-          <p:nvPr/>
-        </p:nvSpPr>
-        <p:spPr>
-          <a:xfrm>
-            <a:off x="13130410" y="17037525"/>
-            <a:ext cx="1684020" cy="230832"/>
-          </a:xfrm>
-          <a:prstGeom prst="rect">
-            <a:avLst/>
-          </a:prstGeom>
-          <a:noFill/>
-        </p:spPr>
-        <p:txBody>
-          <a:bodyPr wrap="square" rtlCol="0">
-            <a:spAutoFit/>
-          </a:bodyPr>
-          <a:lstStyle/>
-          <a:p>
-            <a:pPr algn="r"/>
-            <a:r>
-              <a:rPr lang="en-US" sz="900" dirty="0"/>
-              <a:t>LINE age</a:t>
-            </a:r>
-          </a:p>
-        </p:txBody>
-      </p:sp>
-      <p:sp>
-        <p:nvSpPr>
-          <p:cNvPr id="37" name="TextBox 36">
-            <a:extLst>
-              <a:ext uri="{FF2B5EF4-FFF2-40B4-BE49-F238E27FC236}">
-                <a16:creationId xmlns:a16="http://schemas.microsoft.com/office/drawing/2014/main" id="{6015D9E4-B2C6-90A1-D193-3E8F30084E98}"/>
-              </a:ext>
-            </a:extLst>
-          </p:cNvPr>
-          <p:cNvSpPr txBox="1"/>
-          <p:nvPr/>
-        </p:nvSpPr>
-        <p:spPr>
-          <a:xfrm>
-            <a:off x="13130410" y="17175637"/>
-            <a:ext cx="1684020" cy="230832"/>
-          </a:xfrm>
-          <a:prstGeom prst="rect">
-            <a:avLst/>
-          </a:prstGeom>
-          <a:noFill/>
-        </p:spPr>
-        <p:txBody>
-          <a:bodyPr wrap="square" rtlCol="0">
-            <a:spAutoFit/>
-          </a:bodyPr>
-          <a:lstStyle/>
-          <a:p>
-            <a:pPr algn="r"/>
-            <a:r>
-              <a:rPr lang="en-US" sz="900" dirty="0"/>
-              <a:t>LTR age x prop.</a:t>
-            </a:r>
-          </a:p>
-        </p:txBody>
-      </p:sp>
-      <p:sp>
-        <p:nvSpPr>
-          <p:cNvPr id="38" name="TextBox 37">
-            <a:extLst>
-              <a:ext uri="{FF2B5EF4-FFF2-40B4-BE49-F238E27FC236}">
-                <a16:creationId xmlns:a16="http://schemas.microsoft.com/office/drawing/2014/main" id="{6D75525C-1F6A-1BDE-8836-B8462CB9EEFB}"/>
-              </a:ext>
-            </a:extLst>
-          </p:cNvPr>
-          <p:cNvSpPr txBox="1"/>
-          <p:nvPr/>
-        </p:nvSpPr>
-        <p:spPr>
-          <a:xfrm>
-            <a:off x="13130410" y="17313749"/>
-            <a:ext cx="1684020" cy="230832"/>
-          </a:xfrm>
-          <a:prstGeom prst="rect">
-            <a:avLst/>
-          </a:prstGeom>
-          <a:noFill/>
-        </p:spPr>
-        <p:txBody>
-          <a:bodyPr wrap="square" rtlCol="0">
-            <a:spAutoFit/>
-          </a:bodyPr>
-          <a:lstStyle/>
-          <a:p>
-            <a:pPr algn="r"/>
-            <a:r>
-              <a:rPr lang="en-US" sz="900" dirty="0"/>
-              <a:t>Others age</a:t>
-            </a:r>
-          </a:p>
-        </p:txBody>
-      </p:sp>
-      <p:sp>
-        <p:nvSpPr>
-          <p:cNvPr id="56" name="TextBox 55">
-            <a:extLst>
-              <a:ext uri="{FF2B5EF4-FFF2-40B4-BE49-F238E27FC236}">
-                <a16:creationId xmlns:a16="http://schemas.microsoft.com/office/drawing/2014/main" id="{B998515C-07B0-1DEC-8115-3443BD05BE68}"/>
-              </a:ext>
-            </a:extLst>
-          </p:cNvPr>
-          <p:cNvSpPr txBox="1"/>
-          <p:nvPr/>
-        </p:nvSpPr>
-        <p:spPr>
-          <a:xfrm>
-            <a:off x="13130410" y="17451861"/>
-            <a:ext cx="1684020" cy="230832"/>
-          </a:xfrm>
-          <a:prstGeom prst="rect">
-            <a:avLst/>
-          </a:prstGeom>
-          <a:noFill/>
-        </p:spPr>
-        <p:txBody>
-          <a:bodyPr wrap="square" rtlCol="0">
-            <a:spAutoFit/>
-          </a:bodyPr>
-          <a:lstStyle/>
-          <a:p>
-            <a:pPr algn="r"/>
-            <a:r>
-              <a:rPr lang="en-US" sz="900" dirty="0"/>
-              <a:t>Others age x prop.</a:t>
-            </a:r>
-          </a:p>
-        </p:txBody>
-      </p:sp>
-      <p:sp>
-        <p:nvSpPr>
-          <p:cNvPr id="58" name="TextBox 57">
-            <a:extLst>
-              <a:ext uri="{FF2B5EF4-FFF2-40B4-BE49-F238E27FC236}">
-                <a16:creationId xmlns:a16="http://schemas.microsoft.com/office/drawing/2014/main" id="{CA0E7F28-443B-A2AC-176D-7DBD7F83B072}"/>
-              </a:ext>
-            </a:extLst>
-          </p:cNvPr>
-          <p:cNvSpPr txBox="1"/>
-          <p:nvPr/>
-        </p:nvSpPr>
-        <p:spPr>
-          <a:xfrm>
-            <a:off x="13131877" y="17589973"/>
-            <a:ext cx="1684020" cy="230832"/>
-          </a:xfrm>
-          <a:prstGeom prst="rect">
-            <a:avLst/>
-          </a:prstGeom>
-          <a:noFill/>
-        </p:spPr>
-        <p:txBody>
-          <a:bodyPr wrap="square" rtlCol="0">
-            <a:spAutoFit/>
-          </a:bodyPr>
-          <a:lstStyle/>
-          <a:p>
-            <a:pPr algn="r"/>
-            <a:r>
-              <a:rPr lang="en-US" sz="900" dirty="0"/>
-              <a:t>SINE age</a:t>
-            </a:r>
-          </a:p>
-        </p:txBody>
-      </p:sp>
-      <p:sp>
-        <p:nvSpPr>
-          <p:cNvPr id="59" name="TextBox 58">
-            <a:extLst>
-              <a:ext uri="{FF2B5EF4-FFF2-40B4-BE49-F238E27FC236}">
-                <a16:creationId xmlns:a16="http://schemas.microsoft.com/office/drawing/2014/main" id="{E563B509-27EF-29EB-AB3D-4CEBF4EAA433}"/>
-              </a:ext>
-            </a:extLst>
-          </p:cNvPr>
-          <p:cNvSpPr txBox="1"/>
-          <p:nvPr/>
-        </p:nvSpPr>
-        <p:spPr>
-          <a:xfrm>
-            <a:off x="13130410" y="17728085"/>
-            <a:ext cx="1684020" cy="230832"/>
-          </a:xfrm>
-          <a:prstGeom prst="rect">
-            <a:avLst/>
-          </a:prstGeom>
-          <a:noFill/>
-        </p:spPr>
-        <p:txBody>
-          <a:bodyPr wrap="square" rtlCol="0">
-            <a:spAutoFit/>
-          </a:bodyPr>
-          <a:lstStyle/>
-          <a:p>
-            <a:pPr algn="r"/>
-            <a:r>
-              <a:rPr lang="en-US" sz="900" dirty="0"/>
-              <a:t>Unknown age</a:t>
-            </a:r>
-          </a:p>
-        </p:txBody>
-      </p:sp>
-      <p:sp>
-        <p:nvSpPr>
-          <p:cNvPr id="60" name="TextBox 59">
-            <a:extLst>
-              <a:ext uri="{FF2B5EF4-FFF2-40B4-BE49-F238E27FC236}">
-                <a16:creationId xmlns:a16="http://schemas.microsoft.com/office/drawing/2014/main" id="{178D3284-8479-B1EE-5C7D-DB0F0745DB66}"/>
-              </a:ext>
-            </a:extLst>
-          </p:cNvPr>
-          <p:cNvSpPr txBox="1"/>
-          <p:nvPr/>
-        </p:nvSpPr>
-        <p:spPr>
-          <a:xfrm>
-            <a:off x="13130410" y="17862249"/>
-            <a:ext cx="1684020" cy="230832"/>
-          </a:xfrm>
-          <a:prstGeom prst="rect">
-            <a:avLst/>
-          </a:prstGeom>
-          <a:noFill/>
-        </p:spPr>
-        <p:txBody>
-          <a:bodyPr wrap="square" rtlCol="0">
-            <a:spAutoFit/>
-          </a:bodyPr>
-          <a:lstStyle/>
-          <a:p>
-            <a:pPr algn="r"/>
-            <a:r>
-              <a:rPr lang="en-US" sz="900" dirty="0"/>
-              <a:t>Unknown age x prop.</a:t>
-            </a:r>
-          </a:p>
-        </p:txBody>
-      </p:sp>
-      <p:sp>
-        <p:nvSpPr>
-          <p:cNvPr id="61" name="TextBox 60">
-            <a:extLst>
-              <a:ext uri="{FF2B5EF4-FFF2-40B4-BE49-F238E27FC236}">
-                <a16:creationId xmlns:a16="http://schemas.microsoft.com/office/drawing/2014/main" id="{577AFB92-0CEE-50C0-1672-4EE0E521D42D}"/>
-              </a:ext>
-            </a:extLst>
-          </p:cNvPr>
-          <p:cNvSpPr txBox="1"/>
-          <p:nvPr/>
-        </p:nvSpPr>
-        <p:spPr>
-          <a:xfrm>
-            <a:off x="13130410" y="18003556"/>
-            <a:ext cx="1684020" cy="230832"/>
-          </a:xfrm>
-          <a:prstGeom prst="rect">
-            <a:avLst/>
-          </a:prstGeom>
-          <a:noFill/>
-        </p:spPr>
-        <p:txBody>
-          <a:bodyPr wrap="square" rtlCol="0">
-            <a:spAutoFit/>
-          </a:bodyPr>
-          <a:lstStyle/>
-          <a:p>
-            <a:pPr algn="r"/>
-            <a:r>
-              <a:rPr lang="en-US" sz="900" dirty="0"/>
-              <a:t>LINE proportion</a:t>
-            </a:r>
-          </a:p>
-        </p:txBody>
-      </p:sp>
-      <p:sp>
-        <p:nvSpPr>
-          <p:cNvPr id="62" name="TextBox 61">
-            <a:extLst>
-              <a:ext uri="{FF2B5EF4-FFF2-40B4-BE49-F238E27FC236}">
-                <a16:creationId xmlns:a16="http://schemas.microsoft.com/office/drawing/2014/main" id="{85611B5F-9927-2CE2-6145-5DB590DF5C7D}"/>
-              </a:ext>
-            </a:extLst>
-          </p:cNvPr>
-          <p:cNvSpPr txBox="1"/>
-          <p:nvPr/>
-        </p:nvSpPr>
-        <p:spPr>
-          <a:xfrm>
-            <a:off x="13131878" y="18142421"/>
-            <a:ext cx="1684020" cy="230832"/>
-          </a:xfrm>
-          <a:prstGeom prst="rect">
-            <a:avLst/>
-          </a:prstGeom>
-          <a:noFill/>
-        </p:spPr>
-        <p:txBody>
-          <a:bodyPr wrap="square" rtlCol="0">
-            <a:spAutoFit/>
-          </a:bodyPr>
-          <a:lstStyle/>
-          <a:p>
-            <a:pPr algn="r"/>
-            <a:r>
-              <a:rPr lang="en-US" sz="900" dirty="0"/>
-              <a:t>LTR proportion</a:t>
-            </a:r>
-          </a:p>
-        </p:txBody>
-      </p:sp>
-      <p:sp>
-        <p:nvSpPr>
-          <p:cNvPr id="63" name="TextBox 62">
-            <a:extLst>
-              <a:ext uri="{FF2B5EF4-FFF2-40B4-BE49-F238E27FC236}">
-                <a16:creationId xmlns:a16="http://schemas.microsoft.com/office/drawing/2014/main" id="{17073772-114C-4DCE-D32C-542270626B80}"/>
-              </a:ext>
-            </a:extLst>
-          </p:cNvPr>
-          <p:cNvSpPr txBox="1"/>
-          <p:nvPr/>
-        </p:nvSpPr>
-        <p:spPr>
-          <a:xfrm>
-            <a:off x="13130410" y="18278966"/>
-            <a:ext cx="1684020" cy="230832"/>
-          </a:xfrm>
-          <a:prstGeom prst="rect">
-            <a:avLst/>
-          </a:prstGeom>
-          <a:noFill/>
-        </p:spPr>
-        <p:txBody>
-          <a:bodyPr wrap="square" rtlCol="0">
-            <a:spAutoFit/>
-          </a:bodyPr>
-          <a:lstStyle/>
-          <a:p>
-            <a:pPr algn="r"/>
-            <a:r>
-              <a:rPr lang="en-US" sz="900" dirty="0"/>
-              <a:t>Others proportion</a:t>
-            </a:r>
-          </a:p>
-        </p:txBody>
-      </p:sp>
-      <p:sp>
-        <p:nvSpPr>
-          <p:cNvPr id="64" name="TextBox 63">
-            <a:extLst>
-              <a:ext uri="{FF2B5EF4-FFF2-40B4-BE49-F238E27FC236}">
-                <a16:creationId xmlns:a16="http://schemas.microsoft.com/office/drawing/2014/main" id="{05116E87-0CF0-64E3-69EF-9FA6D57711B3}"/>
-              </a:ext>
-            </a:extLst>
-          </p:cNvPr>
-          <p:cNvSpPr txBox="1"/>
-          <p:nvPr/>
-        </p:nvSpPr>
-        <p:spPr>
-          <a:xfrm>
-            <a:off x="13130410" y="18417078"/>
-            <a:ext cx="1684020" cy="230832"/>
-          </a:xfrm>
-          <a:prstGeom prst="rect">
-            <a:avLst/>
-          </a:prstGeom>
-          <a:noFill/>
-        </p:spPr>
-        <p:txBody>
-          <a:bodyPr wrap="square" rtlCol="0">
-            <a:spAutoFit/>
-          </a:bodyPr>
-          <a:lstStyle/>
-          <a:p>
-            <a:pPr algn="r"/>
-            <a:r>
-              <a:rPr lang="en-US" sz="900" dirty="0"/>
-              <a:t>SINE proportion</a:t>
-            </a:r>
-          </a:p>
-        </p:txBody>
-      </p:sp>
-      <p:sp>
-        <p:nvSpPr>
-          <p:cNvPr id="65" name="TextBox 64">
-            <a:extLst>
-              <a:ext uri="{FF2B5EF4-FFF2-40B4-BE49-F238E27FC236}">
-                <a16:creationId xmlns:a16="http://schemas.microsoft.com/office/drawing/2014/main" id="{1A21A716-E86B-D606-2E34-B1D75AE912AD}"/>
-              </a:ext>
-            </a:extLst>
-          </p:cNvPr>
-          <p:cNvSpPr txBox="1"/>
-          <p:nvPr/>
-        </p:nvSpPr>
-        <p:spPr>
-          <a:xfrm>
-            <a:off x="13130410" y="18553623"/>
-            <a:ext cx="1684020" cy="230832"/>
-          </a:xfrm>
-          <a:prstGeom prst="rect">
-            <a:avLst/>
-          </a:prstGeom>
-          <a:noFill/>
-        </p:spPr>
-        <p:txBody>
-          <a:bodyPr wrap="square" rtlCol="0">
-            <a:spAutoFit/>
-          </a:bodyPr>
-          <a:lstStyle/>
-          <a:p>
-            <a:pPr algn="r"/>
-            <a:r>
-              <a:rPr lang="en-US" sz="900" dirty="0"/>
-              <a:t>Unknown proportion</a:t>
-            </a:r>
-          </a:p>
-        </p:txBody>
-      </p:sp>
       <p:sp>
         <p:nvSpPr>
           <p:cNvPr id="66" name="TextBox 65">
@@ -14078,6 +13574,222 @@
           </a:p>
         </p:txBody>
       </p:sp>
+      <p:sp>
+        <p:nvSpPr>
+          <p:cNvPr id="11" name="TextBox 10">
+            <a:extLst>
+              <a:ext uri="{FF2B5EF4-FFF2-40B4-BE49-F238E27FC236}">
+                <a16:creationId xmlns:a16="http://schemas.microsoft.com/office/drawing/2014/main" id="{A2508C01-A1EB-EF40-5D95-D31A2E6C1253}"/>
+              </a:ext>
+            </a:extLst>
+          </p:cNvPr>
+          <p:cNvSpPr txBox="1"/>
+          <p:nvPr/>
+        </p:nvSpPr>
+        <p:spPr>
+          <a:xfrm>
+            <a:off x="13130407" y="16909659"/>
+            <a:ext cx="1684020" cy="292388"/>
+          </a:xfrm>
+          <a:prstGeom prst="rect">
+            <a:avLst/>
+          </a:prstGeom>
+          <a:noFill/>
+        </p:spPr>
+        <p:txBody>
+          <a:bodyPr wrap="square" rtlCol="0">
+            <a:spAutoFit/>
+          </a:bodyPr>
+          <a:lstStyle/>
+          <a:p>
+            <a:pPr algn="r"/>
+            <a:r>
+              <a:rPr lang="en-US" sz="1300" dirty="0"/>
+              <a:t>LTR age</a:t>
+            </a:r>
+          </a:p>
+        </p:txBody>
+      </p:sp>
+      <p:sp>
+        <p:nvSpPr>
+          <p:cNvPr id="12" name="TextBox 11">
+            <a:extLst>
+              <a:ext uri="{FF2B5EF4-FFF2-40B4-BE49-F238E27FC236}">
+                <a16:creationId xmlns:a16="http://schemas.microsoft.com/office/drawing/2014/main" id="{EA2A1E8E-AB97-6772-56B4-ADA17F0620FE}"/>
+              </a:ext>
+            </a:extLst>
+          </p:cNvPr>
+          <p:cNvSpPr txBox="1"/>
+          <p:nvPr/>
+        </p:nvSpPr>
+        <p:spPr>
+          <a:xfrm>
+            <a:off x="13130400" y="17203350"/>
+            <a:ext cx="1684020" cy="292388"/>
+          </a:xfrm>
+          <a:prstGeom prst="rect">
+            <a:avLst/>
+          </a:prstGeom>
+          <a:noFill/>
+        </p:spPr>
+        <p:txBody>
+          <a:bodyPr wrap="square" rtlCol="0">
+            <a:spAutoFit/>
+          </a:bodyPr>
+          <a:lstStyle/>
+          <a:p>
+            <a:pPr algn="r"/>
+            <a:r>
+              <a:rPr lang="en-US" sz="1300" dirty="0"/>
+              <a:t>SINE age</a:t>
+            </a:r>
+          </a:p>
+        </p:txBody>
+      </p:sp>
+      <p:sp>
+        <p:nvSpPr>
+          <p:cNvPr id="13" name="TextBox 12">
+            <a:extLst>
+              <a:ext uri="{FF2B5EF4-FFF2-40B4-BE49-F238E27FC236}">
+                <a16:creationId xmlns:a16="http://schemas.microsoft.com/office/drawing/2014/main" id="{554928CD-06A1-8F7D-A6DA-B87A71D6AE66}"/>
+              </a:ext>
+            </a:extLst>
+          </p:cNvPr>
+          <p:cNvSpPr txBox="1"/>
+          <p:nvPr/>
+        </p:nvSpPr>
+        <p:spPr>
+          <a:xfrm>
+            <a:off x="13130391" y="17495450"/>
+            <a:ext cx="1684020" cy="292388"/>
+          </a:xfrm>
+          <a:prstGeom prst="rect">
+            <a:avLst/>
+          </a:prstGeom>
+          <a:noFill/>
+        </p:spPr>
+        <p:txBody>
+          <a:bodyPr wrap="square" rtlCol="0">
+            <a:spAutoFit/>
+          </a:bodyPr>
+          <a:lstStyle/>
+          <a:p>
+            <a:pPr algn="r"/>
+            <a:r>
+              <a:rPr lang="en-US" sz="1300" dirty="0"/>
+              <a:t>Unknown age</a:t>
+            </a:r>
+          </a:p>
+        </p:txBody>
+      </p:sp>
+      <p:sp>
+        <p:nvSpPr>
+          <p:cNvPr id="14" name="TextBox 13">
+            <a:extLst>
+              <a:ext uri="{FF2B5EF4-FFF2-40B4-BE49-F238E27FC236}">
+                <a16:creationId xmlns:a16="http://schemas.microsoft.com/office/drawing/2014/main" id="{E94EA363-67A1-881C-8196-E8318DC3ED99}"/>
+              </a:ext>
+            </a:extLst>
+          </p:cNvPr>
+          <p:cNvSpPr txBox="1"/>
+          <p:nvPr/>
+        </p:nvSpPr>
+        <p:spPr>
+          <a:xfrm>
+            <a:off x="13130388" y="17789136"/>
+            <a:ext cx="1684020" cy="292388"/>
+          </a:xfrm>
+          <a:prstGeom prst="rect">
+            <a:avLst/>
+          </a:prstGeom>
+          <a:noFill/>
+        </p:spPr>
+        <p:txBody>
+          <a:bodyPr wrap="square" rtlCol="0">
+            <a:spAutoFit/>
+          </a:bodyPr>
+          <a:lstStyle/>
+          <a:p>
+            <a:pPr algn="r"/>
+            <a:r>
+              <a:rPr lang="en-US" sz="1300" dirty="0"/>
+              <a:t>LTR proportion</a:t>
+            </a:r>
+          </a:p>
+        </p:txBody>
+      </p:sp>
+      <p:sp>
+        <p:nvSpPr>
+          <p:cNvPr id="15" name="TextBox 14">
+            <a:extLst>
+              <a:ext uri="{FF2B5EF4-FFF2-40B4-BE49-F238E27FC236}">
+                <a16:creationId xmlns:a16="http://schemas.microsoft.com/office/drawing/2014/main" id="{6C8F59F4-368F-732E-E11F-DB453E0F54B9}"/>
+              </a:ext>
+            </a:extLst>
+          </p:cNvPr>
+          <p:cNvSpPr txBox="1"/>
+          <p:nvPr/>
+        </p:nvSpPr>
+        <p:spPr>
+          <a:xfrm>
+            <a:off x="13130381" y="18082830"/>
+            <a:ext cx="1684020" cy="292388"/>
+          </a:xfrm>
+          <a:prstGeom prst="rect">
+            <a:avLst/>
+          </a:prstGeom>
+          <a:noFill/>
+        </p:spPr>
+        <p:txBody>
+          <a:bodyPr wrap="square" rtlCol="0">
+            <a:spAutoFit/>
+          </a:bodyPr>
+          <a:lstStyle/>
+          <a:p>
+            <a:pPr algn="r"/>
+            <a:r>
+              <a:rPr lang="en-US" sz="1300" dirty="0"/>
+              <a:t>Others proportion</a:t>
+            </a:r>
+          </a:p>
+        </p:txBody>
+      </p:sp>
+      <p:sp>
+        <p:nvSpPr>
+          <p:cNvPr id="16" name="TextBox 15">
+            <a:extLst>
+              <a:ext uri="{FF2B5EF4-FFF2-40B4-BE49-F238E27FC236}">
+                <a16:creationId xmlns:a16="http://schemas.microsoft.com/office/drawing/2014/main" id="{22485558-E7B8-7461-F722-2E4799B7D271}"/>
+              </a:ext>
+            </a:extLst>
+          </p:cNvPr>
+          <p:cNvSpPr txBox="1"/>
+          <p:nvPr/>
+        </p:nvSpPr>
+        <p:spPr>
+          <a:xfrm>
+            <a:off x="13130372" y="18373339"/>
+            <a:ext cx="1684020" cy="292388"/>
+          </a:xfrm>
+          <a:prstGeom prst="rect">
+            <a:avLst/>
+          </a:prstGeom>
+          <a:noFill/>
+        </p:spPr>
+        <p:txBody>
+          <a:bodyPr wrap="square" rtlCol="0">
+            <a:spAutoFit/>
+          </a:bodyPr>
+          <a:lstStyle/>
+          <a:p>
+            <a:pPr algn="r"/>
+            <a:r>
+              <a:rPr lang="en-US" sz="1300" dirty="0"/>
+              <a:t>Unknow proportion</a:t>
+            </a:r>
+          </a:p>
+        </p:txBody>
+      </p:sp>
     </p:spTree>
     <p:extLst>
       <p:ext uri="{BB962C8B-B14F-4D97-AF65-F5344CB8AC3E}">

--- a/figures/fig5/fig5.pptx
+++ b/figures/fig5/fig5.pptx
@@ -258,7 +258,7 @@
       </p15:sldGuideLst>
     </p:ext>
     <p:ext uri="http://customooxmlschemas.google.com/">
-      <go:slidesCustomData xmlns:go="http://customooxmlschemas.google.com/" xmlns:ahyp="http://schemas.microsoft.com/office/drawing/2018/hyperlinkcolor" xmlns:p15="http://schemas.microsoft.com/office/powerpoint/2012/main" xmlns:p14="http://schemas.microsoft.com/office/powerpoint/2010/main" xmlns:com="http://schemas.openxmlformats.org/drawingml/2006/compatibility" xmlns:pvml="urn:schemas-microsoft-com:office:powerpoint" xmlns:v="urn:schemas-microsoft-com:vml" xmlns:o="urn:schemas-microsoft-com:office:office" xmlns:dgm="http://schemas.openxmlformats.org/drawingml/2006/diagram" xmlns:c="http://schemas.openxmlformats.org/drawingml/2006/chart" xmlns:mv="urn:schemas-microsoft-com:mac:vml" xmlns:mc="http://schemas.openxmlformats.org/markup-compatibility/2006" xmlns="" r:id="rId10" roundtripDataSignature="AMtx7mhiytGPk8UOxiAGs9KaAxakDbg4SQ=="/>
+      <go:slidesCustomData xmlns="" xmlns:mc="http://schemas.openxmlformats.org/markup-compatibility/2006" xmlns:mv="urn:schemas-microsoft-com:mac:vml" xmlns:c="http://schemas.openxmlformats.org/drawingml/2006/chart" xmlns:dgm="http://schemas.openxmlformats.org/drawingml/2006/diagram" xmlns:o="urn:schemas-microsoft-com:office:office" xmlns:v="urn:schemas-microsoft-com:vml" xmlns:pvml="urn:schemas-microsoft-com:office:powerpoint" xmlns:com="http://schemas.openxmlformats.org/drawingml/2006/compatibility" xmlns:p14="http://schemas.microsoft.com/office/powerpoint/2010/main" xmlns:p15="http://schemas.microsoft.com/office/powerpoint/2012/main" xmlns:ahyp="http://schemas.microsoft.com/office/drawing/2018/hyperlinkcolor" xmlns:go="http://customooxmlschemas.google.com/" r:id="rId10" roundtripDataSignature="AMtx7mhiytGPk8UOxiAGs9KaAxakDbg4SQ=="/>
     </p:ext>
   </p:extLst>
 </p:presentation>
@@ -11818,138 +11818,12 @@
           <a:chExt cx="0" cy="0"/>
         </a:xfrm>
       </p:grpSpPr>
-      <p:graphicFrame>
-        <p:nvGraphicFramePr>
-          <p:cNvPr id="6" name="Object 5">
+      <p:pic>
+        <p:nvPicPr>
+          <p:cNvPr id="8" name="Graphic 7">
             <a:extLst>
               <a:ext uri="{FF2B5EF4-FFF2-40B4-BE49-F238E27FC236}">
-                <a16:creationId xmlns:a16="http://schemas.microsoft.com/office/drawing/2014/main" id="{09CAA071-A88A-9345-9C5E-670D89893124}"/>
-              </a:ext>
-            </a:extLst>
-          </p:cNvPr>
-          <p:cNvGraphicFramePr>
-            <a:graphicFrameLocks noChangeAspect="1"/>
-          </p:cNvGraphicFramePr>
-          <p:nvPr>
-            <p:extLst>
-              <p:ext uri="{D42A27DB-BD31-4B8C-83A1-F6EECF244321}">
-                <p14:modId xmlns:p14="http://schemas.microsoft.com/office/powerpoint/2010/main" val="730037387"/>
-              </p:ext>
-            </p:extLst>
-          </p:nvPr>
-        </p:nvGraphicFramePr>
-        <p:xfrm>
-          <a:off x="98425" y="98425"/>
-          <a:ext cx="400050" cy="514350"/>
-        </p:xfrm>
-        <a:graphic>
-          <a:graphicData uri="http://schemas.openxmlformats.org/presentationml/2006/ole">
-            <mc:AlternateContent xmlns:mc="http://schemas.openxmlformats.org/markup-compatibility/2006">
-              <mc:Choice xmlns:v="urn:schemas-microsoft-com:vml" Requires="v">
-                <p:oleObj name="Packager Shell Object" showAsIcon="1" r:id="rId2" imgW="400069" imgH="514350" progId="Package">
-                  <p:embed/>
-                </p:oleObj>
-              </mc:Choice>
-              <mc:Fallback>
-                <p:oleObj name="Packager Shell Object" showAsIcon="1" r:id="rId2" imgW="400069" imgH="514350" progId="Package">
-                  <p:embed/>
-                  <p:pic>
-                    <p:nvPicPr>
-                      <p:cNvPr id="0" name=""/>
-                      <p:cNvPicPr/>
-                      <p:nvPr/>
-                    </p:nvPicPr>
-                    <p:blipFill>
-                      <a:blip r:embed="rId3"/>
-                      <a:stretch>
-                        <a:fillRect/>
-                      </a:stretch>
-                    </p:blipFill>
-                    <p:spPr>
-                      <a:xfrm>
-                        <a:off x="98425" y="98425"/>
-                        <a:ext cx="400050" cy="514350"/>
-                      </a:xfrm>
-                      <a:prstGeom prst="rect">
-                        <a:avLst/>
-                      </a:prstGeom>
-                    </p:spPr>
-                  </p:pic>
-                </p:oleObj>
-              </mc:Fallback>
-            </mc:AlternateContent>
-          </a:graphicData>
-        </a:graphic>
-      </p:graphicFrame>
-      <p:graphicFrame>
-        <p:nvGraphicFramePr>
-          <p:cNvPr id="7" name="Object 6">
-            <a:extLst>
-              <a:ext uri="{FF2B5EF4-FFF2-40B4-BE49-F238E27FC236}">
-                <a16:creationId xmlns:a16="http://schemas.microsoft.com/office/drawing/2014/main" id="{86D2717A-0DF5-7447-97FA-7EE5E471C504}"/>
-              </a:ext>
-            </a:extLst>
-          </p:cNvPr>
-          <p:cNvGraphicFramePr>
-            <a:graphicFrameLocks noChangeAspect="1"/>
-          </p:cNvGraphicFramePr>
-          <p:nvPr>
-            <p:extLst>
-              <p:ext uri="{D42A27DB-BD31-4B8C-83A1-F6EECF244321}">
-                <p14:modId xmlns:p14="http://schemas.microsoft.com/office/powerpoint/2010/main" val="1662366214"/>
-              </p:ext>
-            </p:extLst>
-          </p:nvPr>
-        </p:nvGraphicFramePr>
-        <p:xfrm>
-          <a:off x="98425" y="98425"/>
-          <a:ext cx="400050" cy="514350"/>
-        </p:xfrm>
-        <a:graphic>
-          <a:graphicData uri="http://schemas.openxmlformats.org/presentationml/2006/ole">
-            <mc:AlternateContent xmlns:mc="http://schemas.openxmlformats.org/markup-compatibility/2006">
-              <mc:Choice xmlns:v="urn:schemas-microsoft-com:vml" Requires="v">
-                <p:oleObj name="Packager Shell Object" showAsIcon="1" r:id="rId4" imgW="400069" imgH="514350" progId="Package">
-                  <p:embed/>
-                </p:oleObj>
-              </mc:Choice>
-              <mc:Fallback>
-                <p:oleObj name="Packager Shell Object" showAsIcon="1" r:id="rId4" imgW="400069" imgH="514350" progId="Package">
-                  <p:embed/>
-                  <p:pic>
-                    <p:nvPicPr>
-                      <p:cNvPr id="0" name=""/>
-                      <p:cNvPicPr/>
-                      <p:nvPr/>
-                    </p:nvPicPr>
-                    <p:blipFill>
-                      <a:blip r:embed="rId5"/>
-                      <a:stretch>
-                        <a:fillRect/>
-                      </a:stretch>
-                    </p:blipFill>
-                    <p:spPr>
-                      <a:xfrm>
-                        <a:off x="98425" y="98425"/>
-                        <a:ext cx="400050" cy="514350"/>
-                      </a:xfrm>
-                      <a:prstGeom prst="rect">
-                        <a:avLst/>
-                      </a:prstGeom>
-                    </p:spPr>
-                  </p:pic>
-                </p:oleObj>
-              </mc:Fallback>
-            </mc:AlternateContent>
-          </a:graphicData>
-        </a:graphic>
-      </p:graphicFrame>
-      <p:pic>
-        <p:nvPicPr>
-          <p:cNvPr id="3" name="Graphic 2">
-            <a:extLst>
-              <a:ext uri="{FF2B5EF4-FFF2-40B4-BE49-F238E27FC236}">
-                <a16:creationId xmlns:a16="http://schemas.microsoft.com/office/drawing/2014/main" id="{3181FD7B-49B9-1912-A3B2-E9AA8D38179E}"/>
+                <a16:creationId xmlns:a16="http://schemas.microsoft.com/office/drawing/2014/main" id="{9DCDA273-58A3-0ADF-015A-A5AC387CCDF8}"/>
               </a:ext>
             </a:extLst>
           </p:cNvPr>
@@ -11962,19 +11836,19 @@
           <a:blip>
             <a:extLst>
               <a:ext uri="{96DAC541-7B7A-43D3-8B79-37D633B846F1}">
-                <asvg:svgBlip xmlns:asvg="http://schemas.microsoft.com/office/drawing/2016/SVG/main" r:embed="rId6"/>
+                <asvg:svgBlip xmlns:asvg="http://schemas.microsoft.com/office/drawing/2016/SVG/main" r:embed="rId2"/>
               </a:ext>
             </a:extLst>
           </a:blip>
-          <a:srcRect l="1875" r="2361" b="3020"/>
+          <a:srcRect l="2083" r="2499" b="3275"/>
           <a:stretch>
             <a:fillRect/>
           </a:stretch>
         </p:blipFill>
         <p:spPr>
           <a:xfrm>
-            <a:off x="685800" y="6511332"/>
-            <a:ext cx="35026600" cy="19295068"/>
+            <a:off x="762000" y="6511332"/>
+            <a:ext cx="34899600" cy="19244268"/>
           </a:xfrm>
           <a:prstGeom prst="rect">
             <a:avLst/>
@@ -12027,6 +11901,99 @@
       </p:grpSpPr>
       <p:pic>
         <p:nvPicPr>
+          <p:cNvPr id="19" name="Picture 18">
+            <a:extLst>
+              <a:ext uri="{FF2B5EF4-FFF2-40B4-BE49-F238E27FC236}">
+                <a16:creationId xmlns:a16="http://schemas.microsoft.com/office/drawing/2014/main" id="{A924191E-9E42-0B31-A87F-B0D12F02A916}"/>
+              </a:ext>
+            </a:extLst>
+          </p:cNvPr>
+          <p:cNvPicPr>
+            <a:picLocks noChangeAspect="1"/>
+          </p:cNvPicPr>
+          <p:nvPr/>
+        </p:nvPicPr>
+        <p:blipFill>
+          <a:blip r:embed="rId3"/>
+          <a:srcRect l="20748" t="14125" r="27867" b="20971"/>
+          <a:stretch>
+            <a:fillRect/>
+          </a:stretch>
+        </p:blipFill>
+        <p:spPr>
+          <a:xfrm>
+            <a:off x="14745029" y="16655403"/>
+            <a:ext cx="3287543" cy="2366014"/>
+          </a:xfrm>
+          <a:prstGeom prst="rect">
+            <a:avLst/>
+          </a:prstGeom>
+        </p:spPr>
+      </p:pic>
+      <p:pic>
+        <p:nvPicPr>
+          <p:cNvPr id="17" name="Picture 16">
+            <a:extLst>
+              <a:ext uri="{FF2B5EF4-FFF2-40B4-BE49-F238E27FC236}">
+                <a16:creationId xmlns:a16="http://schemas.microsoft.com/office/drawing/2014/main" id="{E7929BBC-E634-1196-CF3A-F3BB1498607D}"/>
+              </a:ext>
+            </a:extLst>
+          </p:cNvPr>
+          <p:cNvPicPr>
+            <a:picLocks noChangeAspect="1"/>
+          </p:cNvPicPr>
+          <p:nvPr/>
+        </p:nvPicPr>
+        <p:blipFill>
+          <a:blip r:embed="rId4"/>
+          <a:srcRect l="20782" t="13666" r="27833" b="21431"/>
+          <a:stretch>
+            <a:fillRect/>
+          </a:stretch>
+        </p:blipFill>
+        <p:spPr>
+          <a:xfrm>
+            <a:off x="9842914" y="16640325"/>
+            <a:ext cx="3287449" cy="2366014"/>
+          </a:xfrm>
+          <a:prstGeom prst="rect">
+            <a:avLst/>
+          </a:prstGeom>
+        </p:spPr>
+      </p:pic>
+      <p:pic>
+        <p:nvPicPr>
+          <p:cNvPr id="4" name="Picture 3">
+            <a:extLst>
+              <a:ext uri="{FF2B5EF4-FFF2-40B4-BE49-F238E27FC236}">
+                <a16:creationId xmlns:a16="http://schemas.microsoft.com/office/drawing/2014/main" id="{7F54D1E6-3673-416F-114C-0B40C0034E87}"/>
+              </a:ext>
+            </a:extLst>
+          </p:cNvPr>
+          <p:cNvPicPr>
+            <a:picLocks noChangeAspect="1"/>
+          </p:cNvPicPr>
+          <p:nvPr/>
+        </p:nvPicPr>
+        <p:blipFill>
+          <a:blip r:embed="rId5"/>
+          <a:srcRect l="20726" t="14629" r="27888" b="21940"/>
+          <a:stretch>
+            <a:fillRect/>
+          </a:stretch>
+        </p:blipFill>
+        <p:spPr>
+          <a:xfrm>
+            <a:off x="9842922" y="13601759"/>
+            <a:ext cx="3287449" cy="2312353"/>
+          </a:xfrm>
+          <a:prstGeom prst="rect">
+            <a:avLst/>
+          </a:prstGeom>
+        </p:spPr>
+      </p:pic>
+      <p:pic>
+        <p:nvPicPr>
           <p:cNvPr id="3" name="Picture 2">
             <a:extLst>
               <a:ext uri="{FF2B5EF4-FFF2-40B4-BE49-F238E27FC236}">
@@ -12040,7 +12007,7 @@
           <p:nvPr/>
         </p:nvPicPr>
         <p:blipFill>
-          <a:blip r:embed="rId3"/>
+          <a:blip r:embed="rId6"/>
           <a:srcRect l="20775" t="14682" r="27841" b="20828"/>
           <a:stretch>
             <a:fillRect/>
@@ -12050,99 +12017,6 @@
           <a:xfrm>
             <a:off x="14745474" y="13603066"/>
             <a:ext cx="3287448" cy="2350935"/>
-          </a:xfrm>
-          <a:prstGeom prst="rect">
-            <a:avLst/>
-          </a:prstGeom>
-        </p:spPr>
-      </p:pic>
-      <p:pic>
-        <p:nvPicPr>
-          <p:cNvPr id="7" name="Picture 6">
-            <a:extLst>
-              <a:ext uri="{FF2B5EF4-FFF2-40B4-BE49-F238E27FC236}">
-                <a16:creationId xmlns:a16="http://schemas.microsoft.com/office/drawing/2014/main" id="{3ECF94C6-D025-4D57-5918-244D62EEB09B}"/>
-              </a:ext>
-            </a:extLst>
-          </p:cNvPr>
-          <p:cNvPicPr>
-            <a:picLocks noChangeAspect="1"/>
-          </p:cNvPicPr>
-          <p:nvPr/>
-        </p:nvPicPr>
-        <p:blipFill>
-          <a:blip r:embed="rId4"/>
-          <a:srcRect l="20498" t="14067" r="27343" b="20754"/>
-          <a:stretch>
-            <a:fillRect/>
-          </a:stretch>
-        </p:blipFill>
-        <p:spPr>
-          <a:xfrm>
-            <a:off x="9825131" y="16655403"/>
-            <a:ext cx="3337016" cy="2376037"/>
-          </a:xfrm>
-          <a:prstGeom prst="rect">
-            <a:avLst/>
-          </a:prstGeom>
-        </p:spPr>
-      </p:pic>
-      <p:pic>
-        <p:nvPicPr>
-          <p:cNvPr id="5" name="Picture 4">
-            <a:extLst>
-              <a:ext uri="{FF2B5EF4-FFF2-40B4-BE49-F238E27FC236}">
-                <a16:creationId xmlns:a16="http://schemas.microsoft.com/office/drawing/2014/main" id="{C4DA5FE9-C991-90E3-A578-5EF68AA0BDAC}"/>
-              </a:ext>
-            </a:extLst>
-          </p:cNvPr>
-          <p:cNvPicPr>
-            <a:picLocks noChangeAspect="1"/>
-          </p:cNvPicPr>
-          <p:nvPr/>
-        </p:nvPicPr>
-        <p:blipFill>
-          <a:blip r:embed="rId5"/>
-          <a:srcRect l="20995" t="14136" r="27837" b="21373"/>
-          <a:stretch>
-            <a:fillRect/>
-          </a:stretch>
-        </p:blipFill>
-        <p:spPr>
-          <a:xfrm>
-            <a:off x="14759031" y="16655403"/>
-            <a:ext cx="3273542" cy="2350936"/>
-          </a:xfrm>
-          <a:prstGeom prst="rect">
-            <a:avLst/>
-          </a:prstGeom>
-        </p:spPr>
-      </p:pic>
-      <p:pic>
-        <p:nvPicPr>
-          <p:cNvPr id="9" name="Picture 8">
-            <a:extLst>
-              <a:ext uri="{FF2B5EF4-FFF2-40B4-BE49-F238E27FC236}">
-                <a16:creationId xmlns:a16="http://schemas.microsoft.com/office/drawing/2014/main" id="{EDAE4FD2-6A9D-3558-4638-A72B39982F89}"/>
-              </a:ext>
-            </a:extLst>
-          </p:cNvPr>
-          <p:cNvPicPr>
-            <a:picLocks noChangeAspect="1"/>
-          </p:cNvPicPr>
-          <p:nvPr/>
-        </p:nvPicPr>
-        <p:blipFill>
-          <a:blip r:embed="rId6"/>
-          <a:srcRect l="20487" t="14680" r="28129" b="21888"/>
-          <a:stretch>
-            <a:fillRect/>
-          </a:stretch>
-        </p:blipFill>
-        <p:spPr>
-          <a:xfrm>
-            <a:off x="9825131" y="13603066"/>
-            <a:ext cx="3287449" cy="2312352"/>
           </a:xfrm>
           <a:prstGeom prst="rect">
             <a:avLst/>
@@ -13790,6 +13664,37 @@
           </a:p>
         </p:txBody>
       </p:sp>
+      <p:pic>
+        <p:nvPicPr>
+          <p:cNvPr id="8" name="Picture 7">
+            <a:extLst>
+              <a:ext uri="{FF2B5EF4-FFF2-40B4-BE49-F238E27FC236}">
+                <a16:creationId xmlns:a16="http://schemas.microsoft.com/office/drawing/2014/main" id="{EBF2174C-B935-8CA4-17F6-8C47D7C6C328}"/>
+              </a:ext>
+            </a:extLst>
+          </p:cNvPr>
+          <p:cNvPicPr>
+            <a:picLocks noChangeAspect="1"/>
+          </p:cNvPicPr>
+          <p:nvPr/>
+        </p:nvPicPr>
+        <p:blipFill>
+          <a:blip r:embed="rId8"/>
+          <a:srcRect l="20748" t="14612" r="27868" b="20898"/>
+          <a:stretch>
+            <a:fillRect/>
+          </a:stretch>
+        </p:blipFill>
+        <p:spPr>
+          <a:xfrm>
+            <a:off x="14745124" y="13601759"/>
+            <a:ext cx="3287449" cy="2350935"/>
+          </a:xfrm>
+          <a:prstGeom prst="rect">
+            <a:avLst/>
+          </a:prstGeom>
+        </p:spPr>
+      </p:pic>
     </p:spTree>
     <p:extLst>
       <p:ext uri="{BB962C8B-B14F-4D97-AF65-F5344CB8AC3E}">
